--- a/PDP_group24.pptx
+++ b/PDP_group24.pptx
@@ -29798,7 +29798,7 @@
                   <a:srgbClr val="00B0F0"/>
                 </a:solidFill>
               </a:rPr>
-              <a:t>How we proved the masking actually works, before touching silicon</a:t>
+              <a:t>How we proved the masking works, in simulation and on hardware</a:t>
             </a:r>
           </a:p>
           <a:p>
@@ -29912,7 +29912,7 @@
                   <a:srgbClr val="555555"/>
                 </a:solidFill>
               </a:rPr>
-              <a:t>Why simulation: no board at design time. The model isolates the data-dependent switching at the register, de-risking the RTL ahead of the CW305 hardware campaign (Rishi's track).</a:t>
+              <a:t>Why simulation first: it isolates the register's switching with no analog noise, giving fast feedback in the RTL loop, alongside Rishi's CW305 hardware validation.</a:t>
             </a:r>
           </a:p>
         </p:txBody>

--- a/PDP_group24.pptx
+++ b/PDP_group24.pptx
@@ -35108,36 +35108,238 @@
           </a:p>
         </p:txBody>
       </p:sp>
-      <p:pic>
-        <p:nvPicPr>
-          <p:cNvPr id="2" name="Picture 1">
-            <a:extLst>
-              <a:ext uri="{FF2B5EF4-FFF2-40B4-BE49-F238E27FC236}">
-                <a16:creationId xmlns:a16="http://schemas.microsoft.com/office/drawing/2014/main" id="{D69CA29C-75F4-1571-63BD-9B26A5909881}"/>
-              </a:ext>
-            </a:extLst>
-          </p:cNvPr>
-          <p:cNvPicPr>
-            <a:picLocks noChangeAspect="1"/>
-          </p:cNvPicPr>
+      <p:sp>
+        <p:nvSpPr>
+          <p:cNvPr id="17" name="TextBox 16"/>
+          <p:cNvSpPr txBox="1"/>
           <p:nvPr/>
-        </p:nvPicPr>
-        <p:blipFill>
-          <a:blip r:embed="rId2"/>
-          <a:stretch>
-            <a:fillRect/>
-          </a:stretch>
-        </p:blipFill>
+        </p:nvSpPr>
         <p:spPr>
           <a:xfrm>
-            <a:off x="3464110" y="2643188"/>
-            <a:ext cx="4962525" cy="1571625"/>
+            <a:off x="713232" y="1371600"/>
+            <a:ext cx="10789920" cy="1005840"/>
           </a:xfrm>
           <a:prstGeom prst="rect">
             <a:avLst/>
           </a:prstGeom>
+          <a:noFill/>
         </p:spPr>
-      </p:pic>
+        <p:txBody>
+          <a:bodyPr wrap="square">
+            <a:spAutoFit/>
+          </a:bodyPr>
+          <a:lstStyle/>
+          <a:p>
+            <a:r>
+              <a:rPr sz="1900" b="1">
+                <a:solidFill>
+                  <a:srgbClr val="00B0F0"/>
+                </a:solidFill>
+              </a:rPr>
+              <a:t>aes32esmi does SubBytes + ShiftRows + MixColumns + AddRoundKey in a single cycle, removing the mix_columns bottleneck that was 83.8% of software runtime.</a:t>
+            </a:r>
+          </a:p>
+        </p:txBody>
+      </p:sp>
+      <p:graphicFrame>
+        <p:nvGraphicFramePr>
+          <p:cNvPr id="18" name="Table 17"/>
+          <p:cNvGraphicFramePr>
+            <a:graphicFrameLocks noGrp="1"/>
+          </p:cNvGraphicFramePr>
+          <p:nvPr/>
+        </p:nvGraphicFramePr>
+        <p:xfrm>
+          <a:off x="1280160" y="2697480"/>
+          <a:ext cx="9601200" cy="1463040"/>
+        </p:xfrm>
+        <a:graphic>
+          <a:graphicData uri="http://schemas.openxmlformats.org/drawingml/2006/table">
+            <a:tbl>
+              <a:tblPr firstRow="1" bandRow="1">
+                <a:tableStyleId>{5C22544A-7EE6-4342-B048-85BDC9FD1C3A}</a:tableStyleId>
+              </a:tblPr>
+              <a:tblGrid>
+                <a:gridCol w="4937760"/>
+                <a:gridCol w="2194560"/>
+                <a:gridCol w="2468880"/>
+              </a:tblGrid>
+              <a:tr h="487680">
+                <a:tc>
+                  <a:txBody>
+                    <a:bodyPr/>
+                    <a:lstStyle/>
+                    <a:p>
+                      <a:r>
+                        <a:rPr sz="1700" b="1">
+                          <a:solidFill>
+                            <a:srgbClr val="FFFFFF"/>
+                          </a:solidFill>
+                        </a:rPr>
+                        <a:t>Version</a:t>
+                      </a:r>
+                    </a:p>
+                  </a:txBody>
+                  <a:tcPr anchor="ctr"/>
+                </a:tc>
+                <a:tc>
+                  <a:txBody>
+                    <a:bodyPr/>
+                    <a:lstStyle/>
+                    <a:p>
+                      <a:r>
+                        <a:rPr sz="1700" b="1">
+                          <a:solidFill>
+                            <a:srgbClr val="FFFFFF"/>
+                          </a:solidFill>
+                        </a:rPr>
+                        <a:t>Cycles</a:t>
+                      </a:r>
+                    </a:p>
+                  </a:txBody>
+                  <a:tcPr anchor="ctr"/>
+                </a:tc>
+                <a:tc>
+                  <a:txBody>
+                    <a:bodyPr/>
+                    <a:lstStyle/>
+                    <a:p>
+                      <a:r>
+                        <a:rPr sz="1700" b="1">
+                          <a:solidFill>
+                            <a:srgbClr val="FFFFFF"/>
+                          </a:solidFill>
+                        </a:rPr>
+                        <a:t>vs software baseline</a:t>
+                      </a:r>
+                    </a:p>
+                  </a:txBody>
+                  <a:tcPr anchor="ctr"/>
+                </a:tc>
+              </a:tr>
+              <a:tr h="487680">
+                <a:tc>
+                  <a:txBody>
+                    <a:bodyPr/>
+                    <a:lstStyle/>
+                    <a:p>
+                      <a:r>
+                        <a:rPr sz="1700" b="1"/>
+                        <a:t>Software AES (baseline)</a:t>
+                      </a:r>
+                    </a:p>
+                  </a:txBody>
+                  <a:tcPr anchor="ctr"/>
+                </a:tc>
+                <a:tc>
+                  <a:txBody>
+                    <a:bodyPr/>
+                    <a:lstStyle/>
+                    <a:p>
+                      <a:r>
+                        <a:rPr sz="1700" b="0"/>
+                        <a:t>59,560</a:t>
+                      </a:r>
+                    </a:p>
+                  </a:txBody>
+                  <a:tcPr anchor="ctr"/>
+                </a:tc>
+                <a:tc>
+                  <a:txBody>
+                    <a:bodyPr/>
+                    <a:lstStyle/>
+                    <a:p>
+                      <a:r>
+                        <a:rPr sz="1700" b="0"/>
+                        <a:t>1.0×</a:t>
+                      </a:r>
+                    </a:p>
+                  </a:txBody>
+                  <a:tcPr anchor="ctr"/>
+                </a:tc>
+              </a:tr>
+              <a:tr h="487680">
+                <a:tc>
+                  <a:txBody>
+                    <a:bodyPr/>
+                    <a:lstStyle/>
+                    <a:p>
+                      <a:r>
+                        <a:rPr sz="1700" b="1"/>
+                        <a:t>+ aes32esmi / aes32esi hardware</a:t>
+                      </a:r>
+                    </a:p>
+                  </a:txBody>
+                  <a:tcPr anchor="ctr"/>
+                </a:tc>
+                <a:tc>
+                  <a:txBody>
+                    <a:bodyPr/>
+                    <a:lstStyle/>
+                    <a:p>
+                      <a:r>
+                        <a:rPr sz="1700" b="0"/>
+                        <a:t>6,260</a:t>
+                      </a:r>
+                    </a:p>
+                  </a:txBody>
+                  <a:tcPr anchor="ctr"/>
+                </a:tc>
+                <a:tc>
+                  <a:txBody>
+                    <a:bodyPr/>
+                    <a:lstStyle/>
+                    <a:p>
+                      <a:r>
+                        <a:rPr sz="1700" b="0">
+                          <a:solidFill>
+                            <a:srgbClr val="187A3B"/>
+                          </a:solidFill>
+                        </a:rPr>
+                        <a:t>9.5× faster</a:t>
+                      </a:r>
+                    </a:p>
+                  </a:txBody>
+                  <a:tcPr anchor="ctr"/>
+                </a:tc>
+              </a:tr>
+            </a:tbl>
+          </a:graphicData>
+        </a:graphic>
+      </p:graphicFrame>
+      <p:sp>
+        <p:nvSpPr>
+          <p:cNvPr id="19" name="TextBox 18"/>
+          <p:cNvSpPr txBox="1"/>
+          <p:nvPr/>
+        </p:nvSpPr>
+        <p:spPr>
+          <a:xfrm>
+            <a:off x="1280160" y="4389120"/>
+            <a:ext cx="9692640" cy="822960"/>
+          </a:xfrm>
+          <a:prstGeom prst="rect">
+            <a:avLst/>
+          </a:prstGeom>
+          <a:noFill/>
+        </p:spPr>
+        <p:txBody>
+          <a:bodyPr wrap="square">
+            <a:spAutoFit/>
+          </a:bodyPr>
+          <a:lstStyle/>
+          <a:p>
+            <a:r>
+              <a:rPr sz="1400" i="1">
+                <a:solidFill>
+                  <a:srgbClr val="555555"/>
+                </a:solidFill>
+              </a:rPr>
+              <a:t>The looped hardware version (6,260) is the starting point for the later optimisations: custom loop-unroll pass → 4,800, parallel DOM S-box → 4,104 (covered on the compiler and RTL slides).</a:t>
+            </a:r>
+          </a:p>
+        </p:txBody>
+      </p:sp>
     </p:spTree>
     <p:extLst>
       <p:ext uri="{BB962C8B-B14F-4D97-AF65-F5344CB8AC3E}">

--- a/PDP_group24.pptx
+++ b/PDP_group24.pptx
@@ -26321,8 +26321,8 @@
         </p:nvSpPr>
         <p:spPr>
           <a:xfrm>
-            <a:off x="717698" y="1045535"/>
-            <a:ext cx="10756603" cy="4206240"/>
+            <a:off x="717698" y="1097280"/>
+            <a:ext cx="10756603" cy="2011680"/>
           </a:xfrm>
           <a:prstGeom prst="rect">
             <a:avLst/>
@@ -26340,70 +26340,92 @@
           <a:p>
             <a:pPr>
               <a:spcAft>
-                <a:spcPts val="1000"/>
+                <a:spcPts val="600"/>
               </a:spcAft>
               <a:buFont typeface=""/>
               <a:buNone/>
             </a:pPr>
             <a:r>
-              <a:rPr sz="2000" b="0">
+              <a:rPr sz="1900" b="0" i="0">
                 <a:solidFill>
                   <a:srgbClr val="202020"/>
                 </a:solidFill>
               </a:rPr>
-              <a:t>The Zkne S-box and MixColumns switch a data-dependent number of bits each cycle, so the instantaneous power draw leaks the byte being processed.</a:t>
+              <a:t>The Zkne S-box and MixColumns switch a data-dependent number of bits, so power leaks the byte being processed.</a:t>
             </a:r>
           </a:p>
           <a:p>
             <a:pPr>
               <a:spcAft>
-                <a:spcPts val="1000"/>
+                <a:spcPts val="600"/>
               </a:spcAft>
-              <a:buNone/>
             </a:pPr>
             <a:r>
-              <a:rPr sz="2000" b="0">
+              <a:rPr sz="1900" b="0" i="0">
                 <a:solidFill>
                   <a:srgbClr val="202020"/>
                 </a:solidFill>
               </a:rPr>
-              <a:t>Correlation Power Analysis exploits this: correlating measured power against HW(SBOX[pt XOR guess]) makes the correct key guess separate from the other 255. On our unprotected core a key byte falls in about 100 traces.</a:t>
+              <a:t>Correlation Power Analysis turns that leakage into the key: about 100 traces on our unprotected core.</a:t>
             </a:r>
           </a:p>
           <a:p>
             <a:pPr>
               <a:spcAft>
-                <a:spcPts val="1000"/>
+                <a:spcPts val="600"/>
               </a:spcAft>
-              <a:buNone/>
             </a:pPr>
             <a:r>
-              <a:rPr sz="2000" b="0">
+              <a:rPr sz="1900" b="0" i="0">
                 <a:solidFill>
                   <a:srgbClr val="202020"/>
                 </a:solidFill>
               </a:rPr>
-              <a:t>Countermeasure: Domain-Oriented Masking (DOM). Every secret is split into two random shares that recombine only inside registered DOM-AND gates, so no single wire (and no glitch) correlates with the real value.</a:t>
+              <a:t>Countermeasure: Domain-Oriented Masking (DOM). Secrets are split into two random shares, recombined only inside registered gates, so no wire (or glitch) tracks the real value.</a:t>
             </a:r>
           </a:p>
           <a:p>
             <a:pPr>
               <a:spcAft>
-                <a:spcPts val="1000"/>
+                <a:spcPts val="600"/>
               </a:spcAft>
               <a:buNone/>
             </a:pPr>
             <a:r>
-              <a:rPr sz="1800" b="0">
+              <a:rPr sz="1500" b="0" i="0">
                 <a:solidFill>
                   <a:srgbClr val="555555"/>
                 </a:solidFill>
               </a:rPr>
-              <a:t>Design follows the TU Delft secure-Zkne paper of Kassimi, Aljuffri, Hamdioui and Taouil (2026).</a:t>
+              <a:t>Follows the TU Delft secure-Zkne paper of Kassimi, Aljuffri, Hamdioui and Taouil (2026).</a:t>
             </a:r>
           </a:p>
         </p:txBody>
       </p:sp>
+      <p:pic>
+        <p:nvPicPr>
+          <p:cNvPr id="17" name="Picture 16" descr="fig_cpa_concept.png"/>
+          <p:cNvPicPr>
+            <a:picLocks noChangeAspect="1"/>
+          </p:cNvPicPr>
+          <p:nvPr/>
+        </p:nvPicPr>
+        <p:blipFill>
+          <a:blip r:embed="rId2"/>
+          <a:stretch>
+            <a:fillRect/>
+          </a:stretch>
+        </p:blipFill>
+        <p:spPr>
+          <a:xfrm>
+            <a:off x="1463040" y="3977639"/>
+            <a:ext cx="9235440" cy="2435720"/>
+          </a:xfrm>
+          <a:prstGeom prst="rect">
+            <a:avLst/>
+          </a:prstGeom>
+        </p:spPr>
+      </p:pic>
     </p:spTree>
     <p:extLst>
       <p:ext uri="{BB962C8B-B14F-4D97-AF65-F5344CB8AC3E}">
@@ -29769,8 +29791,8 @@
         </p:nvSpPr>
         <p:spPr>
           <a:xfrm>
-            <a:off x="896112" y="1691640"/>
-            <a:ext cx="10424160" cy="4572000"/>
+            <a:off x="822960" y="1417320"/>
+            <a:ext cx="10607040" cy="457200"/>
           </a:xfrm>
           <a:prstGeom prst="rect">
             <a:avLst/>
@@ -29784,16 +29806,13 @@
           <a:lstStyle/>
           <a:p>
             <a:pPr>
-              <a:lnSpc>
-                <a:spcPct val="105000"/>
-              </a:lnSpc>
               <a:spcAft>
-                <a:spcPts val="1200"/>
+                <a:spcPts val="200"/>
               </a:spcAft>
               <a:buNone/>
             </a:pPr>
             <a:r>
-              <a:rPr sz="2000" b="1">
+              <a:rPr sz="2000" b="1" i="0">
                 <a:solidFill>
                   <a:srgbClr val="00B0F0"/>
                 </a:solidFill>
@@ -29801,118 +29820,113 @@
               <a:t>How we proved the masking works, in simulation and on hardware</a:t>
             </a:r>
           </a:p>
+        </p:txBody>
+      </p:sp>
+      <p:pic>
+        <p:nvPicPr>
+          <p:cNvPr id="4" name="Picture 3" descr="fig_validation_pipeline.png"/>
+          <p:cNvPicPr>
+            <a:picLocks noChangeAspect="1"/>
+          </p:cNvPicPr>
+          <p:nvPr/>
+        </p:nvPicPr>
+        <p:blipFill>
+          <a:blip r:embed="rId2"/>
+          <a:stretch>
+            <a:fillRect/>
+          </a:stretch>
+        </p:blipFill>
+        <p:spPr>
+          <a:xfrm>
+            <a:off x="1051560" y="1965960"/>
+            <a:ext cx="10058400" cy="2435192"/>
+          </a:xfrm>
+          <a:prstGeom prst="rect">
+            <a:avLst/>
+          </a:prstGeom>
+        </p:spPr>
+      </p:pic>
+      <p:sp>
+        <p:nvSpPr>
+          <p:cNvPr id="5" name="TextBox 4"/>
+          <p:cNvSpPr txBox="1"/>
+          <p:nvPr/>
+        </p:nvSpPr>
+        <p:spPr>
+          <a:xfrm>
+            <a:off x="868680" y="4297680"/>
+            <a:ext cx="10515600" cy="2194560"/>
+          </a:xfrm>
+          <a:prstGeom prst="rect">
+            <a:avLst/>
+          </a:prstGeom>
+          <a:noFill/>
+        </p:spPr>
+        <p:txBody>
+          <a:bodyPr wrap="square">
+            <a:spAutoFit/>
+          </a:bodyPr>
+          <a:lstStyle/>
           <a:p>
             <a:pPr>
-              <a:lnSpc>
-                <a:spcPct val="105000"/>
-              </a:lnSpc>
               <a:spcAft>
-                <a:spcPts val="1200"/>
+                <a:spcPts val="700"/>
               </a:spcAft>
               <a:buNone/>
             </a:pPr>
             <a:r>
-              <a:rPr sz="1900" b="0">
+              <a:rPr sz="1800" b="0" i="0">
                 <a:solidFill>
                   <a:srgbClr val="202020"/>
                 </a:solidFill>
               </a:rPr>
-              <a:t>Power proxy: a SystemVerilog testbench drives plaintexts through the hardware S-box in Vivado xsim and logs the Hamming weight of the captured result register per trace.</a:t>
+              <a:t>Power proxy = Hamming weight of the captured S-box result, logged per trace by a SystemVerilog testbench in Vivado xsim. The same rig drives the unprotected and the DOM S-box, so the before/after is clean.</a:t>
             </a:r>
           </a:p>
           <a:p>
             <a:pPr>
-              <a:lnSpc>
-                <a:spcPct val="105000"/>
-              </a:lnSpc>
               <a:spcAft>
-                <a:spcPts val="1200"/>
+                <a:spcPts val="700"/>
+              </a:spcAft>
+            </a:pPr>
+            <a:r>
+              <a:rPr sz="1800" b="0" i="0">
+                <a:solidFill>
+                  <a:srgbClr val="202020"/>
+                </a:solidFill>
+              </a:rPr>
+              <a:t>CPA: correlate power with HW(SBOX[pt XOR guess]) over all 256 guesses, 20 000 traces.</a:t>
+            </a:r>
+          </a:p>
+          <a:p>
+            <a:pPr>
+              <a:spcAft>
+                <a:spcPts val="700"/>
+              </a:spcAft>
+            </a:pPr>
+            <a:r>
+              <a:rPr sz="1800" b="0" i="0">
+                <a:solidFill>
+                  <a:srgbClr val="202020"/>
+                </a:solidFill>
+              </a:rPr>
+              <a:t>TVLA: Welch fixed-vs-random t-test, 40 000 traces; |t| &gt; 4.5 means first-order leakage.</a:t>
+            </a:r>
+          </a:p>
+          <a:p>
+            <a:pPr>
+              <a:spcAft>
+                <a:spcPts val="700"/>
               </a:spcAft>
               <a:buNone/>
             </a:pPr>
             <a:r>
-              <a:rPr sz="1900" b="0">
-                <a:solidFill>
-                  <a:srgbClr val="202020"/>
-                </a:solidFill>
-              </a:rPr>
-              <a:t>One harness, two S-boxes: the same rig runs against the unprotected and the DOM-masked S-box, producing identical CSVs. The only variable is the design, so the before/after is clean.</a:t>
-            </a:r>
-          </a:p>
-          <a:p>
-            <a:pPr>
-              <a:lnSpc>
-                <a:spcPct val="105000"/>
-              </a:lnSpc>
-              <a:spcAft>
-                <a:spcPts val="1200"/>
-              </a:spcAft>
-              <a:buNone/>
-            </a:pPr>
-            <a:r>
-              <a:rPr sz="1900" b="1">
-                <a:solidFill>
-                  <a:srgbClr val="202020"/>
-                </a:solidFill>
-              </a:rPr>
-              <a:t>Two standard attacks, scored in Python (numpy/scipy):</a:t>
-            </a:r>
-          </a:p>
-          <a:p>
-            <a:pPr lvl="1">
-              <a:lnSpc>
-                <a:spcPct val="105000"/>
-              </a:lnSpc>
-              <a:spcAft>
-                <a:spcPts val="1200"/>
-              </a:spcAft>
-              <a:buNone/>
-            </a:pPr>
-            <a:r>
-              <a:rPr sz="1800" b="0">
-                <a:solidFill>
-                  <a:srgbClr val="202020"/>
-                </a:solidFill>
-              </a:rPr>
-              <a:t>CPA: recover the key byte by correlating power with HW(SBOX[pt XOR guess]) over all 256 guesses, 20 000 traces.</a:t>
-            </a:r>
-          </a:p>
-          <a:p>
-            <a:pPr lvl="1">
-              <a:lnSpc>
-                <a:spcPct val="105000"/>
-              </a:lnSpc>
-              <a:spcAft>
-                <a:spcPts val="1200"/>
-              </a:spcAft>
-              <a:buNone/>
-            </a:pPr>
-            <a:r>
-              <a:rPr sz="1800" b="0">
-                <a:solidFill>
-                  <a:srgbClr val="202020"/>
-                </a:solidFill>
-              </a:rPr>
-              <a:t>TVLA: Welch fixed-vs-random t-test on 40 000 traces; |t| &gt; 4.5 means first-order leakage (ISO/IEC 17825).</a:t>
-            </a:r>
-          </a:p>
-          <a:p>
-            <a:pPr>
-              <a:lnSpc>
-                <a:spcPct val="105000"/>
-              </a:lnSpc>
-              <a:spcAft>
-                <a:spcPts val="1200"/>
-              </a:spcAft>
-              <a:buNone/>
-            </a:pPr>
-            <a:r>
-              <a:rPr sz="1800" b="0">
+              <a:rPr sz="1600" b="0" i="0">
                 <a:solidFill>
                   <a:srgbClr val="555555"/>
                 </a:solidFill>
               </a:rPr>
-              <a:t>Why simulation first: it isolates the register's switching with no analog noise, giving fast feedback in the RTL loop, alongside Rishi's CW305 hardware validation.</a:t>
+              <a:t>Simulation isolates the data-dependent switching with no analog noise, alongside Rishi's CW305 hardware validation.</a:t>
             </a:r>
           </a:p>
         </p:txBody>
@@ -30702,6 +30716,106 @@
               <a:t>Context: Why AES is needed?</a:t>
             </a:r>
             <a:endParaRPr lang="en-US"/>
+          </a:p>
+        </p:txBody>
+      </p:sp>
+      <p:sp>
+        <p:nvSpPr>
+          <p:cNvPr id="5" name="TextBox 4"/>
+          <p:cNvSpPr txBox="1"/>
+          <p:nvPr/>
+        </p:nvSpPr>
+        <p:spPr>
+          <a:xfrm>
+            <a:off x="822960" y="1554480"/>
+            <a:ext cx="10515600" cy="4206240"/>
+          </a:xfrm>
+          <a:prstGeom prst="rect">
+            <a:avLst/>
+          </a:prstGeom>
+          <a:noFill/>
+        </p:spPr>
+        <p:txBody>
+          <a:bodyPr wrap="square">
+            <a:spAutoFit/>
+          </a:bodyPr>
+          <a:lstStyle/>
+          <a:p>
+            <a:pPr>
+              <a:spcAft>
+                <a:spcPts val="1200"/>
+              </a:spcAft>
+              <a:buNone/>
+            </a:pPr>
+            <a:r>
+              <a:rPr sz="2200" b="1" i="0">
+                <a:solidFill>
+                  <a:srgbClr val="00B0F0"/>
+                </a:solidFill>
+              </a:rPr>
+              <a:t>AES-128 is the worldwide standard for symmetric encryption (NIST FIPS-197).</a:t>
+            </a:r>
+          </a:p>
+          <a:p>
+            <a:pPr>
+              <a:spcAft>
+                <a:spcPts val="1000"/>
+              </a:spcAft>
+            </a:pPr>
+            <a:r>
+              <a:rPr sz="2000" b="0" i="0">
+                <a:solidFill>
+                  <a:srgbClr val="202020"/>
+                </a:solidFill>
+              </a:rPr>
+              <a:t>It runs constantly on small embedded and IoT processors: TLS handshakes, secure boot, disk and message encryption.</a:t>
+            </a:r>
+          </a:p>
+          <a:p>
+            <a:pPr>
+              <a:spcAft>
+                <a:spcPts val="1000"/>
+              </a:spcAft>
+            </a:pPr>
+            <a:r>
+              <a:rPr sz="2000" b="0" i="0">
+                <a:solidFill>
+                  <a:srgbClr val="202020"/>
+                </a:solidFill>
+              </a:rPr>
+              <a:t>On a plain RISC-V core, AES is pure software: thousands of cycles per block, which is slow and power-hungry.</a:t>
+            </a:r>
+          </a:p>
+          <a:p>
+            <a:pPr>
+              <a:spcAft>
+                <a:spcPts val="1400"/>
+              </a:spcAft>
+            </a:pPr>
+            <a:r>
+              <a:rPr sz="2000" b="0" i="0">
+                <a:solidFill>
+                  <a:srgbClr val="202020"/>
+                </a:solidFill>
+              </a:rPr>
+              <a:t>Naive AES also leaks: an attacker measuring power can recover the key (side-channel attack).</a:t>
+            </a:r>
+          </a:p>
+          <a:p>
+            <a:pPr>
+              <a:spcAft>
+                <a:spcPts val="400"/>
+              </a:spcAft>
+              <a:buNone/>
+            </a:pPr>
+            <a:r>
+              <a:rPr sz="2000" b="1" i="0">
+                <a:solidFill>
+                  <a:srgbClr val="202020"/>
+                </a:solidFill>
+              </a:rPr>
+              <a:t>Our goal: make AES on RISC-V both fast (hardware instructions) and side-channel resistant.</a:t>
+            </a:r>
           </a:p>
         </p:txBody>
       </p:sp>
@@ -33982,8 +34096,8 @@
         </p:nvSpPr>
         <p:spPr>
           <a:xfrm>
-            <a:off x="716386" y="1049916"/>
-            <a:ext cx="10746783" cy="4352544"/>
+            <a:off x="716386" y="1097280"/>
+            <a:ext cx="10746783" cy="1463040"/>
           </a:xfrm>
         </p:spPr>
         <p:txBody>
@@ -33993,6 +34107,9 @@
           <a:lstStyle/>
           <a:p>
             <a:pPr>
+              <a:spcAft>
+                <a:spcPts val="600"/>
+              </a:spcAft>
               <a:buClr>
                 <a:srgbClr val="00A6D6"/>
               </a:buClr>
@@ -34000,21 +34117,31 @@
               <a:buChar char="•"/>
             </a:pPr>
             <a:r>
-              <a:rPr lang="en-US" b="1">
-                <a:cs typeface="Arial"/>
+              <a:rPr sz="2000" b="1" i="0">
+                <a:solidFill>
+                  <a:srgbClr val="202020"/>
+                </a:solidFill>
               </a:rPr>
-              <a:t>Pure C implementation </a:t>
-            </a:r>
-            <a:r>
-              <a:rPr lang="en-US">
-                <a:ea typeface="+mn-lt"/>
-                <a:cs typeface="+mn-lt"/>
-              </a:rPr>
-              <a:t>— using standard loads, stores, XORs, shifts</a:t>
+              <a:t>Pure C AES-128 on the unmodified RISCY core: standard loads, stores, XORs and shifts.</a:t>
             </a:r>
             <a:endParaRPr lang="en-US">
               <a:cs typeface="Arial"/>
             </a:endParaRPr>
+          </a:p>
+          <a:p>
+            <a:pPr>
+              <a:spcAft>
+                <a:spcPts val="600"/>
+              </a:spcAft>
+            </a:pPr>
+            <a:r>
+              <a:rPr sz="2000" b="0" i="0">
+                <a:solidFill>
+                  <a:srgbClr val="202020"/>
+                </a:solidFill>
+              </a:rPr>
+              <a:t>Table-based S-box and gf_mult MixColumns, all from data memory; no hardware acceleration.</a:t>
+            </a:r>
           </a:p>
         </p:txBody>
       </p:sp>
@@ -34039,8 +34166,8 @@
           </p:nvPr>
         </p:nvGraphicFramePr>
         <p:xfrm>
-          <a:off x="1215957" y="1856361"/>
-          <a:ext cx="9754684" cy="3147170"/>
+          <a:off x="1215957" y="2606040"/>
+          <a:ext cx="9754684" cy="1920240"/>
         </p:xfrm>
         <a:graphic>
           <a:graphicData uri="http://schemas.openxmlformats.org/drawingml/2006/table">
@@ -34064,7 +34191,7 @@
                   </a:extLst>
                 </a:gridCol>
               </a:tblGrid>
-              <a:tr h="629434">
+              <a:tr h="384048">
                 <a:tc>
                   <a:txBody>
                     <a:bodyPr/>
@@ -34099,7 +34226,7 @@
                   </a:ext>
                 </a:extLst>
               </a:tr>
-              <a:tr h="629434">
+              <a:tr h="384048">
                 <a:tc>
                   <a:txBody>
                     <a:bodyPr/>
@@ -34138,7 +34265,7 @@
                   </a:ext>
                 </a:extLst>
               </a:tr>
-              <a:tr h="629434">
+              <a:tr h="384048">
                 <a:tc>
                   <a:txBody>
                     <a:bodyPr/>
@@ -34177,7 +34304,7 @@
                   </a:ext>
                 </a:extLst>
               </a:tr>
-              <a:tr h="629434">
+              <a:tr h="384048">
                 <a:tc>
                   <a:txBody>
                     <a:bodyPr/>
@@ -34216,7 +34343,7 @@
                   </a:ext>
                 </a:extLst>
               </a:tr>
-              <a:tr h="629434">
+              <a:tr h="384048">
                 <a:tc>
                   <a:txBody>
                     <a:bodyPr/>
@@ -34259,6 +34386,45 @@
           </a:graphicData>
         </a:graphic>
       </p:graphicFrame>
+      <p:sp>
+        <p:nvSpPr>
+          <p:cNvPr id="17" name="TextBox 16"/>
+          <p:cNvSpPr txBox="1"/>
+          <p:nvPr/>
+        </p:nvSpPr>
+        <p:spPr>
+          <a:xfrm>
+            <a:off x="1216152" y="4800600"/>
+            <a:ext cx="9692640" cy="640080"/>
+          </a:xfrm>
+          <a:prstGeom prst="rect">
+            <a:avLst/>
+          </a:prstGeom>
+          <a:noFill/>
+        </p:spPr>
+        <p:txBody>
+          <a:bodyPr wrap="square">
+            <a:spAutoFit/>
+          </a:bodyPr>
+          <a:lstStyle/>
+          <a:p>
+            <a:pPr>
+              <a:spcAft>
+                <a:spcPts val="400"/>
+              </a:spcAft>
+              <a:buNone/>
+            </a:pPr>
+            <a:r>
+              <a:rPr sz="1600" b="1" i="0">
+                <a:solidFill>
+                  <a:srgbClr val="00B0F0"/>
+                </a:solidFill>
+              </a:rPr>
+              <a:t>61,184 cycles per block, almost all spent in MixColumns (next slide). This is the bottleneck the hardware targets.</a:t>
+            </a:r>
+          </a:p>
+        </p:txBody>
+      </p:sp>
     </p:spTree>
     <p:extLst>
       <p:ext uri="{BB962C8B-B14F-4D97-AF65-F5344CB8AC3E}">
@@ -34435,71 +34601,69 @@
           </a:p>
         </p:txBody>
       </p:sp>
-      <p:sp>
-        <p:nvSpPr>
-          <p:cNvPr id="8" name="Tijdelijke aanduiding voor tekst 7">
-            <a:extLst>
-              <a:ext uri="{FF2B5EF4-FFF2-40B4-BE49-F238E27FC236}">
-                <a16:creationId xmlns:a16="http://schemas.microsoft.com/office/drawing/2014/main" id="{DE224D77-92D0-28D6-8B11-36F1FB1C0A36}"/>
-              </a:ext>
-            </a:extLst>
-          </p:cNvPr>
-          <p:cNvSpPr>
-            <a:spLocks noGrp="1"/>
-          </p:cNvSpPr>
-          <p:nvPr>
-            <p:ph type="body" sz="quarter" idx="4294967295"/>
-          </p:nvPr>
-        </p:nvSpPr>
-        <p:spPr>
-          <a:xfrm>
-            <a:off x="716386" y="1049916"/>
-            <a:ext cx="10746783" cy="4782182"/>
-          </a:xfrm>
-        </p:spPr>
-        <p:txBody>
-          <a:bodyPr vert="horz" lIns="0" tIns="0" rIns="0" bIns="0" rtlCol="0" anchor="t">
-            <a:noAutofit/>
-          </a:bodyPr>
-          <a:lstStyle/>
-          <a:p>
-            <a:pPr lvl="2"/>
-            <a:endParaRPr lang="en-US">
-              <a:cs typeface="Arial"/>
-            </a:endParaRPr>
-          </a:p>
-        </p:txBody>
-      </p:sp>
       <p:pic>
         <p:nvPicPr>
-          <p:cNvPr id="2" name="Picture 1">
-            <a:extLst>
-              <a:ext uri="{FF2B5EF4-FFF2-40B4-BE49-F238E27FC236}">
-                <a16:creationId xmlns:a16="http://schemas.microsoft.com/office/drawing/2014/main" id="{ACB581EA-57A7-25C8-2189-9494BBA7E331}"/>
-              </a:ext>
-            </a:extLst>
-          </p:cNvPr>
+          <p:cNvPr id="17" name="Picture 16" descr="fig_bottlenecks.png"/>
           <p:cNvPicPr>
             <a:picLocks noChangeAspect="1"/>
           </p:cNvPicPr>
           <p:nvPr/>
         </p:nvPicPr>
         <p:blipFill>
-          <a:blip r:embed="rId2"/>
+          <a:blip r:embed="rId3"/>
           <a:stretch>
             <a:fillRect/>
           </a:stretch>
         </p:blipFill>
         <p:spPr>
           <a:xfrm>
-            <a:off x="2619375" y="2166938"/>
-            <a:ext cx="6953250" cy="2524125"/>
+            <a:off x="1554480" y="1554480"/>
+            <a:ext cx="8229600" cy="3512634"/>
           </a:xfrm>
           <a:prstGeom prst="rect">
             <a:avLst/>
           </a:prstGeom>
         </p:spPr>
       </p:pic>
+      <p:sp>
+        <p:nvSpPr>
+          <p:cNvPr id="18" name="TextBox 17"/>
+          <p:cNvSpPr txBox="1"/>
+          <p:nvPr/>
+        </p:nvSpPr>
+        <p:spPr>
+          <a:xfrm>
+            <a:off x="1554480" y="5074920"/>
+            <a:ext cx="8595360" cy="731520"/>
+          </a:xfrm>
+          <a:prstGeom prst="rect">
+            <a:avLst/>
+          </a:prstGeom>
+          <a:noFill/>
+        </p:spPr>
+        <p:txBody>
+          <a:bodyPr wrap="square">
+            <a:spAutoFit/>
+          </a:bodyPr>
+          <a:lstStyle/>
+          <a:p>
+            <a:pPr>
+              <a:spcAft>
+                <a:spcPts val="400"/>
+              </a:spcAft>
+              <a:buNone/>
+            </a:pPr>
+            <a:r>
+              <a:rPr sz="1700" b="1" i="0">
+                <a:solidFill>
+                  <a:srgbClr val="00B0F0"/>
+                </a:solidFill>
+              </a:rPr>
+              <a:t>MixColumns (the gf_mult inner loop) is 83.8% of all cycles, so it is the single thing worth accelerating in hardware.</a:t>
+            </a:r>
+          </a:p>
+        </p:txBody>
+      </p:sp>
     </p:spTree>
     <p:extLst>
       <p:ext uri="{BB962C8B-B14F-4D97-AF65-F5344CB8AC3E}">
@@ -34704,175 +34868,53 @@
           </a:bodyPr>
           <a:lstStyle/>
           <a:p>
-            <a:pPr lvl="2"/>
+            <a:pPr lvl="2">
+              <a:spcAft>
+                <a:spcPts val="1200"/>
+              </a:spcAft>
+            </a:pPr>
+            <a:r>
+              <a:rPr sz="2000" b="1" i="0">
+                <a:solidFill>
+                  <a:srgbClr val="202020"/>
+                </a:solidFill>
+              </a:rPr>
+              <a:t>The 186-instruction software mix_columns collapses to a few aes32esmi calls (no gf_mult).</a:t>
+            </a:r>
             <a:endParaRPr lang="en-US" b="1">
               <a:ea typeface="+mn-lt"/>
               <a:cs typeface="+mn-lt"/>
             </a:endParaRPr>
           </a:p>
           <a:p>
-            <a:pPr marL="285750" lvl="2" indent="-285750">
-              <a:buClr>
-                <a:srgbClr val="00A6D6"/>
-              </a:buClr>
-              <a:buSzPct val="120000"/>
-              <a:buFont typeface="Arial"/>
-              <a:buChar char="•"/>
+            <a:pPr>
+              <a:spcAft>
+                <a:spcPts val="1200"/>
+              </a:spcAft>
             </a:pPr>
             <a:r>
-              <a:rPr lang="en-US">
-                <a:ea typeface="+mn-lt"/>
-                <a:cs typeface="+mn-lt"/>
+              <a:rPr sz="2000" b="0" i="0">
+                <a:solidFill>
+                  <a:srgbClr val="202020"/>
+                </a:solidFill>
               </a:rPr>
-              <a:t>Eliminates all the </a:t>
+              <a:t>Runs entirely on registers: no BRAM loads for the S-box or MixColumns.</a:t>
             </a:r>
-            <a:r>
-              <a:rPr lang="en-US" err="1">
-                <a:latin typeface="Consolas"/>
-                <a:cs typeface="Arial"/>
-              </a:rPr>
-              <a:t>gf_mult</a:t>
-            </a:r>
-            <a:r>
-              <a:rPr lang="en-US">
-                <a:ea typeface="+mn-lt"/>
-                <a:cs typeface="+mn-lt"/>
-              </a:rPr>
-              <a:t> inlining (the 186-instruction </a:t>
-            </a:r>
-            <a:r>
-              <a:rPr lang="en-US" err="1">
-                <a:latin typeface="Consolas"/>
-                <a:cs typeface="Arial"/>
-              </a:rPr>
-              <a:t>mix_columns</a:t>
-            </a:r>
-            <a:r>
-              <a:rPr lang="en-US">
-                <a:ea typeface="+mn-lt"/>
-                <a:cs typeface="+mn-lt"/>
-              </a:rPr>
-              <a:t> becomes a handful of </a:t>
-            </a:r>
-            <a:r>
-              <a:rPr lang="en-US">
-                <a:latin typeface="Consolas"/>
-                <a:cs typeface="Arial"/>
-              </a:rPr>
-              <a:t>aes32esmi</a:t>
-            </a:r>
-            <a:r>
-              <a:rPr lang="en-US">
-                <a:ea typeface="+mn-lt"/>
-                <a:cs typeface="+mn-lt"/>
-              </a:rPr>
-              <a:t> calls)</a:t>
-            </a:r>
-            <a:endParaRPr lang="en-US"/>
           </a:p>
           <a:p>
-            <a:pPr marL="285750" lvl="2" indent="-285750">
-              <a:buClr>
-                <a:srgbClr val="00A6D6"/>
-              </a:buClr>
-              <a:buSzPct val="120000"/>
-              <a:buFont typeface="Arial"/>
-              <a:buChar char="•"/>
+            <a:pPr>
+              <a:spcAft>
+                <a:spcPts val="1200"/>
+              </a:spcAft>
             </a:pPr>
             <a:r>
-              <a:rPr lang="en-US">
-                <a:ea typeface="+mn-lt"/>
-                <a:cs typeface="+mn-lt"/>
+              <a:rPr sz="2000" b="0" i="0">
+                <a:solidFill>
+                  <a:srgbClr val="202020"/>
+                </a:solidFill>
               </a:rPr>
-              <a:t>Operates entirely on registers, with no BRAM loads for the S-box or </a:t>
+              <a:t>aes32esmi = SubBytes + ShiftRows + MixColumns + AddRoundKey, in one cycle.</a:t>
             </a:r>
-            <a:r>
-              <a:rPr lang="en-US" err="1">
-                <a:ea typeface="+mn-lt"/>
-                <a:cs typeface="+mn-lt"/>
-              </a:rPr>
-              <a:t>MixColumn</a:t>
-            </a:r>
-            <a:endParaRPr lang="en-US" err="1"/>
-          </a:p>
-          <a:p>
-            <a:pPr marL="285750" lvl="2" indent="-285750">
-              <a:buClr>
-                <a:srgbClr val="00A6D6"/>
-              </a:buClr>
-              <a:buSzPct val="120000"/>
-              <a:buFont typeface="Arial"/>
-              <a:buChar char="•"/>
-            </a:pPr>
-            <a:r>
-              <a:rPr lang="en-US">
-                <a:cs typeface="Arial"/>
-              </a:rPr>
-              <a:t>aes32esmi combines </a:t>
-            </a:r>
-            <a:r>
-              <a:rPr lang="en-US" err="1">
-                <a:cs typeface="Arial"/>
-              </a:rPr>
-              <a:t>SubBytes</a:t>
-            </a:r>
-            <a:r>
-              <a:rPr lang="en-US">
-                <a:cs typeface="Arial"/>
-              </a:rPr>
-              <a:t> + </a:t>
-            </a:r>
-            <a:r>
-              <a:rPr lang="en-US" err="1">
-                <a:cs typeface="Arial"/>
-              </a:rPr>
-              <a:t>ShiftRows</a:t>
-            </a:r>
-            <a:r>
-              <a:rPr lang="en-US">
-                <a:cs typeface="Arial"/>
-              </a:rPr>
-              <a:t> + </a:t>
-            </a:r>
-            <a:r>
-              <a:rPr lang="en-US" err="1">
-                <a:cs typeface="Arial"/>
-              </a:rPr>
-              <a:t>MixColumns</a:t>
-            </a:r>
-            <a:r>
-              <a:rPr lang="en-US">
-                <a:cs typeface="Arial"/>
-              </a:rPr>
-              <a:t> + AddRoundKey into </a:t>
-            </a:r>
-            <a:r>
-              <a:rPr lang="en-US" b="1">
-                <a:cs typeface="Arial"/>
-              </a:rPr>
-              <a:t>a single hardware instruction</a:t>
-            </a:r>
-            <a:r>
-              <a:rPr lang="en-US">
-                <a:cs typeface="Arial"/>
-              </a:rPr>
-              <a:t> that completes in </a:t>
-            </a:r>
-            <a:r>
-              <a:rPr lang="en-US" b="1">
-                <a:cs typeface="Arial"/>
-              </a:rPr>
-              <a:t>1 cycle</a:t>
-            </a:r>
-            <a:endParaRPr lang="en-US">
-              <a:cs typeface="Arial"/>
-            </a:endParaRPr>
-          </a:p>
-          <a:p>
-            <a:pPr lvl="2"/>
-            <a:endParaRPr lang="en-US" b="1">
-              <a:cs typeface="Arial"/>
-            </a:endParaRPr>
           </a:p>
         </p:txBody>
       </p:sp>
@@ -35237,8 +35279,8 @@
                     <a:lstStyle/>
                     <a:p>
                       <a:r>
-                        <a:rPr sz="1700" b="0"/>
-                        <a:t>59,560</a:t>
+                        <a:rPr sz="1700"/>
+                        <a:t>61,184</a:t>
                       </a:r>
                     </a:p>
                   </a:txBody>
@@ -35296,7 +35338,7 @@
                             <a:srgbClr val="187A3B"/>
                           </a:solidFill>
                         </a:rPr>
-                        <a:t>9.5× faster</a:t>
+                        <a:t>9.8x faster</a:t>
                       </a:r>
                     </a:p>
                   </a:txBody>

--- a/PDP_group24.pptx
+++ b/PDP_group24.pptx
@@ -5,18 +5,18 @@
     <p:sldMasterId id="2147483648" r:id="rId5"/>
   </p:sldMasterIdLst>
   <p:notesMasterIdLst>
-    <p:notesMasterId r:id="rId28"/>
+    <p:notesMasterId r:id="rId31"/>
   </p:notesMasterIdLst>
   <p:sldIdLst>
     <p:sldId id="257" r:id="rId6"/>
     <p:sldId id="275" r:id="rId7"/>
-    <p:sldId id="259" r:id="rId8"/>
-    <p:sldId id="264" r:id="rId9"/>
-    <p:sldId id="265" r:id="rId10"/>
-    <p:sldId id="271" r:id="rId11"/>
-    <p:sldId id="267" r:id="rId12"/>
-    <p:sldId id="268" r:id="rId13"/>
-    <p:sldId id="269" r:id="rId14"/>
+    <p:sldId id="265" r:id="rId8"/>
+    <p:sldId id="259" r:id="rId9"/>
+    <p:sldId id="264" r:id="rId10"/>
+    <p:sldId id="293" r:id="rId11"/>
+    <p:sldId id="294" r:id="rId12"/>
+    <p:sldId id="289" r:id="rId13"/>
+    <p:sldId id="292" r:id="rId14"/>
     <p:sldId id="270" r:id="rId15"/>
     <p:sldId id="278" r:id="rId16"/>
     <p:sldId id="279" r:id="rId17"/>
@@ -24,14 +24,15 @@
     <p:sldId id="283" r:id="rId19"/>
     <p:sldId id="284" r:id="rId20"/>
     <p:sldId id="285" r:id="rId21"/>
-    <p:sldId id="286" r:id="rId34"/>
-    <p:sldId id="287" r:id="rId35"/>
-    <p:sldId id="272" r:id="rId22"/>
-    <p:sldId id="276" r:id="rId23"/>
-    <p:sldId id="273" r:id="rId24"/>
-    <p:sldId id="277" r:id="rId25"/>
-    <p:sldId id="282" r:id="rId26"/>
-    <p:sldId id="263" r:id="rId27"/>
+    <p:sldId id="286" r:id="rId22"/>
+    <p:sldId id="288" r:id="rId23"/>
+    <p:sldId id="291" r:id="rId24"/>
+    <p:sldId id="290" r:id="rId25"/>
+    <p:sldId id="272" r:id="rId26"/>
+    <p:sldId id="276" r:id="rId27"/>
+    <p:sldId id="273" r:id="rId28"/>
+    <p:sldId id="282" r:id="rId29"/>
+    <p:sldId id="263" r:id="rId30"/>
   </p:sldIdLst>
   <p:sldSz cx="12192000" cy="6858000"/>
   <p:notesSz cx="6858000" cy="9144000"/>
@@ -137,12 +138,18 @@
 <p1510:revInfo xmlns:a="http://schemas.openxmlformats.org/drawingml/2006/main" xmlns:r="http://schemas.openxmlformats.org/officeDocument/2006/relationships" xmlns:p1510="http://schemas.microsoft.com/office/powerpoint/2015/10/main">
   <p1510:revLst>
     <p1510:client id="{0D4ACB14-45DB-06E0-84C2-FADFF5AF1E9B}" v="146" dt="2026-06-12T09:51:51.934"/>
+    <p1510:client id="{14D6E510-B2B1-3B84-5660-20CF3665F1A2}" v="2071" dt="2026-06-12T19:12:15.382"/>
     <p1510:client id="{3F158E37-9E7C-3F07-C892-E5A057830573}" v="16" dt="2026-06-12T15:04:12.623"/>
     <p1510:client id="{5DDF92DD-6549-1430-4699-F0EFD5835B67}" v="1257" dt="2026-06-12T12:24:17.576"/>
     <p1510:client id="{644C6B8B-85E3-959A-10A3-09AF0DF354F2}" v="1995" dt="2026-06-12T15:03:21.076"/>
+    <p1510:client id="{6D821B38-479A-EB21-3705-11D20041F760}" v="8" dt="2026-06-12T20:31:30.685"/>
     <p1510:client id="{8A3E2741-4F58-435C-E3B9-1108157B89AB}" v="30" dt="2026-06-12T14:52:44.583"/>
+    <p1510:client id="{A6696FE6-048D-39C0-C2C3-EF456AC1F40B}" v="205" dt="2026-06-12T19:48:20.498"/>
     <p1510:client id="{B5003FB2-C0E1-3EB5-9241-5BA751B9FD0E}" v="2" dt="2026-06-12T12:13:49.838"/>
+    <p1510:client id="{C3973C42-428B-05BD-7001-D82C49889301}" v="41" dt="2026-06-12T20:19:51.740"/>
     <p1510:client id="{D292E6C5-8987-0959-CA3C-BDA41AA4D2BC}" v="71" dt="2026-06-12T08:08:07.252"/>
+    <p1510:client id="{E2B71511-3594-E734-B473-A27B658E4A89}" v="299" dt="2026-06-12T18:11:54.474"/>
+    <p1510:client id="{F81402E3-B8AD-853A-817E-14E4702979B0}" v="1358" dt="2026-06-12T20:18:56.663"/>
   </p1510:revLst>
 </p1510:revInfo>
 </file>
@@ -28364,6 +28371,30 @@
           </a:p>
         </p:txBody>
       </p:sp>
+      <p:pic>
+        <p:nvPicPr>
+          <p:cNvPr id="6" name="Picture 5" descr="image.png"/>
+          <p:cNvPicPr>
+            <a:picLocks noChangeAspect="1"/>
+          </p:cNvPicPr>
+          <p:nvPr/>
+        </p:nvPicPr>
+        <p:blipFill>
+          <a:blip r:embed="rId2"/>
+          <a:stretch>
+            <a:fillRect/>
+          </a:stretch>
+        </p:blipFill>
+        <p:spPr>
+          <a:xfrm>
+            <a:off x="2240280" y="4160520"/>
+            <a:ext cx="6126480" cy="2221691"/>
+          </a:xfrm>
+          <a:prstGeom prst="rect">
+            <a:avLst/>
+          </a:prstGeom>
+        </p:spPr>
+      </p:pic>
     </p:spTree>
     <p:extLst>
       <p:ext uri="{BB962C8B-B14F-4D97-AF65-F5344CB8AC3E}">
@@ -29747,7 +29778,7 @@
 </file>
 
 <file path=ppt/slides/slide17.xml><?xml version="1.0" encoding="utf-8"?>
-<p:sld xmlns:a="http://schemas.openxmlformats.org/drawingml/2006/main" xmlns:p="http://schemas.openxmlformats.org/presentationml/2006/main" xmlns:r="http://schemas.openxmlformats.org/officeDocument/2006/relationships">
+<p:sld xmlns:a="http://schemas.openxmlformats.org/drawingml/2006/main" xmlns:r="http://schemas.openxmlformats.org/officeDocument/2006/relationships" xmlns:p="http://schemas.openxmlformats.org/presentationml/2006/main">
   <p:cSld>
     <p:spTree>
       <p:nvGrpSpPr>
@@ -29755,7 +29786,14 @@
         <p:cNvGrpSpPr/>
         <p:nvPr/>
       </p:nvGrpSpPr>
-      <p:grpSpPr/>
+      <p:grpSpPr>
+        <a:xfrm>
+          <a:off x="0" y="0"/>
+          <a:ext cx="0" cy="0"/>
+          <a:chOff x="0" y="0"/>
+          <a:chExt cx="0" cy="0"/>
+        </a:xfrm>
+      </p:grpSpPr>
       <p:sp>
         <p:nvSpPr>
           <p:cNvPr id="2" name="Title 1"/>
@@ -29854,7 +29892,7 @@
         </p:nvSpPr>
         <p:spPr>
           <a:xfrm>
-            <a:off x="868680" y="4297680"/>
+            <a:off x="868680" y="4113325"/>
             <a:ext cx="10515600" cy="2194560"/>
           </a:xfrm>
           <a:prstGeom prst="rect">
@@ -29940,7 +29978,7 @@
 </file>
 
 <file path=ppt/slides/slide18.xml><?xml version="1.0" encoding="utf-8"?>
-<p:sld xmlns:a="http://schemas.openxmlformats.org/drawingml/2006/main" xmlns:p="http://schemas.openxmlformats.org/presentationml/2006/main" xmlns:r="http://schemas.openxmlformats.org/officeDocument/2006/relationships">
+<p:sld xmlns:a="http://schemas.openxmlformats.org/drawingml/2006/main" xmlns:r="http://schemas.openxmlformats.org/officeDocument/2006/relationships" xmlns:p="http://schemas.openxmlformats.org/presentationml/2006/main">
   <p:cSld>
     <p:spTree>
       <p:nvGrpSpPr>
@@ -29948,7 +29986,14 @@
         <p:cNvGrpSpPr/>
         <p:nvPr/>
       </p:nvGrpSpPr>
-      <p:grpSpPr/>
+      <p:grpSpPr>
+        <a:xfrm>
+          <a:off x="0" y="0"/>
+          <a:ext cx="0" cy="0"/>
+          <a:chOff x="0" y="0"/>
+          <a:chExt cx="0" cy="0"/>
+        </a:xfrm>
+      </p:grpSpPr>
       <p:sp>
         <p:nvSpPr>
           <p:cNvPr id="2" name="Title 1"/>
@@ -30072,7 +30117,7 @@
         </p:nvGraphicFramePr>
         <p:xfrm>
           <a:off x="548640" y="5074920"/>
-          <a:ext cx="11064240" cy="1371600"/>
+          <a:ext cx="11064240" cy="1600200"/>
         </p:xfrm>
         <a:graphic>
           <a:graphicData uri="http://schemas.openxmlformats.org/drawingml/2006/table">
@@ -30081,9 +30126,27 @@
                 <a:tableStyleId>{5C22544A-7EE6-4342-B048-85BDC9FD1C3A}</a:tableStyleId>
               </a:tblPr>
               <a:tblGrid>
-                <a:gridCol w="4846320"/>
-                <a:gridCol w="3108960"/>
-                <a:gridCol w="3108960"/>
+                <a:gridCol w="4846320">
+                  <a:extLst>
+                    <a:ext uri="{9D8B030D-6E8A-4147-A177-3AD203B41FA5}">
+                      <a16:colId xmlns:a16="http://schemas.microsoft.com/office/drawing/2014/main" val="20000"/>
+                    </a:ext>
+                  </a:extLst>
+                </a:gridCol>
+                <a:gridCol w="3108960">
+                  <a:extLst>
+                    <a:ext uri="{9D8B030D-6E8A-4147-A177-3AD203B41FA5}">
+                      <a16:colId xmlns:a16="http://schemas.microsoft.com/office/drawing/2014/main" val="20001"/>
+                    </a:ext>
+                  </a:extLst>
+                </a:gridCol>
+                <a:gridCol w="3108960">
+                  <a:extLst>
+                    <a:ext uri="{9D8B030D-6E8A-4147-A177-3AD203B41FA5}">
+                      <a16:colId xmlns:a16="http://schemas.microsoft.com/office/drawing/2014/main" val="20002"/>
+                    </a:ext>
+                  </a:extLst>
+                </a:gridCol>
               </a:tblGrid>
               <a:tr h="274320">
                 <a:tc>
@@ -30137,6 +30200,11 @@
                   </a:txBody>
                   <a:tcPr anchor="ctr"/>
                 </a:tc>
+                <a:extLst>
+                  <a:ext uri="{0D108BD9-81ED-4DB2-BD59-A6C34878D82A}">
+                    <a16:rowId xmlns:a16="http://schemas.microsoft.com/office/drawing/2014/main" val="10000"/>
+                  </a:ext>
+                </a:extLst>
               </a:tr>
               <a:tr h="274320">
                 <a:tc>
@@ -30182,6 +30250,11 @@
                   </a:txBody>
                   <a:tcPr anchor="ctr"/>
                 </a:tc>
+                <a:extLst>
+                  <a:ext uri="{0D108BD9-81ED-4DB2-BD59-A6C34878D82A}">
+                    <a16:rowId xmlns:a16="http://schemas.microsoft.com/office/drawing/2014/main" val="10001"/>
+                  </a:ext>
+                </a:extLst>
               </a:tr>
               <a:tr h="274320">
                 <a:tc>
@@ -30227,6 +30300,11 @@
                   </a:txBody>
                   <a:tcPr anchor="ctr"/>
                 </a:tc>
+                <a:extLst>
+                  <a:ext uri="{0D108BD9-81ED-4DB2-BD59-A6C34878D82A}">
+                    <a16:rowId xmlns:a16="http://schemas.microsoft.com/office/drawing/2014/main" val="10002"/>
+                  </a:ext>
+                </a:extLst>
               </a:tr>
               <a:tr h="274320">
                 <a:tc>
@@ -30272,6 +30350,11 @@
                   </a:txBody>
                   <a:tcPr anchor="ctr"/>
                 </a:tc>
+                <a:extLst>
+                  <a:ext uri="{0D108BD9-81ED-4DB2-BD59-A6C34878D82A}">
+                    <a16:rowId xmlns:a16="http://schemas.microsoft.com/office/drawing/2014/main" val="10003"/>
+                  </a:ext>
+                </a:extLst>
               </a:tr>
               <a:tr h="274320">
                 <a:tc>
@@ -30317,12 +30400,22 @@
                   </a:txBody>
                   <a:tcPr anchor="ctr"/>
                 </a:tc>
+                <a:extLst>
+                  <a:ext uri="{0D108BD9-81ED-4DB2-BD59-A6C34878D82A}">
+                    <a16:rowId xmlns:a16="http://schemas.microsoft.com/office/drawing/2014/main" val="10004"/>
+                  </a:ext>
+                </a:extLst>
               </a:tr>
             </a:tbl>
           </a:graphicData>
         </a:graphic>
       </p:graphicFrame>
     </p:spTree>
+    <p:extLst>
+      <p:ext uri="{BB962C8B-B14F-4D97-AF65-F5344CB8AC3E}">
+        <p14:creationId xmlns:p14="http://schemas.microsoft.com/office/powerpoint/2010/main" val="3661217696"/>
+      </p:ext>
+    </p:extLst>
   </p:cSld>
   <p:clrMapOvr>
     <a:masterClrMapping/>
@@ -30335,7 +30428,13 @@
   <p:cSld>
     <p:spTree>
       <p:nvGrpSpPr>
-        <p:cNvPr id="1" name=""/>
+        <p:cNvPr id="1" name="">
+          <a:extLst>
+            <a:ext uri="{FF2B5EF4-FFF2-40B4-BE49-F238E27FC236}">
+              <a16:creationId xmlns:a16="http://schemas.microsoft.com/office/drawing/2014/main" id="{AA449A5F-9ACF-4945-38C8-0B29C09CF5F4}"/>
+            </a:ext>
+          </a:extLst>
+        </p:cNvPr>
         <p:cNvGrpSpPr/>
         <p:nvPr/>
       </p:nvGrpSpPr>
@@ -30349,69 +30448,10 @@
       </p:grpSpPr>
       <p:sp>
         <p:nvSpPr>
-          <p:cNvPr id="2" name="Date Placeholder 1">
+          <p:cNvPr id="2" name="Title 1">
             <a:extLst>
               <a:ext uri="{FF2B5EF4-FFF2-40B4-BE49-F238E27FC236}">
-                <a16:creationId xmlns:a16="http://schemas.microsoft.com/office/drawing/2014/main" id="{0215E5C3-58B4-9348-9C0F-ECF95A0265EE}"/>
-              </a:ext>
-            </a:extLst>
-          </p:cNvPr>
-          <p:cNvSpPr>
-            <a:spLocks noGrp="1"/>
-          </p:cNvSpPr>
-          <p:nvPr>
-            <p:ph type="dt" sz="half" idx="18"/>
-          </p:nvPr>
-        </p:nvSpPr>
-        <p:spPr/>
-        <p:txBody>
-          <a:bodyPr/>
-          <a:lstStyle/>
-          <a:p>
-            <a:fld id="{86CF0BC4-CAAA-4113-A44D-B077CA6D06A0}" type="datetime1">
-              <a:rPr lang="nl-NL" smtClean="0"/>
-              <a:t>12-6-2026</a:t>
-            </a:fld>
-            <a:endParaRPr lang="en-GB"/>
-          </a:p>
-        </p:txBody>
-      </p:sp>
-      <p:sp>
-        <p:nvSpPr>
-          <p:cNvPr id="3" name="Slide Number Placeholder 2">
-            <a:extLst>
-              <a:ext uri="{FF2B5EF4-FFF2-40B4-BE49-F238E27FC236}">
-                <a16:creationId xmlns:a16="http://schemas.microsoft.com/office/drawing/2014/main" id="{79275C5F-2CBD-DA27-B0C6-1D1D0B409743}"/>
-              </a:ext>
-            </a:extLst>
-          </p:cNvPr>
-          <p:cNvSpPr>
-            <a:spLocks noGrp="1"/>
-          </p:cNvSpPr>
-          <p:nvPr>
-            <p:ph type="sldNum" sz="quarter" idx="20"/>
-          </p:nvPr>
-        </p:nvSpPr>
-        <p:spPr/>
-        <p:txBody>
-          <a:bodyPr/>
-          <a:lstStyle/>
-          <a:p>
-            <a:fld id="{9E843DB9-9987-4157-AB9C-CEA8D7D910BB}" type="slidenum">
-              <a:rPr lang="en-GB" smtClean="0"/>
-              <a:pPr/>
-              <a:t>17</a:t>
-            </a:fld>
-            <a:endParaRPr lang="en-GB"/>
-          </a:p>
-        </p:txBody>
-      </p:sp>
-      <p:sp>
-        <p:nvSpPr>
-          <p:cNvPr id="4" name="Title 3">
-            <a:extLst>
-              <a:ext uri="{FF2B5EF4-FFF2-40B4-BE49-F238E27FC236}">
-                <a16:creationId xmlns:a16="http://schemas.microsoft.com/office/drawing/2014/main" id="{14260B0D-5B6B-BA13-ECC3-613864F943F9}"/>
+                <a16:creationId xmlns:a16="http://schemas.microsoft.com/office/drawing/2014/main" id="{2B5704F9-C225-18AC-86FA-EF8E1E7C6D0D}"/>
               </a:ext>
             </a:extLst>
           </p:cNvPr>
@@ -30424,8 +30464,8 @@
         </p:nvSpPr>
         <p:spPr>
           <a:xfrm>
-            <a:off x="718666" y="722454"/>
-            <a:ext cx="10743750" cy="589222"/>
+            <a:off x="722376" y="658368"/>
+            <a:ext cx="10744200" cy="640080"/>
           </a:xfrm>
         </p:spPr>
         <p:txBody>
@@ -30433,26 +30473,21 @@
           <a:lstStyle/>
           <a:p>
             <a:r>
-              <a:rPr lang="en-US">
-                <a:cs typeface="Arial"/>
-              </a:rPr>
-              <a:t>Future Work: The Super Instruction </a:t>
+              <a:rPr lang="en-US" sz="2800"/>
+              <a:t>Hardware Validation: CW305 Setup</a:t>
             </a:r>
-            <a:br>
-              <a:rPr lang="en-US">
-                <a:cs typeface="Arial"/>
-              </a:rPr>
-            </a:br>
-            <a:endParaRPr lang="en-US"/>
+            <a:endParaRPr lang="en-US" sz="2800" b="1">
+              <a:cs typeface="Arial"/>
+            </a:endParaRPr>
           </a:p>
         </p:txBody>
       </p:sp>
       <p:sp>
         <p:nvSpPr>
-          <p:cNvPr id="5" name="TextBox 4">
+          <p:cNvPr id="3" name="TextBox 2">
             <a:extLst>
               <a:ext uri="{FF2B5EF4-FFF2-40B4-BE49-F238E27FC236}">
-                <a16:creationId xmlns:a16="http://schemas.microsoft.com/office/drawing/2014/main" id="{80E7CCDB-9939-2460-EF59-1689425A63F0}"/>
+                <a16:creationId xmlns:a16="http://schemas.microsoft.com/office/drawing/2014/main" id="{EAD24B97-AF18-D760-3805-23A4FC381519}"/>
               </a:ext>
             </a:extLst>
           </p:cNvPr>
@@ -30461,8 +30496,166 @@
         </p:nvSpPr>
         <p:spPr>
           <a:xfrm>
-            <a:off x="883177" y="1623867"/>
-            <a:ext cx="5436782" cy="3939540"/>
+            <a:off x="684830" y="1786890"/>
+            <a:ext cx="10745413" cy="2301336"/>
+          </a:xfrm>
+          <a:prstGeom prst="rect">
+            <a:avLst/>
+          </a:prstGeom>
+          <a:noFill/>
+        </p:spPr>
+        <p:txBody>
+          <a:bodyPr wrap="square" lIns="91440" tIns="45720" rIns="91440" bIns="45720" anchor="t">
+            <a:spAutoFit/>
+          </a:bodyPr>
+          <a:lstStyle/>
+          <a:p>
+            <a:pPr>
+              <a:lnSpc>
+                <a:spcPct val="105000"/>
+              </a:lnSpc>
+              <a:spcAft>
+                <a:spcPts val="1200"/>
+              </a:spcAft>
+            </a:pPr>
+            <a:r>
+              <a:rPr lang="en-US" sz="2000" b="1"/>
+              <a:t>Hardware setup</a:t>
+            </a:r>
+            <a:endParaRPr lang="en-US">
+              <a:cs typeface="Arial"/>
+            </a:endParaRPr>
+          </a:p>
+          <a:p>
+            <a:pPr marL="342900" indent="-342900">
+              <a:lnSpc>
+                <a:spcPct val="105000"/>
+              </a:lnSpc>
+              <a:spcAft>
+                <a:spcPts val="1200"/>
+              </a:spcAft>
+              <a:buFont typeface="Arial"/>
+              <a:buChar char="•"/>
+            </a:pPr>
+            <a:r>
+              <a:rPr lang="en-US" sz="2000">
+                <a:solidFill>
+                  <a:srgbClr val="202020"/>
+                </a:solidFill>
+                <a:cs typeface="Arial"/>
+              </a:rPr>
+              <a:t>CW 305 </a:t>
+            </a:r>
+            <a:r>
+              <a:rPr lang="en-US" sz="2000" err="1">
+                <a:solidFill>
+                  <a:srgbClr val="202020"/>
+                </a:solidFill>
+                <a:cs typeface="Arial"/>
+              </a:rPr>
+              <a:t>Artix</a:t>
+            </a:r>
+            <a:r>
+              <a:rPr lang="en-US" sz="2000">
+                <a:solidFill>
+                  <a:srgbClr val="202020"/>
+                </a:solidFill>
+                <a:cs typeface="Arial"/>
+              </a:rPr>
+              <a:t>-7 100T with CV32E40P RISC-V soft-core</a:t>
+            </a:r>
+          </a:p>
+          <a:p>
+            <a:pPr marL="342900" indent="-342900">
+              <a:lnSpc>
+                <a:spcPct val="105000"/>
+              </a:lnSpc>
+              <a:spcAft>
+                <a:spcPts val="1200"/>
+              </a:spcAft>
+              <a:buFont typeface="Arial"/>
+              <a:buChar char="•"/>
+            </a:pPr>
+            <a:r>
+              <a:rPr lang="en-US" sz="2000" err="1">
+                <a:solidFill>
+                  <a:srgbClr val="202020"/>
+                </a:solidFill>
+                <a:cs typeface="Arial"/>
+              </a:rPr>
+              <a:t>ChipWhisperer</a:t>
+            </a:r>
+            <a:r>
+              <a:rPr lang="en-US" sz="2000">
+                <a:solidFill>
+                  <a:srgbClr val="202020"/>
+                </a:solidFill>
+                <a:cs typeface="Arial"/>
+              </a:rPr>
+              <a:t>-Lite scope, 50 MHz clock, ADC at 200 MHz</a:t>
+            </a:r>
+          </a:p>
+          <a:p>
+            <a:pPr marL="342900" indent="-342900">
+              <a:lnSpc>
+                <a:spcPct val="105000"/>
+              </a:lnSpc>
+              <a:spcAft>
+                <a:spcPts val="1200"/>
+              </a:spcAft>
+              <a:buFont typeface="Arial"/>
+              <a:buChar char="•"/>
+            </a:pPr>
+            <a:r>
+              <a:rPr lang="en-US" sz="2000">
+                <a:solidFill>
+                  <a:srgbClr val="202020"/>
+                </a:solidFill>
+                <a:cs typeface="Arial"/>
+              </a:rPr>
+              <a:t>Gain:30 dB</a:t>
+            </a:r>
+          </a:p>
+          <a:p>
+            <a:pPr marL="342900" indent="-342900">
+              <a:lnSpc>
+                <a:spcPct val="105000"/>
+              </a:lnSpc>
+              <a:spcAft>
+                <a:spcPts val="1200"/>
+              </a:spcAft>
+              <a:buFont typeface="Arial"/>
+              <a:buChar char="•"/>
+            </a:pPr>
+            <a:r>
+              <a:rPr lang="en-US" sz="2000">
+                <a:solidFill>
+                  <a:srgbClr val="202020"/>
+                </a:solidFill>
+                <a:cs typeface="Arial"/>
+              </a:rPr>
+              <a:t>Three bitstreams tested: AES_100t (reference), Baseline RI5CY, DOM-protected RI5CY</a:t>
+            </a:r>
+            <a:endParaRPr lang="en-US"/>
+          </a:p>
+        </p:txBody>
+      </p:sp>
+      <p:sp>
+        <p:nvSpPr>
+          <p:cNvPr id="4" name="TextBox 3">
+            <a:extLst>
+              <a:ext uri="{FF2B5EF4-FFF2-40B4-BE49-F238E27FC236}">
+                <a16:creationId xmlns:a16="http://schemas.microsoft.com/office/drawing/2014/main" id="{EA9887F9-8596-0AD4-8485-D5E6BC47CEDC}"/>
+              </a:ext>
+            </a:extLst>
+          </p:cNvPr>
+          <p:cNvSpPr txBox="1"/>
+          <p:nvPr/>
+        </p:nvSpPr>
+        <p:spPr>
+          <a:xfrm>
+            <a:off x="725939" y="1135327"/>
+            <a:ext cx="10739004" cy="914096"/>
           </a:xfrm>
           <a:prstGeom prst="rect">
             <a:avLst/>
@@ -30479,108 +30672,197 @@
           <a:lstStyle/>
           <a:p>
             <a:r>
-              <a:rPr lang="en-US" sz="2000" b="1" u="sng"/>
-              <a:t>The observation:</a:t>
-            </a:r>
-            <a:r>
-              <a:rPr lang="en-US" sz="2000" b="1"/>
-              <a:t> </a:t>
+              <a:rPr lang="en-US" sz="2000" b="1">
+                <a:solidFill>
+                  <a:srgbClr val="00B0F0"/>
+                </a:solidFill>
+              </a:rPr>
+              <a:t>From simulation to silicon - Validation on CW305 Artix-7 FPGA with CV32E40P RISC-V soft core</a:t>
             </a:r>
             <a:endParaRPr lang="en-US" sz="2000" b="1">
+              <a:solidFill>
+                <a:srgbClr val="00B0F0"/>
+              </a:solidFill>
               <a:cs typeface="Arial"/>
             </a:endParaRPr>
           </a:p>
           <a:p>
-            <a:endParaRPr lang="en-US" sz="2000">
-              <a:ea typeface="+mn-lt"/>
-              <a:cs typeface="+mn-lt"/>
+            <a:pPr algn="l">
+              <a:lnSpc>
+                <a:spcPct val="90000"/>
+              </a:lnSpc>
+              <a:spcBef>
+                <a:spcPts val="600"/>
+              </a:spcBef>
+              <a:spcAft>
+                <a:spcPts val="600"/>
+              </a:spcAft>
+            </a:pPr>
+            <a:endParaRPr lang="en-US" sz="1600" err="1"/>
+          </a:p>
+        </p:txBody>
+      </p:sp>
+      <p:sp>
+        <p:nvSpPr>
+          <p:cNvPr id="5" name="TextBox 4">
+            <a:extLst>
+              <a:ext uri="{FF2B5EF4-FFF2-40B4-BE49-F238E27FC236}">
+                <a16:creationId xmlns:a16="http://schemas.microsoft.com/office/drawing/2014/main" id="{E4B0D05B-BCB8-D440-FD62-7757D84DB4CA}"/>
+              </a:ext>
+            </a:extLst>
+          </p:cNvPr>
+          <p:cNvSpPr txBox="1"/>
+          <p:nvPr/>
+        </p:nvSpPr>
+        <p:spPr>
+          <a:xfrm>
+            <a:off x="723900" y="4181475"/>
+            <a:ext cx="10668000" cy="2329869"/>
+          </a:xfrm>
+          <a:prstGeom prst="rect">
+            <a:avLst/>
+          </a:prstGeom>
+          <a:noFill/>
+        </p:spPr>
+        <p:txBody>
+          <a:bodyPr rot="0" spcFirstLastPara="0" vertOverflow="overflow" horzOverflow="overflow" vert="horz" wrap="square" lIns="0" tIns="0" rIns="0" bIns="0" numCol="1" spcCol="0" rtlCol="0" fromWordArt="0" anchor="t" anchorCtr="0" forceAA="0" compatLnSpc="1">
+            <a:prstTxWarp prst="textNoShape">
+              <a:avLst/>
+            </a:prstTxWarp>
+            <a:spAutoFit/>
+          </a:bodyPr>
+          <a:lstStyle/>
+          <a:p>
+            <a:r>
+              <a:rPr lang="en-US" sz="2000" b="1">
+                <a:latin typeface="Arial"/>
+              </a:rPr>
+              <a:t>Attack Method</a:t>
+            </a:r>
+            <a:endParaRPr lang="en-US">
+              <a:cs typeface="Arial"/>
             </a:endParaRPr>
           </a:p>
           <a:p>
             <a:pPr marL="285750" indent="-285750">
+              <a:lnSpc>
+                <a:spcPct val="90000"/>
+              </a:lnSpc>
+              <a:spcBef>
+                <a:spcPts val="600"/>
+              </a:spcBef>
+              <a:spcAft>
+                <a:spcPts val="600"/>
+              </a:spcAft>
               <a:buFont typeface="Arial"/>
               <a:buChar char="•"/>
             </a:pPr>
             <a:r>
-              <a:rPr lang="en-US" sz="2000"/>
-              <a:t>Same operation four times</a:t>
+              <a:rPr lang="en-US" sz="2000">
+                <a:cs typeface="Arial" panose="020B0604020202020204"/>
+              </a:rPr>
+              <a:t>CPA: </a:t>
             </a:r>
-            <a:endParaRPr lang="en-US" sz="2000">
-              <a:cs typeface="Arial"/>
-            </a:endParaRPr>
-          </a:p>
-          <a:p>
-            <a:endParaRPr lang="en-US" sz="2000">
-              <a:ea typeface="+mn-lt"/>
-              <a:cs typeface="+mn-lt"/>
-            </a:endParaRPr>
+            <a:r>
+              <a:rPr lang="en-US" sz="2000" err="1">
+                <a:cs typeface="Arial" panose="020B0604020202020204"/>
+              </a:rPr>
+              <a:t>sbox_output</a:t>
+            </a:r>
+            <a:r>
+              <a:rPr lang="en-US" sz="2000">
+                <a:cs typeface="Arial" panose="020B0604020202020204"/>
+              </a:rPr>
+              <a:t> leakage model and </a:t>
+            </a:r>
+            <a:r>
+              <a:rPr lang="en-US" sz="2000" err="1">
+                <a:cs typeface="Arial" panose="020B0604020202020204"/>
+              </a:rPr>
+              <a:t>last_round_state_diff</a:t>
+            </a:r>
+            <a:r>
+              <a:rPr lang="en-US" sz="2000">
+                <a:cs typeface="Arial" panose="020B0604020202020204"/>
+              </a:rPr>
+              <a:t> leakage model</a:t>
+            </a:r>
           </a:p>
           <a:p>
             <a:pPr marL="285750" indent="-285750">
+              <a:lnSpc>
+                <a:spcPct val="90000"/>
+              </a:lnSpc>
+              <a:spcBef>
+                <a:spcPts val="600"/>
+              </a:spcBef>
+              <a:spcAft>
+                <a:spcPts val="600"/>
+              </a:spcAft>
               <a:buFont typeface="Arial"/>
               <a:buChar char="•"/>
             </a:pPr>
             <a:r>
-              <a:rPr lang="en-US" sz="2000"/>
-              <a:t>This results in:</a:t>
+              <a:rPr lang="en-US" sz="2000">
+                <a:cs typeface="Arial" panose="020B0604020202020204"/>
+              </a:rPr>
+              <a:t>Window: samples 0-80 (round 1 S-Box)</a:t>
             </a:r>
-            <a:endParaRPr lang="en-US" sz="2000">
-              <a:cs typeface="Arial"/>
-            </a:endParaRPr>
-          </a:p>
-          <a:p>
-            <a:r>
-              <a:rPr lang="en-US" sz="2000"/>
-              <a:t>         Additional execution overhead </a:t>
-            </a:r>
-            <a:endParaRPr lang="en-US" sz="2000">
-              <a:cs typeface="Arial"/>
-            </a:endParaRPr>
-          </a:p>
-          <a:p>
-            <a:endParaRPr lang="en-US" sz="2000"/>
-          </a:p>
-          <a:p>
-            <a:r>
-              <a:rPr lang="en-US" sz="2000"/>
-              <a:t>         Repeated instruction fetch and decode. </a:t>
-            </a:r>
-            <a:endParaRPr lang="en-US" sz="2000">
-              <a:cs typeface="Arial"/>
-            </a:endParaRPr>
-          </a:p>
-          <a:p>
-            <a:endParaRPr lang="en-US" sz="2000"/>
-          </a:p>
-          <a:p>
-            <a:r>
-              <a:rPr lang="en-US" sz="2000"/>
-              <a:t>         Increased instruction count. . </a:t>
-            </a:r>
-            <a:endParaRPr lang="en-US" sz="2000">
-              <a:cs typeface="Arial"/>
-            </a:endParaRPr>
-          </a:p>
-          <a:p>
-            <a:endParaRPr lang="en-US" sz="2000">
-              <a:ea typeface="+mn-lt"/>
-              <a:cs typeface="+mn-lt"/>
-            </a:endParaRPr>
           </a:p>
           <a:p>
             <a:pPr marL="285750" indent="-285750">
+              <a:lnSpc>
+                <a:spcPct val="90000"/>
+              </a:lnSpc>
+              <a:spcBef>
+                <a:spcPts val="600"/>
+              </a:spcBef>
+              <a:spcAft>
+                <a:spcPts val="600"/>
+              </a:spcAft>
               <a:buFont typeface="Arial"/>
               <a:buChar char="•"/>
             </a:pPr>
             <a:r>
-              <a:rPr lang="en-US" sz="2000"/>
-              <a:t>Independent, highly regular pattern.</a:t>
+              <a:rPr lang="en-US" sz="2000">
+                <a:cs typeface="Arial" panose="020B0604020202020204"/>
+              </a:rPr>
+              <a:t>TVLA: Welch t-test, fixed vs random PT</a:t>
             </a:r>
-            <a:endParaRPr lang="en-US" sz="2000">
-              <a:cs typeface="Arial"/>
-            </a:endParaRPr>
           </a:p>
           <a:p>
+            <a:pPr marL="285750" indent="-285750">
+              <a:lnSpc>
+                <a:spcPct val="90000"/>
+              </a:lnSpc>
+              <a:spcBef>
+                <a:spcPts val="600"/>
+              </a:spcBef>
+              <a:spcAft>
+                <a:spcPts val="600"/>
+              </a:spcAft>
+              <a:buFont typeface="Arial"/>
+              <a:buChar char="•"/>
+            </a:pPr>
+            <a:r>
+              <a:rPr lang="en-US" sz="2000">
+                <a:cs typeface="Arial" panose="020B0604020202020204"/>
+              </a:rPr>
+              <a:t>Threshold: |t| &gt; 4.5 </a:t>
+            </a:r>
+          </a:p>
+          <a:p>
+            <a:pPr>
+              <a:lnSpc>
+                <a:spcPct val="90000"/>
+              </a:lnSpc>
+              <a:spcBef>
+                <a:spcPts val="600"/>
+              </a:spcBef>
+              <a:spcAft>
+                <a:spcPts val="600"/>
+              </a:spcAft>
+            </a:pPr>
             <a:endParaRPr lang="en-US" sz="1600">
               <a:cs typeface="Arial"/>
             </a:endParaRPr>
@@ -30590,25 +30872,13 @@
     </p:spTree>
     <p:extLst>
       <p:ext uri="{BB962C8B-B14F-4D97-AF65-F5344CB8AC3E}">
-        <p14:creationId xmlns:p14="http://schemas.microsoft.com/office/powerpoint/2010/main" val="109653819"/>
+        <p14:creationId xmlns:p14="http://schemas.microsoft.com/office/powerpoint/2010/main" val="2476092217"/>
       </p:ext>
     </p:extLst>
   </p:cSld>
   <p:clrMapOvr>
     <a:masterClrMapping/>
   </p:clrMapOvr>
-  <mc:AlternateContent xmlns:mc="http://schemas.openxmlformats.org/markup-compatibility/2006" xmlns:p14="http://schemas.microsoft.com/office/powerpoint/2010/main">
-    <mc:Choice Requires="p14">
-      <p:transition spd="med" p14:dur="700">
-        <p:fade/>
-      </p:transition>
-    </mc:Choice>
-    <mc:Fallback xmlns="">
-      <p:transition spd="med">
-        <p:fade/>
-      </p:transition>
-    </mc:Fallback>
-  </mc:AlternateContent>
 </p:sld>
 </file>
 
@@ -30704,7 +30974,12 @@
             <p:ph type="title"/>
           </p:nvPr>
         </p:nvSpPr>
-        <p:spPr/>
+        <p:spPr>
+          <a:xfrm>
+            <a:off x="718666" y="722454"/>
+            <a:ext cx="10743750" cy="801874"/>
+          </a:xfrm>
+        </p:spPr>
         <p:txBody>
           <a:bodyPr/>
           <a:lstStyle/>
@@ -30713,22 +30988,63 @@
               <a:rPr lang="en-US">
                 <a:cs typeface="Arial"/>
               </a:rPr>
-              <a:t>Context: Why AES is needed?</a:t>
+              <a:t>Introduction</a:t>
             </a:r>
+            <a:br>
+              <a:rPr lang="en-US">
+                <a:cs typeface="Arial"/>
+              </a:rPr>
+            </a:br>
             <a:endParaRPr lang="en-US"/>
           </a:p>
         </p:txBody>
       </p:sp>
+      <p:pic>
+        <p:nvPicPr>
+          <p:cNvPr id="5" name="Picture 4">
+            <a:extLst>
+              <a:ext uri="{FF2B5EF4-FFF2-40B4-BE49-F238E27FC236}">
+                <a16:creationId xmlns:a16="http://schemas.microsoft.com/office/drawing/2014/main" id="{FB280846-8839-36D1-68C6-3DA40D343241}"/>
+              </a:ext>
+            </a:extLst>
+          </p:cNvPr>
+          <p:cNvPicPr>
+            <a:picLocks noChangeAspect="1"/>
+          </p:cNvPicPr>
+          <p:nvPr/>
+        </p:nvPicPr>
+        <p:blipFill>
+          <a:blip r:embed="rId2"/>
+          <a:stretch>
+            <a:fillRect/>
+          </a:stretch>
+        </p:blipFill>
+        <p:spPr>
+          <a:xfrm>
+            <a:off x="8100237" y="1921724"/>
+            <a:ext cx="3212805" cy="3191762"/>
+          </a:xfrm>
+          <a:prstGeom prst="rect">
+            <a:avLst/>
+          </a:prstGeom>
+        </p:spPr>
+      </p:pic>
       <p:sp>
         <p:nvSpPr>
-          <p:cNvPr id="5" name="TextBox 4"/>
+          <p:cNvPr id="6" name="TextBox 5">
+            <a:extLst>
+              <a:ext uri="{FF2B5EF4-FFF2-40B4-BE49-F238E27FC236}">
+                <a16:creationId xmlns:a16="http://schemas.microsoft.com/office/drawing/2014/main" id="{9A136A63-945E-2648-B67E-7B20D7999AB8}"/>
+              </a:ext>
+            </a:extLst>
+          </p:cNvPr>
           <p:cNvSpPr txBox="1"/>
           <p:nvPr/>
         </p:nvSpPr>
         <p:spPr>
           <a:xfrm>
-            <a:off x="822960" y="1554480"/>
-            <a:ext cx="10515600" cy="4206240"/>
+            <a:off x="482504" y="1531373"/>
+            <a:ext cx="8156944" cy="2508379"/>
           </a:xfrm>
           <a:prstGeom prst="rect">
             <a:avLst/>
@@ -30736,86 +31052,189 @@
           <a:noFill/>
         </p:spPr>
         <p:txBody>
-          <a:bodyPr wrap="square">
+          <a:bodyPr rot="0" spcFirstLastPara="0" vertOverflow="overflow" horzOverflow="overflow" vert="horz" wrap="square" lIns="0" tIns="0" rIns="0" bIns="0" numCol="1" spcCol="0" rtlCol="0" fromWordArt="0" anchor="t" anchorCtr="0" forceAA="0" compatLnSpc="1">
+            <a:prstTxWarp prst="textNoShape">
+              <a:avLst/>
+            </a:prstTxWarp>
             <a:spAutoFit/>
           </a:bodyPr>
           <a:lstStyle/>
           <a:p>
-            <a:pPr>
-              <a:spcAft>
-                <a:spcPts val="1200"/>
-              </a:spcAft>
-              <a:buNone/>
+            <a:pPr marL="285750" indent="-285750">
+              <a:buFont typeface="Arial"/>
+              <a:buChar char="•"/>
             </a:pPr>
             <a:r>
-              <a:rPr sz="2200" b="1" i="0">
-                <a:solidFill>
-                  <a:srgbClr val="00B0F0"/>
-                </a:solidFill>
+              <a:rPr lang="en-US" sz="2000">
+                <a:ea typeface="+mn-lt"/>
+                <a:cs typeface="+mn-lt"/>
               </a:rPr>
-              <a:t>AES-128 is the worldwide standard for symmetric encryption (NIST FIPS-197).</a:t>
+              <a:t>Data security is critical across embedded systems, IoT, and communications infrastructure</a:t>
             </a:r>
+            <a:endParaRPr lang="en-US" sz="2000">
+              <a:cs typeface="Arial"/>
+            </a:endParaRPr>
+          </a:p>
+          <a:p>
+            <a:pPr marL="285750" indent="-285750">
+              <a:buFont typeface="Arial"/>
+              <a:buChar char="•"/>
+            </a:pPr>
+            <a:endParaRPr lang="en-US" sz="2000">
+              <a:ea typeface="+mn-lt"/>
+              <a:cs typeface="+mn-lt"/>
+            </a:endParaRPr>
+          </a:p>
+          <a:p>
+            <a:pPr marL="285750" indent="-285750">
+              <a:buFont typeface="Arial"/>
+              <a:buChar char="•"/>
+            </a:pPr>
+            <a:r>
+              <a:rPr lang="en-US" sz="2000">
+                <a:ea typeface="+mn-lt"/>
+                <a:cs typeface="+mn-lt"/>
+              </a:rPr>
+              <a:t>Encryption is the primary mechanism </a:t>
+            </a:r>
+            <a:endParaRPr lang="en-US" sz="2000">
+              <a:cs typeface="Arial"/>
+            </a:endParaRPr>
+          </a:p>
+          <a:p>
+            <a:pPr marL="285750" indent="-285750">
+              <a:buFont typeface="Arial"/>
+              <a:buChar char="•"/>
+            </a:pPr>
+            <a:endParaRPr lang="en-US" sz="2000">
+              <a:ea typeface="+mn-lt"/>
+              <a:cs typeface="+mn-lt"/>
+            </a:endParaRPr>
+          </a:p>
+          <a:p>
+            <a:pPr marL="285750" indent="-285750">
+              <a:buFont typeface="Arial"/>
+              <a:buChar char="•"/>
+            </a:pPr>
+            <a:r>
+              <a:rPr lang="en-US" sz="2000">
+                <a:ea typeface="+mn-lt"/>
+                <a:cs typeface="+mn-lt"/>
+              </a:rPr>
+              <a:t>AES is the global standard</a:t>
+            </a:r>
+            <a:endParaRPr lang="en-US" sz="2000">
+              <a:cs typeface="Arial"/>
+            </a:endParaRPr>
+          </a:p>
+          <a:p>
+            <a:pPr marL="285750" indent="-285750">
+              <a:buFont typeface="Arial"/>
+              <a:buChar char="•"/>
+            </a:pPr>
+            <a:endParaRPr lang="en-US" sz="2000">
+              <a:ea typeface="+mn-lt"/>
+              <a:cs typeface="+mn-lt"/>
+            </a:endParaRPr>
           </a:p>
           <a:p>
             <a:pPr>
+              <a:lnSpc>
+                <a:spcPct val="90000"/>
+              </a:lnSpc>
+              <a:spcBef>
+                <a:spcPts val="600"/>
+              </a:spcBef>
               <a:spcAft>
-                <a:spcPts val="1000"/>
+                <a:spcPts val="600"/>
               </a:spcAft>
             </a:pPr>
+            <a:endParaRPr lang="en-US" sz="2000">
+              <a:cs typeface="Arial"/>
+            </a:endParaRPr>
+          </a:p>
+        </p:txBody>
+      </p:sp>
+      <p:sp>
+        <p:nvSpPr>
+          <p:cNvPr id="7" name="TextBox 6">
+            <a:extLst>
+              <a:ext uri="{FF2B5EF4-FFF2-40B4-BE49-F238E27FC236}">
+                <a16:creationId xmlns:a16="http://schemas.microsoft.com/office/drawing/2014/main" id="{86367E5D-0B3B-F914-E5A2-70095DF947AD}"/>
+              </a:ext>
+            </a:extLst>
+          </p:cNvPr>
+          <p:cNvSpPr txBox="1"/>
+          <p:nvPr/>
+        </p:nvSpPr>
+        <p:spPr>
+          <a:xfrm>
+            <a:off x="482781" y="3753081"/>
+            <a:ext cx="6836734" cy="1529650"/>
+          </a:xfrm>
+          <a:prstGeom prst="rect">
+            <a:avLst/>
+          </a:prstGeom>
+          <a:noFill/>
+        </p:spPr>
+        <p:txBody>
+          <a:bodyPr rot="0" spcFirstLastPara="0" vertOverflow="overflow" horzOverflow="overflow" vert="horz" wrap="square" lIns="0" tIns="0" rIns="0" bIns="0" numCol="1" spcCol="0" rtlCol="0" fromWordArt="0" anchor="t" anchorCtr="0" forceAA="0" compatLnSpc="1">
+            <a:prstTxWarp prst="textNoShape">
+              <a:avLst/>
+            </a:prstTxWarp>
+            <a:spAutoFit/>
+          </a:bodyPr>
+          <a:lstStyle/>
+          <a:p>
             <a:r>
-              <a:rPr sz="2000" b="0" i="0">
-                <a:solidFill>
-                  <a:srgbClr val="202020"/>
-                </a:solidFill>
+              <a:rPr lang="en-US" sz="2000">
+                <a:cs typeface="Arial"/>
               </a:rPr>
-              <a:t>It runs constantly on small embedded and IoT processors: TLS handshakes, secure boot, disk and message encryption.</a:t>
+              <a:t>The primary goal of this project: </a:t>
             </a:r>
+            <a:endParaRPr lang="en-US">
+              <a:cs typeface="Arial" panose="020B0604020202020204"/>
+            </a:endParaRPr>
           </a:p>
           <a:p>
-            <a:pPr>
+            <a:pPr marL="285750" indent="-285750">
+              <a:buFont typeface="Arial,Sans-Serif"/>
+              <a:buChar char="•"/>
+            </a:pPr>
+            <a:endParaRPr lang="en-US" sz="2000">
+              <a:cs typeface="Arial"/>
+            </a:endParaRPr>
+          </a:p>
+          <a:p>
+            <a:pPr marL="285750" indent="-285750">
+              <a:buFont typeface="Arial,Sans-Serif"/>
+              <a:buChar char="•"/>
+            </a:pPr>
+            <a:r>
+              <a:rPr lang="en-US" sz="2000">
+                <a:cs typeface="Arial"/>
+              </a:rPr>
+              <a:t>implement AES acceleration on a RISC-V core efficiently in hardware</a:t>
+            </a:r>
+            <a:endParaRPr lang="en-US">
+              <a:cs typeface="Arial"/>
+            </a:endParaRPr>
+          </a:p>
+          <a:p>
+            <a:pPr algn="l">
+              <a:lnSpc>
+                <a:spcPct val="90000"/>
+              </a:lnSpc>
+              <a:spcBef>
+                <a:spcPts val="600"/>
+              </a:spcBef>
               <a:spcAft>
-                <a:spcPts val="1000"/>
+                <a:spcPts val="600"/>
               </a:spcAft>
             </a:pPr>
-            <a:r>
-              <a:rPr sz="2000" b="0" i="0">
-                <a:solidFill>
-                  <a:srgbClr val="202020"/>
-                </a:solidFill>
-              </a:rPr>
-              <a:t>On a plain RISC-V core, AES is pure software: thousands of cycles per block, which is slow and power-hungry.</a:t>
-            </a:r>
-          </a:p>
-          <a:p>
-            <a:pPr>
-              <a:spcAft>
-                <a:spcPts val="1400"/>
-              </a:spcAft>
-            </a:pPr>
-            <a:r>
-              <a:rPr sz="2000" b="0" i="0">
-                <a:solidFill>
-                  <a:srgbClr val="202020"/>
-                </a:solidFill>
-              </a:rPr>
-              <a:t>Naive AES also leaks: an attacker measuring power can recover the key (side-channel attack).</a:t>
-            </a:r>
-          </a:p>
-          <a:p>
-            <a:pPr>
-              <a:spcAft>
-                <a:spcPts val="400"/>
-              </a:spcAft>
-              <a:buNone/>
-            </a:pPr>
-            <a:r>
-              <a:rPr sz="2000" b="1" i="0">
-                <a:solidFill>
-                  <a:srgbClr val="202020"/>
-                </a:solidFill>
-              </a:rPr>
-              <a:t>Our goal: make AES on RISC-V both fast (hardware instructions) and side-channel resistant.</a:t>
-            </a:r>
+            <a:endParaRPr lang="en-US" sz="1600">
+              <a:cs typeface="Arial"/>
+            </a:endParaRPr>
           </a:p>
         </p:txBody>
       </p:sp>
@@ -30841,10 +31260,1302 @@
       </p:transition>
     </mc:Fallback>
   </mc:AlternateContent>
+  <p:timing>
+    <p:tnLst>
+      <p:par>
+        <p:cTn id="1" dur="indefinite" restart="never" nodeType="tmRoot">
+          <p:childTnLst>
+            <p:seq concurrent="1" nextAc="seek">
+              <p:cTn id="2" dur="indefinite" nodeType="mainSeq">
+                <p:childTnLst>
+                  <p:par>
+                    <p:cTn id="3" fill="hold">
+                      <p:stCondLst>
+                        <p:cond delay="indefinite"/>
+                      </p:stCondLst>
+                      <p:childTnLst>
+                        <p:par>
+                          <p:cTn id="4" fill="hold">
+                            <p:stCondLst>
+                              <p:cond delay="0"/>
+                            </p:stCondLst>
+                            <p:childTnLst>
+                              <p:par>
+                                <p:cTn id="5" presetID="10" presetClass="entr" presetSubtype="0" fill="hold" grpId="0" nodeType="clickEffect">
+                                  <p:stCondLst>
+                                    <p:cond delay="0"/>
+                                  </p:stCondLst>
+                                  <p:childTnLst>
+                                    <p:set>
+                                      <p:cBhvr>
+                                        <p:cTn id="6" dur="1" fill="hold">
+                                          <p:stCondLst>
+                                            <p:cond delay="0"/>
+                                          </p:stCondLst>
+                                        </p:cTn>
+                                        <p:tgtEl>
+                                          <p:spTgt spid="7"/>
+                                        </p:tgtEl>
+                                        <p:attrNameLst>
+                                          <p:attrName>style.visibility</p:attrName>
+                                        </p:attrNameLst>
+                                      </p:cBhvr>
+                                      <p:to>
+                                        <p:strVal val="visible"/>
+                                      </p:to>
+                                    </p:set>
+                                    <p:animEffect transition="in" filter="fade">
+                                      <p:cBhvr>
+                                        <p:cTn id="7" dur="500"/>
+                                        <p:tgtEl>
+                                          <p:spTgt spid="7"/>
+                                        </p:tgtEl>
+                                      </p:cBhvr>
+                                    </p:animEffect>
+                                  </p:childTnLst>
+                                </p:cTn>
+                              </p:par>
+                            </p:childTnLst>
+                          </p:cTn>
+                        </p:par>
+                      </p:childTnLst>
+                    </p:cTn>
+                  </p:par>
+                </p:childTnLst>
+              </p:cTn>
+              <p:prevCondLst>
+                <p:cond evt="onPrev" delay="0">
+                  <p:tgtEl>
+                    <p:sldTgt/>
+                  </p:tgtEl>
+                </p:cond>
+              </p:prevCondLst>
+              <p:nextCondLst>
+                <p:cond evt="onNext" delay="0">
+                  <p:tgtEl>
+                    <p:sldTgt/>
+                  </p:tgtEl>
+                </p:cond>
+              </p:nextCondLst>
+            </p:seq>
+          </p:childTnLst>
+        </p:cTn>
+      </p:par>
+    </p:tnLst>
+    <p:bldLst>
+      <p:bldP spid="7" grpId="0"/>
+    </p:bldLst>
+  </p:timing>
 </p:sld>
 </file>
 
 <file path=ppt/slides/slide20.xml><?xml version="1.0" encoding="utf-8"?>
+<p:sld xmlns:a="http://schemas.openxmlformats.org/drawingml/2006/main" xmlns:r="http://schemas.openxmlformats.org/officeDocument/2006/relationships" xmlns:p="http://schemas.openxmlformats.org/presentationml/2006/main">
+  <p:cSld>
+    <p:spTree>
+      <p:nvGrpSpPr>
+        <p:cNvPr id="1" name="">
+          <a:extLst>
+            <a:ext uri="{FF2B5EF4-FFF2-40B4-BE49-F238E27FC236}">
+              <a16:creationId xmlns:a16="http://schemas.microsoft.com/office/drawing/2014/main" id="{B4584D8E-6C80-DCEF-8ACA-F58206798C77}"/>
+            </a:ext>
+          </a:extLst>
+        </p:cNvPr>
+        <p:cNvGrpSpPr/>
+        <p:nvPr/>
+      </p:nvGrpSpPr>
+      <p:grpSpPr>
+        <a:xfrm>
+          <a:off x="0" y="0"/>
+          <a:ext cx="0" cy="0"/>
+          <a:chOff x="0" y="0"/>
+          <a:chExt cx="0" cy="0"/>
+        </a:xfrm>
+      </p:grpSpPr>
+      <p:sp>
+        <p:nvSpPr>
+          <p:cNvPr id="2" name="Title 1">
+            <a:extLst>
+              <a:ext uri="{FF2B5EF4-FFF2-40B4-BE49-F238E27FC236}">
+                <a16:creationId xmlns:a16="http://schemas.microsoft.com/office/drawing/2014/main" id="{1ED07207-E804-3034-F5AE-A26DFB4166F8}"/>
+              </a:ext>
+            </a:extLst>
+          </p:cNvPr>
+          <p:cNvSpPr>
+            <a:spLocks noGrp="1"/>
+          </p:cNvSpPr>
+          <p:nvPr>
+            <p:ph type="title"/>
+          </p:nvPr>
+        </p:nvSpPr>
+        <p:spPr>
+          <a:xfrm>
+            <a:off x="617601" y="722376"/>
+            <a:ext cx="10896600" cy="822960"/>
+          </a:xfrm>
+        </p:spPr>
+        <p:txBody>
+          <a:bodyPr/>
+          <a:lstStyle/>
+          <a:p>
+            <a:r>
+              <a:rPr lang="en-US" sz="3400"/>
+              <a:t>Hardware Validation Results: DOM defeats the attack</a:t>
+            </a:r>
+            <a:endParaRPr lang="en-US" sz="3400">
+              <a:cs typeface="Arial"/>
+            </a:endParaRPr>
+          </a:p>
+        </p:txBody>
+      </p:sp>
+      <p:sp>
+        <p:nvSpPr>
+          <p:cNvPr id="3" name="TextBox 2">
+            <a:extLst>
+              <a:ext uri="{FF2B5EF4-FFF2-40B4-BE49-F238E27FC236}">
+                <a16:creationId xmlns:a16="http://schemas.microsoft.com/office/drawing/2014/main" id="{217E8B08-C6BF-8A64-DCB7-EF2E12D7D29E}"/>
+              </a:ext>
+            </a:extLst>
+          </p:cNvPr>
+          <p:cNvSpPr txBox="1"/>
+          <p:nvPr/>
+        </p:nvSpPr>
+        <p:spPr>
+          <a:xfrm>
+            <a:off x="548640" y="1417320"/>
+            <a:ext cx="11064240" cy="369332"/>
+          </a:xfrm>
+          <a:prstGeom prst="rect">
+            <a:avLst/>
+          </a:prstGeom>
+          <a:noFill/>
+        </p:spPr>
+        <p:txBody>
+          <a:bodyPr wrap="square" lIns="91440" tIns="45720" rIns="91440" bIns="45720" anchor="t">
+            <a:spAutoFit/>
+          </a:bodyPr>
+          <a:lstStyle/>
+          <a:p>
+            <a:pPr>
+              <a:spcAft>
+                <a:spcPts val="600"/>
+              </a:spcAft>
+            </a:pPr>
+            <a:r>
+              <a:rPr lang="en-US" b="1">
+                <a:solidFill>
+                  <a:srgbClr val="00B0F0"/>
+                </a:solidFill>
+              </a:rPr>
+              <a:t>Real silicon confirms simulation – leakage disappears with DOM masking</a:t>
+            </a:r>
+            <a:endParaRPr sz="1800" b="1">
+              <a:solidFill>
+                <a:srgbClr val="00B0F0"/>
+              </a:solidFill>
+            </a:endParaRPr>
+          </a:p>
+        </p:txBody>
+      </p:sp>
+      <p:graphicFrame>
+        <p:nvGraphicFramePr>
+          <p:cNvPr id="8" name="Table 7">
+            <a:extLst>
+              <a:ext uri="{FF2B5EF4-FFF2-40B4-BE49-F238E27FC236}">
+                <a16:creationId xmlns:a16="http://schemas.microsoft.com/office/drawing/2014/main" id="{AF211F47-C021-BC48-C403-0B5B756C363D}"/>
+              </a:ext>
+            </a:extLst>
+          </p:cNvPr>
+          <p:cNvGraphicFramePr>
+            <a:graphicFrameLocks noGrp="1"/>
+          </p:cNvGraphicFramePr>
+          <p:nvPr>
+            <p:extLst>
+              <p:ext uri="{D42A27DB-BD31-4B8C-83A1-F6EECF244321}">
+                <p14:modId xmlns:p14="http://schemas.microsoft.com/office/powerpoint/2010/main" val="3242755240"/>
+              </p:ext>
+            </p:extLst>
+          </p:nvPr>
+        </p:nvGraphicFramePr>
+        <p:xfrm>
+          <a:off x="621030" y="1941576"/>
+          <a:ext cx="10826228" cy="2032000"/>
+        </p:xfrm>
+        <a:graphic>
+          <a:graphicData uri="http://schemas.openxmlformats.org/drawingml/2006/table">
+            <a:tbl>
+              <a:tblPr firstRow="1" bandRow="1">
+                <a:tableStyleId>{5C22544A-7EE6-4342-B048-85BDC9FD1C3A}</a:tableStyleId>
+              </a:tblPr>
+              <a:tblGrid>
+                <a:gridCol w="2706557">
+                  <a:extLst>
+                    <a:ext uri="{9D8B030D-6E8A-4147-A177-3AD203B41FA5}">
+                      <a16:colId xmlns:a16="http://schemas.microsoft.com/office/drawing/2014/main" val="3701616295"/>
+                    </a:ext>
+                  </a:extLst>
+                </a:gridCol>
+                <a:gridCol w="2706557">
+                  <a:extLst>
+                    <a:ext uri="{9D8B030D-6E8A-4147-A177-3AD203B41FA5}">
+                      <a16:colId xmlns:a16="http://schemas.microsoft.com/office/drawing/2014/main" val="3636460982"/>
+                    </a:ext>
+                  </a:extLst>
+                </a:gridCol>
+                <a:gridCol w="2706557">
+                  <a:extLst>
+                    <a:ext uri="{9D8B030D-6E8A-4147-A177-3AD203B41FA5}">
+                      <a16:colId xmlns:a16="http://schemas.microsoft.com/office/drawing/2014/main" val="2589709152"/>
+                    </a:ext>
+                  </a:extLst>
+                </a:gridCol>
+                <a:gridCol w="2706557">
+                  <a:extLst>
+                    <a:ext uri="{9D8B030D-6E8A-4147-A177-3AD203B41FA5}">
+                      <a16:colId xmlns:a16="http://schemas.microsoft.com/office/drawing/2014/main" val="473531409"/>
+                    </a:ext>
+                  </a:extLst>
+                </a:gridCol>
+              </a:tblGrid>
+              <a:tr h="370840">
+                <a:tc>
+                  <a:txBody>
+                    <a:bodyPr/>
+                    <a:lstStyle/>
+                    <a:p>
+                      <a:pPr lvl="0">
+                        <a:buNone/>
+                      </a:pPr>
+                      <a:r>
+                        <a:rPr lang="en-US" sz="1500" b="1">
+                          <a:solidFill>
+                            <a:srgbClr val="FFFFFF"/>
+                          </a:solidFill>
+                        </a:rPr>
+                        <a:t>Metric</a:t>
+                      </a:r>
+                      <a:endParaRPr lang="en-US"/>
+                    </a:p>
+                  </a:txBody>
+                  <a:tcPr anchor="ctr"/>
+                </a:tc>
+                <a:tc>
+                  <a:txBody>
+                    <a:bodyPr/>
+                    <a:lstStyle/>
+                    <a:p>
+                      <a:pPr lvl="0">
+                        <a:buNone/>
+                      </a:pPr>
+                      <a:r>
+                        <a:rPr lang="en-US" sz="1500" b="1">
+                          <a:solidFill>
+                            <a:srgbClr val="FFFFFF"/>
+                          </a:solidFill>
+                        </a:rPr>
+                        <a:t>AES_100t</a:t>
+                      </a:r>
+                      <a:endParaRPr lang="en-US"/>
+                    </a:p>
+                  </a:txBody>
+                  <a:tcPr anchor="ctr"/>
+                </a:tc>
+                <a:tc>
+                  <a:txBody>
+                    <a:bodyPr/>
+                    <a:lstStyle/>
+                    <a:p>
+                      <a:pPr lvl="0">
+                        <a:buNone/>
+                      </a:pPr>
+                      <a:r>
+                        <a:rPr lang="en-US" sz="1500" b="1">
+                          <a:solidFill>
+                            <a:srgbClr val="FFFFFF"/>
+                          </a:solidFill>
+                        </a:rPr>
+                        <a:t>Baseline RI5CY</a:t>
+                      </a:r>
+                      <a:endParaRPr lang="en-US"/>
+                    </a:p>
+                  </a:txBody>
+                  <a:tcPr anchor="ctr"/>
+                </a:tc>
+                <a:tc>
+                  <a:txBody>
+                    <a:bodyPr/>
+                    <a:lstStyle/>
+                    <a:p>
+                      <a:pPr lvl="0">
+                        <a:buNone/>
+                      </a:pPr>
+                      <a:r>
+                        <a:rPr lang="en-US" sz="1400" b="1" i="0" u="none" strike="noStrike" noProof="0">
+                          <a:solidFill>
+                            <a:srgbClr val="FFFFFF"/>
+                          </a:solidFill>
+                          <a:latin typeface="Arial"/>
+                          <a:cs typeface="Arial"/>
+                        </a:rPr>
+                        <a:t>DOM Protected RISCY</a:t>
+                      </a:r>
+                      <a:endParaRPr lang="en-US"/>
+                    </a:p>
+                  </a:txBody>
+                  <a:tcPr/>
+                </a:tc>
+                <a:extLst>
+                  <a:ext uri="{0D108BD9-81ED-4DB2-BD59-A6C34878D82A}">
+                    <a16:rowId xmlns:a16="http://schemas.microsoft.com/office/drawing/2014/main" val="2078404044"/>
+                  </a:ext>
+                </a:extLst>
+              </a:tr>
+              <a:tr h="370840">
+                <a:tc>
+                  <a:txBody>
+                    <a:bodyPr/>
+                    <a:lstStyle/>
+                    <a:p>
+                      <a:pPr lvl="0">
+                        <a:buNone/>
+                      </a:pPr>
+                      <a:r>
+                        <a:rPr lang="en-US" sz="1500" b="1"/>
+                        <a:t>CPA bytes recovered</a:t>
+                      </a:r>
+                    </a:p>
+                  </a:txBody>
+                  <a:tcPr anchor="ctr"/>
+                </a:tc>
+                <a:tc>
+                  <a:txBody>
+                    <a:bodyPr/>
+                    <a:lstStyle/>
+                    <a:p>
+                      <a:pPr lvl="0">
+                        <a:buNone/>
+                      </a:pPr>
+                      <a:r>
+                        <a:rPr lang="en-US" sz="1500" b="0"/>
+                        <a:t>16/</a:t>
+                      </a:r>
+                      <a:r>
+                        <a:rPr lang="en-US" sz="1500" b="0" kern="1200">
+                          <a:solidFill>
+                            <a:schemeClr val="dk1"/>
+                          </a:solidFill>
+                          <a:latin typeface="+mn-lt"/>
+                          <a:ea typeface="+mn-ea"/>
+                          <a:cs typeface="+mn-cs"/>
+                        </a:rPr>
+                        <a:t>16</a:t>
+                      </a:r>
+                    </a:p>
+                  </a:txBody>
+                  <a:tcPr anchor="ctr"/>
+                </a:tc>
+                <a:tc>
+                  <a:txBody>
+                    <a:bodyPr/>
+                    <a:lstStyle/>
+                    <a:p>
+                      <a:pPr lvl="0">
+                        <a:buNone/>
+                      </a:pPr>
+                      <a:r>
+                        <a:rPr lang="en-US" sz="1500" b="0" kern="1200">
+                          <a:solidFill>
+                            <a:schemeClr val="dk1"/>
+                          </a:solidFill>
+                          <a:latin typeface="+mn-lt"/>
+                          <a:ea typeface="+mn-ea"/>
+                          <a:cs typeface="+mn-cs"/>
+                        </a:rPr>
+                        <a:t>0/16 (Need more traces)</a:t>
+                      </a:r>
+                    </a:p>
+                  </a:txBody>
+                  <a:tcPr anchor="ctr"/>
+                </a:tc>
+                <a:tc>
+                  <a:txBody>
+                    <a:bodyPr/>
+                    <a:lstStyle/>
+                    <a:p>
+                      <a:pPr lvl="0">
+                        <a:buNone/>
+                      </a:pPr>
+                      <a:r>
+                        <a:rPr lang="en-US" sz="1500" b="0" kern="1200" noProof="0">
+                          <a:solidFill>
+                            <a:schemeClr val="dk1"/>
+                          </a:solidFill>
+                          <a:latin typeface="+mn-lt"/>
+                          <a:ea typeface="+mn-ea"/>
+                          <a:cs typeface="+mn-cs"/>
+                        </a:rPr>
+                        <a:t>0/16  (Protected)</a:t>
+                      </a:r>
+                      <a:endParaRPr lang="en-US" sz="1500" b="0" kern="1200">
+                        <a:solidFill>
+                          <a:schemeClr val="dk1"/>
+                        </a:solidFill>
+                        <a:latin typeface="+mn-lt"/>
+                        <a:ea typeface="+mn-ea"/>
+                        <a:cs typeface="+mn-cs"/>
+                      </a:endParaRPr>
+                    </a:p>
+                  </a:txBody>
+                  <a:tcPr/>
+                </a:tc>
+                <a:extLst>
+                  <a:ext uri="{0D108BD9-81ED-4DB2-BD59-A6C34878D82A}">
+                    <a16:rowId xmlns:a16="http://schemas.microsoft.com/office/drawing/2014/main" val="2223882475"/>
+                  </a:ext>
+                </a:extLst>
+              </a:tr>
+              <a:tr h="370840">
+                <a:tc>
+                  <a:txBody>
+                    <a:bodyPr/>
+                    <a:lstStyle/>
+                    <a:p>
+                      <a:pPr lvl="0">
+                        <a:buNone/>
+                      </a:pPr>
+                      <a:r>
+                        <a:rPr lang="en-US" sz="1500" b="1"/>
+                        <a:t>CPA max correlation</a:t>
+                      </a:r>
+                    </a:p>
+                  </a:txBody>
+                  <a:tcPr anchor="ctr"/>
+                </a:tc>
+                <a:tc>
+                  <a:txBody>
+                    <a:bodyPr/>
+                    <a:lstStyle/>
+                    <a:p>
+                      <a:pPr lvl="0">
+                        <a:buNone/>
+                      </a:pPr>
+                      <a:r>
+                        <a:rPr lang="en-US" sz="1500" b="0" kern="1200" noProof="0">
+                          <a:solidFill>
+                            <a:schemeClr val="dk1"/>
+                          </a:solidFill>
+                          <a:latin typeface="+mn-lt"/>
+                          <a:ea typeface="+mn-ea"/>
+                          <a:cs typeface="+mn-cs"/>
+                        </a:rPr>
+                        <a:t>0.236 (strong)                   </a:t>
+                      </a:r>
+                      <a:endParaRPr lang="en-US" sz="1500" b="0" kern="1200">
+                        <a:solidFill>
+                          <a:schemeClr val="dk1"/>
+                        </a:solidFill>
+                        <a:latin typeface="+mn-lt"/>
+                        <a:ea typeface="+mn-ea"/>
+                        <a:cs typeface="+mn-cs"/>
+                      </a:endParaRPr>
+                    </a:p>
+                  </a:txBody>
+                  <a:tcPr anchor="ctr"/>
+                </a:tc>
+                <a:tc>
+                  <a:txBody>
+                    <a:bodyPr/>
+                    <a:lstStyle/>
+                    <a:p>
+                      <a:pPr lvl="0">
+                        <a:buNone/>
+                      </a:pPr>
+                      <a:r>
+                        <a:rPr lang="en-US" sz="1500" b="0" kern="1200" noProof="0">
+                          <a:solidFill>
+                            <a:schemeClr val="dk1"/>
+                          </a:solidFill>
+                          <a:latin typeface="+mn-lt"/>
+                          <a:ea typeface="+mn-ea"/>
+                          <a:cs typeface="+mn-cs"/>
+                        </a:rPr>
+                        <a:t>0.21, PGE dropping               </a:t>
+                      </a:r>
+                      <a:endParaRPr lang="en-US" sz="1500" b="0" kern="1200">
+                        <a:solidFill>
+                          <a:schemeClr val="dk1"/>
+                        </a:solidFill>
+                        <a:latin typeface="+mn-lt"/>
+                        <a:ea typeface="+mn-ea"/>
+                        <a:cs typeface="+mn-cs"/>
+                      </a:endParaRPr>
+                    </a:p>
+                  </a:txBody>
+                  <a:tcPr anchor="ctr"/>
+                </a:tc>
+                <a:tc>
+                  <a:txBody>
+                    <a:bodyPr/>
+                    <a:lstStyle/>
+                    <a:p>
+                      <a:pPr lvl="0">
+                        <a:buNone/>
+                      </a:pPr>
+                      <a:r>
+                        <a:rPr lang="en-US" sz="1500" b="0" kern="1200" noProof="0">
+                          <a:solidFill>
+                            <a:schemeClr val="dk1"/>
+                          </a:solidFill>
+                          <a:latin typeface="+mn-lt"/>
+                          <a:ea typeface="+mn-ea"/>
+                          <a:cs typeface="+mn-cs"/>
+                        </a:rPr>
+                        <a:t>0.07 (noise floor)</a:t>
+                      </a:r>
+                      <a:endParaRPr lang="en-US" sz="1500" b="0" kern="1200">
+                        <a:solidFill>
+                          <a:schemeClr val="dk1"/>
+                        </a:solidFill>
+                        <a:latin typeface="+mn-lt"/>
+                        <a:ea typeface="+mn-ea"/>
+                        <a:cs typeface="+mn-cs"/>
+                      </a:endParaRPr>
+                    </a:p>
+                  </a:txBody>
+                  <a:tcPr/>
+                </a:tc>
+                <a:extLst>
+                  <a:ext uri="{0D108BD9-81ED-4DB2-BD59-A6C34878D82A}">
+                    <a16:rowId xmlns:a16="http://schemas.microsoft.com/office/drawing/2014/main" val="2394492117"/>
+                  </a:ext>
+                </a:extLst>
+              </a:tr>
+              <a:tr h="370840">
+                <a:tc>
+                  <a:txBody>
+                    <a:bodyPr/>
+                    <a:lstStyle/>
+                    <a:p>
+                      <a:pPr lvl="0">
+                        <a:buNone/>
+                      </a:pPr>
+                      <a:r>
+                        <a:rPr lang="en-US" sz="1500" b="1"/>
+                        <a:t>TVLA max |t|</a:t>
+                      </a:r>
+                      <a:endParaRPr lang="en-US"/>
+                    </a:p>
+                  </a:txBody>
+                  <a:tcPr anchor="ctr"/>
+                </a:tc>
+                <a:tc>
+                  <a:txBody>
+                    <a:bodyPr/>
+                    <a:lstStyle/>
+                    <a:p>
+                      <a:pPr lvl="0">
+                        <a:buNone/>
+                      </a:pPr>
+                      <a:r>
+                        <a:rPr lang="en-US" sz="1500" b="0" kern="1200" noProof="0">
+                          <a:solidFill>
+                            <a:schemeClr val="dk1"/>
+                          </a:solidFill>
+                          <a:latin typeface="+mn-lt"/>
+                          <a:ea typeface="+mn-ea"/>
+                          <a:cs typeface="+mn-cs"/>
+                        </a:rPr>
+                        <a:t>49.27 (10.9x threshold)          </a:t>
+                      </a:r>
+                      <a:endParaRPr lang="en-US" sz="1500" b="0" kern="1200">
+                        <a:solidFill>
+                          <a:schemeClr val="dk1"/>
+                        </a:solidFill>
+                        <a:latin typeface="+mn-lt"/>
+                        <a:ea typeface="+mn-ea"/>
+                        <a:cs typeface="+mn-cs"/>
+                      </a:endParaRPr>
+                    </a:p>
+                  </a:txBody>
+                  <a:tcPr anchor="ctr"/>
+                </a:tc>
+                <a:tc>
+                  <a:txBody>
+                    <a:bodyPr/>
+                    <a:lstStyle/>
+                    <a:p>
+                      <a:pPr lvl="0">
+                        <a:buNone/>
+                      </a:pPr>
+                      <a:r>
+                        <a:rPr lang="en-US" sz="1500" b="0" kern="1200" noProof="0">
+                          <a:solidFill>
+                            <a:schemeClr val="dk1"/>
+                          </a:solidFill>
+                          <a:latin typeface="+mn-lt"/>
+                          <a:ea typeface="+mn-ea"/>
+                          <a:cs typeface="+mn-cs"/>
+                        </a:rPr>
+                        <a:t>4.69 (marginal, 1 sample)        </a:t>
+                      </a:r>
+                      <a:endParaRPr lang="en-US" sz="1500" b="0" kern="1200">
+                        <a:solidFill>
+                          <a:schemeClr val="dk1"/>
+                        </a:solidFill>
+                        <a:latin typeface="+mn-lt"/>
+                        <a:ea typeface="+mn-ea"/>
+                        <a:cs typeface="+mn-cs"/>
+                      </a:endParaRPr>
+                    </a:p>
+                  </a:txBody>
+                  <a:tcPr anchor="ctr"/>
+                </a:tc>
+                <a:tc>
+                  <a:txBody>
+                    <a:bodyPr/>
+                    <a:lstStyle/>
+                    <a:p>
+                      <a:pPr lvl="0">
+                        <a:buNone/>
+                      </a:pPr>
+                      <a:r>
+                        <a:rPr lang="en-US" sz="1500" b="0" kern="1200" noProof="0">
+                          <a:solidFill>
+                            <a:schemeClr val="dk1"/>
+                          </a:solidFill>
+                          <a:latin typeface="+mn-lt"/>
+                          <a:ea typeface="+mn-ea"/>
+                          <a:cs typeface="+mn-cs"/>
+                        </a:rPr>
+                        <a:t>3.98 (below threshold)</a:t>
+                      </a:r>
+                      <a:endParaRPr lang="en-US" sz="1500" b="0" kern="1200">
+                        <a:solidFill>
+                          <a:schemeClr val="dk1"/>
+                        </a:solidFill>
+                        <a:latin typeface="+mn-lt"/>
+                        <a:ea typeface="+mn-ea"/>
+                        <a:cs typeface="+mn-cs"/>
+                      </a:endParaRPr>
+                    </a:p>
+                  </a:txBody>
+                  <a:tcPr/>
+                </a:tc>
+                <a:extLst>
+                  <a:ext uri="{0D108BD9-81ED-4DB2-BD59-A6C34878D82A}">
+                    <a16:rowId xmlns:a16="http://schemas.microsoft.com/office/drawing/2014/main" val="727620066"/>
+                  </a:ext>
+                </a:extLst>
+              </a:tr>
+              <a:tr h="370840">
+                <a:tc>
+                  <a:txBody>
+                    <a:bodyPr/>
+                    <a:lstStyle/>
+                    <a:p>
+                      <a:pPr lvl="0">
+                        <a:buNone/>
+                      </a:pPr>
+                      <a:r>
+                        <a:rPr lang="en-US" sz="1500" b="1"/>
+                        <a:t>Leakage detected</a:t>
+                      </a:r>
+                    </a:p>
+                  </a:txBody>
+                  <a:tcPr anchor="ctr"/>
+                </a:tc>
+                <a:tc>
+                  <a:txBody>
+                    <a:bodyPr/>
+                    <a:lstStyle/>
+                    <a:p>
+                      <a:pPr lvl="0">
+                        <a:buNone/>
+                      </a:pPr>
+                      <a:r>
+                        <a:rPr lang="en-US" sz="1500" b="0" kern="1200" noProof="0">
+                          <a:solidFill>
+                            <a:schemeClr val="dk1"/>
+                          </a:solidFill>
+                          <a:latin typeface="+mn-lt"/>
+                          <a:ea typeface="+mn-ea"/>
+                          <a:cs typeface="+mn-cs"/>
+                        </a:rPr>
+                        <a:t>Yes</a:t>
+                      </a:r>
+                      <a:endParaRPr lang="en-US" sz="1500" b="0" kern="1200">
+                        <a:solidFill>
+                          <a:schemeClr val="dk1"/>
+                        </a:solidFill>
+                        <a:latin typeface="+mn-lt"/>
+                        <a:ea typeface="+mn-ea"/>
+                        <a:cs typeface="+mn-cs"/>
+                      </a:endParaRPr>
+                    </a:p>
+                  </a:txBody>
+                  <a:tcPr anchor="ctr"/>
+                </a:tc>
+                <a:tc>
+                  <a:txBody>
+                    <a:bodyPr/>
+                    <a:lstStyle/>
+                    <a:p>
+                      <a:pPr lvl="0">
+                        <a:buNone/>
+                      </a:pPr>
+                      <a:r>
+                        <a:rPr lang="en-US" sz="1500" b="0" kern="1200" noProof="0">
+                          <a:solidFill>
+                            <a:schemeClr val="dk1"/>
+                          </a:solidFill>
+                          <a:latin typeface="+mn-lt"/>
+                          <a:ea typeface="+mn-ea"/>
+                          <a:cs typeface="+mn-cs"/>
+                        </a:rPr>
+                        <a:t>Marginal (1 sample)             </a:t>
+                      </a:r>
+                      <a:endParaRPr lang="en-US"/>
+                    </a:p>
+                  </a:txBody>
+                  <a:tcPr anchor="ctr"/>
+                </a:tc>
+                <a:tc>
+                  <a:txBody>
+                    <a:bodyPr/>
+                    <a:lstStyle/>
+                    <a:p>
+                      <a:pPr lvl="0">
+                        <a:buNone/>
+                      </a:pPr>
+                      <a:r>
+                        <a:rPr lang="en-US" sz="1500" b="0" kern="1200" noProof="0">
+                          <a:solidFill>
+                            <a:schemeClr val="dk1"/>
+                          </a:solidFill>
+                          <a:latin typeface="+mn-lt"/>
+                          <a:ea typeface="+mn-ea"/>
+                          <a:cs typeface="+mn-cs"/>
+                        </a:rPr>
+                        <a:t>No</a:t>
+                      </a:r>
+                      <a:endParaRPr lang="en-US" sz="1500" b="0" kern="1200">
+                        <a:solidFill>
+                          <a:schemeClr val="dk1"/>
+                        </a:solidFill>
+                        <a:latin typeface="+mn-lt"/>
+                        <a:ea typeface="+mn-ea"/>
+                        <a:cs typeface="+mn-cs"/>
+                      </a:endParaRPr>
+                    </a:p>
+                  </a:txBody>
+                  <a:tcPr/>
+                </a:tc>
+                <a:extLst>
+                  <a:ext uri="{0D108BD9-81ED-4DB2-BD59-A6C34878D82A}">
+                    <a16:rowId xmlns:a16="http://schemas.microsoft.com/office/drawing/2014/main" val="1012761482"/>
+                  </a:ext>
+                </a:extLst>
+              </a:tr>
+            </a:tbl>
+          </a:graphicData>
+        </a:graphic>
+      </p:graphicFrame>
+      <p:sp>
+        <p:nvSpPr>
+          <p:cNvPr id="9" name="TextBox 8">
+            <a:extLst>
+              <a:ext uri="{FF2B5EF4-FFF2-40B4-BE49-F238E27FC236}">
+                <a16:creationId xmlns:a16="http://schemas.microsoft.com/office/drawing/2014/main" id="{4C91FCB4-D512-0B15-9C6C-3D693F598311}"/>
+              </a:ext>
+            </a:extLst>
+          </p:cNvPr>
+          <p:cNvSpPr txBox="1"/>
+          <p:nvPr/>
+        </p:nvSpPr>
+        <p:spPr>
+          <a:xfrm>
+            <a:off x="624839" y="4170045"/>
+            <a:ext cx="11064240" cy="1323439"/>
+          </a:xfrm>
+          <a:prstGeom prst="rect">
+            <a:avLst/>
+          </a:prstGeom>
+          <a:noFill/>
+        </p:spPr>
+        <p:txBody>
+          <a:bodyPr wrap="square" lIns="91440" tIns="45720" rIns="91440" bIns="45720" anchor="t">
+            <a:spAutoFit/>
+          </a:bodyPr>
+          <a:lstStyle/>
+          <a:p>
+            <a:pPr>
+              <a:spcAft>
+                <a:spcPts val="600"/>
+              </a:spcAft>
+            </a:pPr>
+            <a:r>
+              <a:rPr lang="en-US" sz="1600" b="1"/>
+              <a:t>Key Findings:</a:t>
+            </a:r>
+            <a:endParaRPr lang="en-US" sz="1600" b="1">
+              <a:cs typeface="Arial"/>
+            </a:endParaRPr>
+          </a:p>
+          <a:p>
+            <a:pPr marL="285750" indent="-285750">
+              <a:spcAft>
+                <a:spcPts val="600"/>
+              </a:spcAft>
+              <a:buFont typeface="Arial"/>
+              <a:buChar char="•"/>
+            </a:pPr>
+            <a:r>
+              <a:rPr lang="en-US">
+                <a:cs typeface="Arial"/>
+              </a:rPr>
+              <a:t>CPA successfully breaks unprotected hardware AES with correlation = 0.236</a:t>
+            </a:r>
+          </a:p>
+          <a:p>
+            <a:pPr marL="285750" indent="-285750">
+              <a:spcAft>
+                <a:spcPts val="600"/>
+              </a:spcAft>
+              <a:buFont typeface="Arial"/>
+              <a:buChar char="•"/>
+            </a:pPr>
+            <a:r>
+              <a:rPr lang="en-US">
+                <a:cs typeface="Arial"/>
+              </a:rPr>
+              <a:t>DOM masking bring correlation to 0.07 and TVLA t-value below the leakage threshold, confirming first-order SC resistance on real hardware.</a:t>
+            </a:r>
+          </a:p>
+        </p:txBody>
+      </p:sp>
+    </p:spTree>
+    <p:extLst>
+      <p:ext uri="{BB962C8B-B14F-4D97-AF65-F5344CB8AC3E}">
+        <p14:creationId xmlns:p14="http://schemas.microsoft.com/office/powerpoint/2010/main" val="15926914"/>
+      </p:ext>
+    </p:extLst>
+  </p:cSld>
+  <p:clrMapOvr>
+    <a:masterClrMapping/>
+  </p:clrMapOvr>
+</p:sld>
+</file>
+
+<file path=ppt/slides/slide21.xml><?xml version="1.0" encoding="utf-8"?>
+<p:sld xmlns:a="http://schemas.openxmlformats.org/drawingml/2006/main" xmlns:r="http://schemas.openxmlformats.org/officeDocument/2006/relationships" xmlns:p="http://schemas.openxmlformats.org/presentationml/2006/main">
+  <p:cSld>
+    <p:spTree>
+      <p:nvGrpSpPr>
+        <p:cNvPr id="1" name=""/>
+        <p:cNvGrpSpPr/>
+        <p:nvPr/>
+      </p:nvGrpSpPr>
+      <p:grpSpPr>
+        <a:xfrm>
+          <a:off x="0" y="0"/>
+          <a:ext cx="0" cy="0"/>
+          <a:chOff x="0" y="0"/>
+          <a:chExt cx="0" cy="0"/>
+        </a:xfrm>
+      </p:grpSpPr>
+      <p:sp>
+        <p:nvSpPr>
+          <p:cNvPr id="2" name="Date Placeholder 1">
+            <a:extLst>
+              <a:ext uri="{FF2B5EF4-FFF2-40B4-BE49-F238E27FC236}">
+                <a16:creationId xmlns:a16="http://schemas.microsoft.com/office/drawing/2014/main" id="{0215E5C3-58B4-9348-9C0F-ECF95A0265EE}"/>
+              </a:ext>
+            </a:extLst>
+          </p:cNvPr>
+          <p:cNvSpPr>
+            <a:spLocks noGrp="1"/>
+          </p:cNvSpPr>
+          <p:nvPr>
+            <p:ph type="dt" sz="half" idx="18"/>
+          </p:nvPr>
+        </p:nvSpPr>
+        <p:spPr/>
+        <p:txBody>
+          <a:bodyPr/>
+          <a:lstStyle/>
+          <a:p>
+            <a:fld id="{86CF0BC4-CAAA-4113-A44D-B077CA6D06A0}" type="datetime1">
+              <a:rPr lang="nl-NL" smtClean="0"/>
+              <a:t>12-6-2026</a:t>
+            </a:fld>
+            <a:endParaRPr lang="en-GB"/>
+          </a:p>
+        </p:txBody>
+      </p:sp>
+      <p:sp>
+        <p:nvSpPr>
+          <p:cNvPr id="3" name="Slide Number Placeholder 2">
+            <a:extLst>
+              <a:ext uri="{FF2B5EF4-FFF2-40B4-BE49-F238E27FC236}">
+                <a16:creationId xmlns:a16="http://schemas.microsoft.com/office/drawing/2014/main" id="{79275C5F-2CBD-DA27-B0C6-1D1D0B409743}"/>
+              </a:ext>
+            </a:extLst>
+          </p:cNvPr>
+          <p:cNvSpPr>
+            <a:spLocks noGrp="1"/>
+          </p:cNvSpPr>
+          <p:nvPr>
+            <p:ph type="sldNum" sz="quarter" idx="20"/>
+          </p:nvPr>
+        </p:nvSpPr>
+        <p:spPr/>
+        <p:txBody>
+          <a:bodyPr/>
+          <a:lstStyle/>
+          <a:p>
+            <a:fld id="{9E843DB9-9987-4157-AB9C-CEA8D7D910BB}" type="slidenum">
+              <a:rPr lang="en-GB" smtClean="0"/>
+              <a:pPr/>
+              <a:t>21</a:t>
+            </a:fld>
+            <a:endParaRPr lang="en-GB"/>
+          </a:p>
+        </p:txBody>
+      </p:sp>
+      <p:sp>
+        <p:nvSpPr>
+          <p:cNvPr id="4" name="Title 3">
+            <a:extLst>
+              <a:ext uri="{FF2B5EF4-FFF2-40B4-BE49-F238E27FC236}">
+                <a16:creationId xmlns:a16="http://schemas.microsoft.com/office/drawing/2014/main" id="{14260B0D-5B6B-BA13-ECC3-613864F943F9}"/>
+              </a:ext>
+            </a:extLst>
+          </p:cNvPr>
+          <p:cNvSpPr>
+            <a:spLocks noGrp="1"/>
+          </p:cNvSpPr>
+          <p:nvPr>
+            <p:ph type="title"/>
+          </p:nvPr>
+        </p:nvSpPr>
+        <p:spPr>
+          <a:xfrm>
+            <a:off x="718666" y="722454"/>
+            <a:ext cx="10743750" cy="589222"/>
+          </a:xfrm>
+        </p:spPr>
+        <p:txBody>
+          <a:bodyPr/>
+          <a:lstStyle/>
+          <a:p>
+            <a:r>
+              <a:rPr lang="en-US">
+                <a:cs typeface="Arial"/>
+              </a:rPr>
+              <a:t>Future Work</a:t>
+            </a:r>
+            <a:br>
+              <a:rPr lang="en-US">
+                <a:cs typeface="Arial"/>
+              </a:rPr>
+            </a:br>
+            <a:endParaRPr lang="en-US"/>
+          </a:p>
+        </p:txBody>
+      </p:sp>
+      <p:sp>
+        <p:nvSpPr>
+          <p:cNvPr id="5" name="TextBox 4">
+            <a:extLst>
+              <a:ext uri="{FF2B5EF4-FFF2-40B4-BE49-F238E27FC236}">
+                <a16:creationId xmlns:a16="http://schemas.microsoft.com/office/drawing/2014/main" id="{80E7CCDB-9939-2460-EF59-1689425A63F0}"/>
+              </a:ext>
+            </a:extLst>
+          </p:cNvPr>
+          <p:cNvSpPr txBox="1"/>
+          <p:nvPr/>
+        </p:nvSpPr>
+        <p:spPr>
+          <a:xfrm>
+            <a:off x="883177" y="1623867"/>
+            <a:ext cx="5436782" cy="4385816"/>
+          </a:xfrm>
+          <a:prstGeom prst="rect">
+            <a:avLst/>
+          </a:prstGeom>
+          <a:noFill/>
+        </p:spPr>
+        <p:txBody>
+          <a:bodyPr rot="0" spcFirstLastPara="0" vertOverflow="overflow" horzOverflow="overflow" vert="horz" wrap="square" lIns="0" tIns="0" rIns="0" bIns="0" numCol="1" spcCol="0" rtlCol="0" fromWordArt="0" anchor="t" anchorCtr="0" forceAA="0" compatLnSpc="1">
+            <a:prstTxWarp prst="textNoShape">
+              <a:avLst/>
+            </a:prstTxWarp>
+            <a:spAutoFit/>
+          </a:bodyPr>
+          <a:lstStyle/>
+          <a:p>
+            <a:r>
+              <a:rPr lang="en-US" sz="2000" b="1" u="sng"/>
+              <a:t>The observation:</a:t>
+            </a:r>
+            <a:r>
+              <a:rPr lang="en-US" sz="2000" b="1"/>
+              <a:t> </a:t>
+            </a:r>
+            <a:endParaRPr lang="en-US" sz="2000" b="1">
+              <a:cs typeface="Arial"/>
+            </a:endParaRPr>
+          </a:p>
+          <a:p>
+            <a:endParaRPr lang="en-US" sz="2000" b="1">
+              <a:ea typeface="+mn-lt"/>
+              <a:cs typeface="+mn-lt"/>
+            </a:endParaRPr>
+          </a:p>
+          <a:p>
+            <a:pPr marL="285750" indent="-285750">
+              <a:buFont typeface="Arial"/>
+              <a:buChar char="•"/>
+            </a:pPr>
+            <a:r>
+              <a:rPr lang="en-US" sz="2000" b="1"/>
+              <a:t>Same operation four times</a:t>
+            </a:r>
+            <a:endParaRPr lang="en-US" sz="2000" b="1">
+              <a:cs typeface="Arial"/>
+            </a:endParaRPr>
+          </a:p>
+          <a:p>
+            <a:endParaRPr lang="en-US" sz="1100" b="1">
+              <a:ea typeface="+mn-lt"/>
+              <a:cs typeface="+mn-lt"/>
+            </a:endParaRPr>
+          </a:p>
+          <a:p>
+            <a:pPr marL="285750" indent="-285750">
+              <a:buFont typeface="Arial"/>
+              <a:buChar char="•"/>
+            </a:pPr>
+            <a:r>
+              <a:rPr lang="en-US" sz="2000" b="1"/>
+              <a:t>This results in:</a:t>
+            </a:r>
+            <a:endParaRPr lang="en-US" sz="2000" b="1">
+              <a:cs typeface="Arial"/>
+            </a:endParaRPr>
+          </a:p>
+          <a:p>
+            <a:endParaRPr lang="en-US" sz="1000" b="1">
+              <a:cs typeface="Arial"/>
+            </a:endParaRPr>
+          </a:p>
+          <a:p>
+            <a:r>
+              <a:rPr lang="en-US" sz="2000" b="1"/>
+              <a:t>         Additional execution overhead </a:t>
+            </a:r>
+            <a:endParaRPr lang="en-US" sz="2000" b="1">
+              <a:cs typeface="Arial"/>
+            </a:endParaRPr>
+          </a:p>
+          <a:p>
+            <a:endParaRPr lang="en-US" sz="1600" b="1">
+              <a:cs typeface="Arial"/>
+            </a:endParaRPr>
+          </a:p>
+          <a:p>
+            <a:r>
+              <a:rPr lang="en-US" sz="2000" b="1"/>
+              <a:t>         Repeated instruction fetch and decode. </a:t>
+            </a:r>
+            <a:endParaRPr lang="en-US" sz="2000" b="1">
+              <a:cs typeface="Arial"/>
+            </a:endParaRPr>
+          </a:p>
+          <a:p>
+            <a:endParaRPr lang="en-US" sz="1400" b="1">
+              <a:cs typeface="Arial"/>
+            </a:endParaRPr>
+          </a:p>
+          <a:p>
+            <a:r>
+              <a:rPr lang="en-US" sz="2000" b="1"/>
+              <a:t>         Increased instruction count. . </a:t>
+            </a:r>
+            <a:endParaRPr lang="en-US" sz="2000" b="1">
+              <a:cs typeface="Arial"/>
+            </a:endParaRPr>
+          </a:p>
+          <a:p>
+            <a:endParaRPr lang="en-US" sz="1400" b="1">
+              <a:ea typeface="+mn-lt"/>
+              <a:cs typeface="+mn-lt"/>
+            </a:endParaRPr>
+          </a:p>
+          <a:p>
+            <a:pPr marL="285750" indent="-285750">
+              <a:buFont typeface="Arial"/>
+              <a:buChar char="•"/>
+            </a:pPr>
+            <a:r>
+              <a:rPr lang="en-US" sz="2000" b="1"/>
+              <a:t>Independent, highly regular pattern.</a:t>
+            </a:r>
+            <a:endParaRPr lang="en-US" sz="2000" b="1">
+              <a:cs typeface="Arial"/>
+            </a:endParaRPr>
+          </a:p>
+          <a:p>
+            <a:pPr marL="285750" indent="-285750">
+              <a:buFont typeface="Arial"/>
+              <a:buChar char="•"/>
+            </a:pPr>
+            <a:endParaRPr lang="en-US" sz="1400" b="1">
+              <a:cs typeface="Arial"/>
+            </a:endParaRPr>
+          </a:p>
+          <a:p>
+            <a:pPr marL="285750" indent="-285750">
+              <a:buFont typeface="Arial"/>
+              <a:buChar char="•"/>
+            </a:pPr>
+            <a:r>
+              <a:rPr lang="en-US" sz="2000" b="1">
+                <a:cs typeface="Arial"/>
+              </a:rPr>
+              <a:t>Places a limit on the throughput </a:t>
+            </a:r>
+          </a:p>
+          <a:p>
+            <a:endParaRPr lang="en-US" sz="1600" b="1">
+              <a:cs typeface="Arial"/>
+            </a:endParaRPr>
+          </a:p>
+        </p:txBody>
+      </p:sp>
+      <p:pic>
+        <p:nvPicPr>
+          <p:cNvPr id="6" name="Picture 5">
+            <a:extLst>
+              <a:ext uri="{FF2B5EF4-FFF2-40B4-BE49-F238E27FC236}">
+                <a16:creationId xmlns:a16="http://schemas.microsoft.com/office/drawing/2014/main" id="{15FC9FA0-A14B-FFF0-BF8E-2EADB7A1D275}"/>
+              </a:ext>
+            </a:extLst>
+          </p:cNvPr>
+          <p:cNvPicPr>
+            <a:picLocks noChangeAspect="1"/>
+          </p:cNvPicPr>
+          <p:nvPr/>
+        </p:nvPicPr>
+        <p:blipFill>
+          <a:blip r:embed="rId2"/>
+          <a:srcRect l="1101" t="7476" r="183" b="322"/>
+          <a:stretch>
+            <a:fillRect/>
+          </a:stretch>
+        </p:blipFill>
+        <p:spPr>
+          <a:xfrm>
+            <a:off x="6802210" y="2263548"/>
+            <a:ext cx="4378891" cy="2333949"/>
+          </a:xfrm>
+          <a:prstGeom prst="rect">
+            <a:avLst/>
+          </a:prstGeom>
+        </p:spPr>
+      </p:pic>
+      <p:sp>
+        <p:nvSpPr>
+          <p:cNvPr id="7" name="TextBox 6">
+            <a:extLst>
+              <a:ext uri="{FF2B5EF4-FFF2-40B4-BE49-F238E27FC236}">
+                <a16:creationId xmlns:a16="http://schemas.microsoft.com/office/drawing/2014/main" id="{F9310321-14FE-816A-7840-24D208065775}"/>
+              </a:ext>
+            </a:extLst>
+          </p:cNvPr>
+          <p:cNvSpPr txBox="1"/>
+          <p:nvPr/>
+        </p:nvSpPr>
+        <p:spPr>
+          <a:xfrm>
+            <a:off x="6793953" y="4679584"/>
+            <a:ext cx="4498692" cy="443198"/>
+          </a:xfrm>
+          <a:prstGeom prst="rect">
+            <a:avLst/>
+          </a:prstGeom>
+          <a:noFill/>
+        </p:spPr>
+        <p:txBody>
+          <a:bodyPr rot="0" spcFirstLastPara="0" vertOverflow="overflow" horzOverflow="overflow" vert="horz" wrap="square" lIns="0" tIns="0" rIns="0" bIns="0" numCol="1" spcCol="0" rtlCol="0" fromWordArt="0" anchor="t" anchorCtr="0" forceAA="0" compatLnSpc="1">
+            <a:prstTxWarp prst="textNoShape">
+              <a:avLst/>
+            </a:prstTxWarp>
+            <a:spAutoFit/>
+          </a:bodyPr>
+          <a:lstStyle/>
+          <a:p>
+            <a:pPr>
+              <a:lnSpc>
+                <a:spcPct val="90000"/>
+              </a:lnSpc>
+              <a:spcBef>
+                <a:spcPts val="600"/>
+              </a:spcBef>
+              <a:spcAft>
+                <a:spcPts val="600"/>
+              </a:spcAft>
+            </a:pPr>
+            <a:r>
+              <a:rPr lang="en-US" sz="1600">
+                <a:solidFill>
+                  <a:schemeClr val="tx1">
+                    <a:lumMod val="65000"/>
+                    <a:lumOff val="35000"/>
+                  </a:schemeClr>
+                </a:solidFill>
+                <a:cs typeface="Arial"/>
+              </a:rPr>
+              <a:t>  4 instructions required for a single round. A consequence of the bit width of the registers</a:t>
+            </a:r>
+            <a:endParaRPr lang="en-US">
+              <a:solidFill>
+                <a:schemeClr val="tx1">
+                  <a:lumMod val="65000"/>
+                  <a:lumOff val="35000"/>
+                </a:schemeClr>
+              </a:solidFill>
+              <a:cs typeface="Arial"/>
+            </a:endParaRPr>
+          </a:p>
+        </p:txBody>
+      </p:sp>
+    </p:spTree>
+    <p:extLst>
+      <p:ext uri="{BB962C8B-B14F-4D97-AF65-F5344CB8AC3E}">
+        <p14:creationId xmlns:p14="http://schemas.microsoft.com/office/powerpoint/2010/main" val="109653819"/>
+      </p:ext>
+    </p:extLst>
+  </p:cSld>
+  <p:clrMapOvr>
+    <a:masterClrMapping/>
+  </p:clrMapOvr>
+  <mc:AlternateContent xmlns:mc="http://schemas.openxmlformats.org/markup-compatibility/2006" xmlns:p14="http://schemas.microsoft.com/office/powerpoint/2010/main">
+    <mc:Choice Requires="p14">
+      <p:transition spd="med" p14:dur="700">
+        <p:fade/>
+      </p:transition>
+    </mc:Choice>
+    <mc:Fallback xmlns="">
+      <p:transition spd="med">
+        <p:fade/>
+      </p:transition>
+    </mc:Fallback>
+  </mc:AlternateContent>
+</p:sld>
+</file>
+
+<file path=ppt/slides/slide22.xml><?xml version="1.0" encoding="utf-8"?>
 <p:sld xmlns:a="http://schemas.openxmlformats.org/drawingml/2006/main" xmlns:r="http://schemas.openxmlformats.org/officeDocument/2006/relationships" xmlns:p="http://schemas.openxmlformats.org/presentationml/2006/main">
   <p:cSld>
     <p:spTree>
@@ -30920,7 +32631,7 @@
             <a:fld id="{9E843DB9-9987-4157-AB9C-CEA8D7D910BB}" type="slidenum">
               <a:rPr lang="en-GB" smtClean="0"/>
               <a:pPr/>
-              <a:t>18</a:t>
+              <a:t>22</a:t>
             </a:fld>
             <a:endParaRPr lang="en-GB"/>
           </a:p>
@@ -30981,8 +32692,8 @@
         </p:nvSpPr>
         <p:spPr>
           <a:xfrm>
-            <a:off x="892038" y="1712472"/>
-            <a:ext cx="5498806" cy="6678751"/>
+            <a:off x="892038" y="1721332"/>
+            <a:ext cx="5507666" cy="4208844"/>
           </a:xfrm>
           <a:prstGeom prst="rect">
             <a:avLst/>
@@ -31017,72 +32728,26 @@
             </a:r>
           </a:p>
           <a:p>
-            <a:endParaRPr lang="en-US" sz="2000">
+            <a:endParaRPr lang="en-US" sz="2000" b="1">
               <a:cs typeface="Arial"/>
             </a:endParaRPr>
           </a:p>
           <a:p>
             <a:r>
-              <a:rPr lang="en-US" sz="2000" err="1">
+              <a:rPr lang="en-US" sz="2000" b="1" err="1">
                 <a:ea typeface="+mn-lt"/>
                 <a:cs typeface="+mn-lt"/>
               </a:rPr>
               <a:t>i</a:t>
             </a:r>
             <a:r>
-              <a:rPr lang="en-US" sz="2000">
+              <a:rPr lang="en-US" sz="2000" b="1">
                 <a:ea typeface="+mn-lt"/>
                 <a:cs typeface="+mn-lt"/>
               </a:rPr>
               <a:t>) Introduce a super instruction</a:t>
             </a:r>
-            <a:endParaRPr lang="en-US" sz="2000">
-              <a:cs typeface="Arial"/>
-            </a:endParaRPr>
-          </a:p>
-          <a:p>
-            <a:endParaRPr lang="en-US" sz="2000">
-              <a:ea typeface="+mn-lt"/>
-              <a:cs typeface="+mn-lt"/>
-            </a:endParaRPr>
-          </a:p>
-          <a:p>
-            <a:r>
-              <a:rPr lang="en-US" sz="2000">
-                <a:ea typeface="+mn-lt"/>
-                <a:cs typeface="+mn-lt"/>
-              </a:rPr>
-              <a:t>ii) Replicate AES32/</a:t>
-            </a:r>
-            <a:r>
-              <a:rPr lang="en-US" sz="2000" err="1">
-                <a:ea typeface="+mn-lt"/>
-                <a:cs typeface="+mn-lt"/>
-              </a:rPr>
-              <a:t>Zkne</a:t>
-            </a:r>
-            <a:r>
-              <a:rPr lang="en-US" sz="2000">
-                <a:ea typeface="+mn-lt"/>
-                <a:cs typeface="+mn-lt"/>
-              </a:rPr>
-              <a:t> </a:t>
-            </a:r>
-            <a:r>
-              <a:rPr lang="en-US" sz="2000" err="1">
-                <a:ea typeface="+mn-lt"/>
-                <a:cs typeface="+mn-lt"/>
-              </a:rPr>
-              <a:t>datapath</a:t>
-            </a:r>
-            <a:r>
-              <a:rPr lang="en-US" sz="2000">
-                <a:ea typeface="+mn-lt"/>
-                <a:cs typeface="+mn-lt"/>
-              </a:rPr>
-              <a:t> four times</a:t>
-            </a:r>
-            <a:endParaRPr lang="en-US" sz="2000">
+            <a:endParaRPr lang="en-US" sz="2000" b="1">
               <a:cs typeface="Arial"/>
             </a:endParaRPr>
           </a:p>
@@ -31093,26 +32758,90 @@
             </a:endParaRPr>
           </a:p>
           <a:p>
-            <a:r>
-              <a:rPr lang="en-US" sz="2000">
-                <a:ea typeface="+mn-lt"/>
-                <a:cs typeface="+mn-lt"/>
-              </a:rPr>
-              <a:t>iii) Execute in parallel within a single instruction.</a:t>
-            </a:r>
-            <a:endParaRPr lang="en-US" sz="2000">
-              <a:cs typeface="Arial"/>
-            </a:endParaRPr>
-          </a:p>
-          <a:p>
-            <a:endParaRPr lang="en-US" sz="2000">
+            <a:endParaRPr lang="en-US" sz="1050" b="1">
               <a:ea typeface="+mn-lt"/>
               <a:cs typeface="+mn-lt"/>
             </a:endParaRPr>
           </a:p>
           <a:p>
             <a:r>
-              <a:rPr lang="en-US" sz="2000">
+              <a:rPr lang="en-US" sz="2000" b="1">
+                <a:ea typeface="+mn-lt"/>
+                <a:cs typeface="+mn-lt"/>
+              </a:rPr>
+              <a:t>ii) Replicate AES32/</a:t>
+            </a:r>
+            <a:r>
+              <a:rPr lang="en-US" sz="2000" b="1" err="1">
+                <a:ea typeface="+mn-lt"/>
+                <a:cs typeface="+mn-lt"/>
+              </a:rPr>
+              <a:t>Zkne</a:t>
+            </a:r>
+            <a:r>
+              <a:rPr lang="en-US" sz="2000" b="1">
+                <a:ea typeface="+mn-lt"/>
+                <a:cs typeface="+mn-lt"/>
+              </a:rPr>
+              <a:t> </a:t>
+            </a:r>
+            <a:r>
+              <a:rPr lang="en-US" sz="2000" b="1" err="1">
+                <a:ea typeface="+mn-lt"/>
+                <a:cs typeface="+mn-lt"/>
+              </a:rPr>
+              <a:t>datapath</a:t>
+            </a:r>
+            <a:r>
+              <a:rPr lang="en-US" sz="2000" b="1">
+                <a:ea typeface="+mn-lt"/>
+                <a:cs typeface="+mn-lt"/>
+              </a:rPr>
+              <a:t> four times</a:t>
+            </a:r>
+            <a:endParaRPr lang="en-US" sz="2000" b="1">
+              <a:cs typeface="Arial"/>
+            </a:endParaRPr>
+          </a:p>
+          <a:p>
+            <a:endParaRPr lang="en-US" sz="2000" b="1">
+              <a:ea typeface="+mn-lt"/>
+              <a:cs typeface="+mn-lt"/>
+            </a:endParaRPr>
+          </a:p>
+          <a:p>
+            <a:endParaRPr lang="en-US" sz="1050" b="1">
+              <a:ea typeface="+mn-lt"/>
+              <a:cs typeface="+mn-lt"/>
+            </a:endParaRPr>
+          </a:p>
+          <a:p>
+            <a:r>
+              <a:rPr lang="en-US" sz="2000" b="1">
+                <a:ea typeface="+mn-lt"/>
+                <a:cs typeface="+mn-lt"/>
+              </a:rPr>
+              <a:t>iii) Execute in parallel within a single instruction.</a:t>
+            </a:r>
+            <a:endParaRPr lang="en-US" sz="2000" b="1">
+              <a:cs typeface="Arial"/>
+            </a:endParaRPr>
+          </a:p>
+          <a:p>
+            <a:endParaRPr lang="en-US" sz="2000" b="1">
+              <a:ea typeface="+mn-lt"/>
+              <a:cs typeface="+mn-lt"/>
+            </a:endParaRPr>
+          </a:p>
+          <a:p>
+            <a:endParaRPr lang="en-US" sz="900" b="1">
+              <a:ea typeface="+mn-lt"/>
+              <a:cs typeface="+mn-lt"/>
+            </a:endParaRPr>
+          </a:p>
+          <a:p>
+            <a:r>
+              <a:rPr lang="en-US" sz="2000" b="1">
                 <a:ea typeface="+mn-lt"/>
                 <a:cs typeface="+mn-lt"/>
               </a:rPr>
@@ -31121,136 +32850,129 @@
           </a:p>
           <a:p>
             <a:r>
-              <a:rPr lang="en-US" sz="2000">
+              <a:rPr lang="en-US" sz="2000" b="1">
                 <a:ea typeface="+mn-lt"/>
                 <a:cs typeface="+mn-lt"/>
               </a:rPr>
               <a:t>and write back the final 32-bit result.</a:t>
             </a:r>
-            <a:endParaRPr lang="en-US" sz="2000">
-              <a:cs typeface="Arial"/>
-            </a:endParaRPr>
-          </a:p>
-          <a:p>
-            <a:endParaRPr lang="en-US" sz="2000">
-              <a:cs typeface="Arial"/>
-            </a:endParaRPr>
-          </a:p>
-          <a:p>
-            <a:endParaRPr lang="en-US" sz="2000">
-              <a:cs typeface="Arial"/>
-            </a:endParaRPr>
-          </a:p>
-          <a:p>
-            <a:pPr>
-              <a:lnSpc>
-                <a:spcPct val="90000"/>
-              </a:lnSpc>
-              <a:spcBef>
-                <a:spcPts val="600"/>
-              </a:spcBef>
-              <a:spcAft>
-                <a:spcPts val="600"/>
-              </a:spcAft>
-            </a:pPr>
             <a:endParaRPr lang="en-US" sz="2000" b="1">
               <a:cs typeface="Arial"/>
             </a:endParaRPr>
           </a:p>
           <a:p>
-            <a:pPr>
-              <a:lnSpc>
-                <a:spcPct val="90000"/>
-              </a:lnSpc>
-              <a:spcBef>
-                <a:spcPts val="600"/>
-              </a:spcBef>
-              <a:spcAft>
-                <a:spcPts val="600"/>
-              </a:spcAft>
-            </a:pPr>
-            <a:endParaRPr lang="en-US" sz="2000" b="1" u="sng">
-              <a:cs typeface="Arial"/>
-            </a:endParaRPr>
-          </a:p>
-          <a:p>
-            <a:pPr>
-              <a:lnSpc>
-                <a:spcPct val="90000"/>
-              </a:lnSpc>
-              <a:spcBef>
-                <a:spcPts val="600"/>
-              </a:spcBef>
-              <a:spcAft>
-                <a:spcPts val="600"/>
-              </a:spcAft>
-            </a:pPr>
             <a:endParaRPr lang="en-US" sz="2000" b="1">
               <a:cs typeface="Arial"/>
             </a:endParaRPr>
           </a:p>
+        </p:txBody>
+      </p:sp>
+      <p:pic>
+        <p:nvPicPr>
+          <p:cNvPr id="6" name="Picture 5">
+            <a:extLst>
+              <a:ext uri="{FF2B5EF4-FFF2-40B4-BE49-F238E27FC236}">
+                <a16:creationId xmlns:a16="http://schemas.microsoft.com/office/drawing/2014/main" id="{0F0F2904-BD60-6F2E-0392-50BF2821493D}"/>
+              </a:ext>
+            </a:extLst>
+          </p:cNvPr>
+          <p:cNvPicPr>
+            <a:picLocks noChangeAspect="1"/>
+          </p:cNvPicPr>
+          <p:nvPr/>
+        </p:nvPicPr>
+        <p:blipFill>
+          <a:blip r:embed="rId2"/>
+          <a:stretch>
+            <a:fillRect/>
+          </a:stretch>
+        </p:blipFill>
+        <p:spPr>
+          <a:xfrm>
+            <a:off x="5713853" y="336811"/>
+            <a:ext cx="1362317" cy="1380884"/>
+          </a:xfrm>
+          <a:prstGeom prst="rect">
+            <a:avLst/>
+          </a:prstGeom>
+        </p:spPr>
+      </p:pic>
+      <p:pic>
+        <p:nvPicPr>
+          <p:cNvPr id="7" name="Picture 6">
+            <a:extLst>
+              <a:ext uri="{FF2B5EF4-FFF2-40B4-BE49-F238E27FC236}">
+                <a16:creationId xmlns:a16="http://schemas.microsoft.com/office/drawing/2014/main" id="{A0F25BAA-9F66-6E12-CC50-47E4AA084B77}"/>
+              </a:ext>
+            </a:extLst>
+          </p:cNvPr>
+          <p:cNvPicPr>
+            <a:picLocks noChangeAspect="1"/>
+          </p:cNvPicPr>
+          <p:nvPr/>
+        </p:nvPicPr>
+        <p:blipFill>
+          <a:blip r:embed="rId3"/>
+          <a:stretch>
+            <a:fillRect/>
+          </a:stretch>
+        </p:blipFill>
+        <p:spPr>
+          <a:xfrm>
+            <a:off x="7470457" y="1913860"/>
+            <a:ext cx="3701504" cy="3304954"/>
+          </a:xfrm>
+          <a:prstGeom prst="rect">
+            <a:avLst/>
+          </a:prstGeom>
+        </p:spPr>
+      </p:pic>
+      <p:sp>
+        <p:nvSpPr>
+          <p:cNvPr id="8" name="TextBox 7">
+            <a:extLst>
+              <a:ext uri="{FF2B5EF4-FFF2-40B4-BE49-F238E27FC236}">
+                <a16:creationId xmlns:a16="http://schemas.microsoft.com/office/drawing/2014/main" id="{068DA3D6-0BA8-8601-1173-F7A185712951}"/>
+              </a:ext>
+            </a:extLst>
+          </p:cNvPr>
+          <p:cNvSpPr txBox="1"/>
+          <p:nvPr/>
+        </p:nvSpPr>
+        <p:spPr>
+          <a:xfrm>
+            <a:off x="8470604" y="5218814"/>
+            <a:ext cx="3996070" cy="246221"/>
+          </a:xfrm>
+          <a:prstGeom prst="rect">
+            <a:avLst/>
+          </a:prstGeom>
+          <a:noFill/>
+        </p:spPr>
+        <p:txBody>
+          <a:bodyPr rot="0" spcFirstLastPara="0" vertOverflow="overflow" horzOverflow="overflow" vert="horz" wrap="square" lIns="0" tIns="0" rIns="0" bIns="0" numCol="1" spcCol="0" rtlCol="0" fromWordArt="0" anchor="t" anchorCtr="0" forceAA="0" compatLnSpc="1">
+            <a:prstTxWarp prst="textNoShape">
+              <a:avLst/>
+            </a:prstTxWarp>
+            <a:spAutoFit/>
+          </a:bodyPr>
+          <a:lstStyle/>
           <a:p>
-            <a:pPr>
-              <a:lnSpc>
-                <a:spcPct val="90000"/>
-              </a:lnSpc>
-              <a:spcBef>
-                <a:spcPts val="600"/>
-              </a:spcBef>
-              <a:spcAft>
-                <a:spcPts val="600"/>
-              </a:spcAft>
-            </a:pPr>
-            <a:endParaRPr lang="en-US" sz="2000">
-              <a:cs typeface="Arial"/>
-            </a:endParaRPr>
-          </a:p>
-          <a:p>
-            <a:pPr>
-              <a:lnSpc>
-                <a:spcPct val="90000"/>
-              </a:lnSpc>
-              <a:spcBef>
-                <a:spcPts val="600"/>
-              </a:spcBef>
-              <a:spcAft>
-                <a:spcPts val="600"/>
-              </a:spcAft>
-            </a:pPr>
-            <a:endParaRPr lang="en-US" sz="2000">
-              <a:cs typeface="Arial"/>
-            </a:endParaRPr>
-          </a:p>
-          <a:p>
-            <a:pPr>
-              <a:lnSpc>
-                <a:spcPct val="90000"/>
-              </a:lnSpc>
-              <a:spcBef>
-                <a:spcPts val="600"/>
-              </a:spcBef>
-              <a:spcAft>
-                <a:spcPts val="600"/>
-              </a:spcAft>
-            </a:pPr>
-            <a:endParaRPr lang="en-US" sz="2000">
-              <a:cs typeface="Arial"/>
-            </a:endParaRPr>
-          </a:p>
-          <a:p>
-            <a:pPr>
-              <a:lnSpc>
-                <a:spcPct val="90000"/>
-              </a:lnSpc>
-              <a:spcBef>
-                <a:spcPts val="600"/>
-              </a:spcBef>
-              <a:spcAft>
-                <a:spcPts val="600"/>
-              </a:spcAft>
-            </a:pPr>
-            <a:endParaRPr lang="en-US" sz="2000">
-              <a:cs typeface="Arial"/>
+            <a:r>
+              <a:rPr lang="en-US" sz="1600">
+                <a:solidFill>
+                  <a:srgbClr val="595959"/>
+                </a:solidFill>
+                <a:latin typeface="Arial"/>
+                <a:cs typeface="Segoe UI"/>
+              </a:rPr>
+              <a:t>Proposed Block Diagram</a:t>
+            </a:r>
+            <a:endParaRPr lang="en-US" sz="1600">
+              <a:solidFill>
+                <a:srgbClr val="595959"/>
+              </a:solidFill>
+              <a:cs typeface="Segoe UI"/>
             </a:endParaRPr>
           </a:p>
         </p:txBody>
@@ -31280,7 +33002,7 @@
 </p:sld>
 </file>
 
-<file path=ppt/slides/slide21.xml><?xml version="1.0" encoding="utf-8"?>
+<file path=ppt/slides/slide23.xml><?xml version="1.0" encoding="utf-8"?>
 <p:sld xmlns:a="http://schemas.openxmlformats.org/drawingml/2006/main" xmlns:r="http://schemas.openxmlformats.org/officeDocument/2006/relationships" xmlns:p="http://schemas.openxmlformats.org/presentationml/2006/main">
   <p:cSld>
     <p:spTree>
@@ -31356,7 +33078,7 @@
             <a:fld id="{9E843DB9-9987-4157-AB9C-CEA8D7D910BB}" type="slidenum">
               <a:rPr lang="en-GB" smtClean="0"/>
               <a:pPr/>
-              <a:t>19</a:t>
+              <a:t>23</a:t>
             </a:fld>
             <a:endParaRPr lang="en-GB"/>
           </a:p>
@@ -31418,7 +33140,7 @@
         <p:spPr>
           <a:xfrm>
             <a:off x="918619" y="1473239"/>
-            <a:ext cx="7598735" cy="7315849"/>
+            <a:ext cx="7598735" cy="4893647"/>
           </a:xfrm>
           <a:prstGeom prst="rect">
             <a:avLst/>
@@ -31468,7 +33190,7 @@
                 <a:ea typeface="+mn-lt"/>
                 <a:cs typeface="+mn-lt"/>
               </a:rPr>
-              <a:t>Introduced new opcodes and instruction formats</a:t>
+              <a:t>New opcodes and instruction formats</a:t>
             </a:r>
             <a:r>
               <a:rPr lang="en-US" sz="2000">
@@ -31482,43 +33204,18 @@
             </a:endParaRPr>
           </a:p>
           <a:p>
-            <a:pPr marL="285750" indent="-285750">
-              <a:buFont typeface="Arial"/>
-              <a:buChar char="•"/>
-            </a:pPr>
-            <a:r>
-              <a:rPr lang="en-US" sz="2000">
-                <a:ea typeface="+mn-lt"/>
-                <a:cs typeface="+mn-lt"/>
-              </a:rPr>
-              <a:t>New instruction encoding includes four source registers:</a:t>
-            </a:r>
             <a:endParaRPr lang="en-US" sz="2000">
+              <a:latin typeface="Arial"/>
               <a:cs typeface="Arial"/>
             </a:endParaRPr>
           </a:p>
           <a:p>
-            <a:r>
-              <a:rPr lang="en-US" sz="2000">
-                <a:latin typeface="Arial"/>
-                <a:cs typeface="Arial"/>
-              </a:rPr>
-              <a:t>rs4 | rs3 | rs2 | rs1 | </a:t>
-            </a:r>
-            <a:r>
-              <a:rPr lang="en-US" sz="2000" err="1">
-                <a:latin typeface="Arial"/>
-                <a:cs typeface="Arial"/>
-              </a:rPr>
-              <a:t>rd</a:t>
-            </a:r>
-            <a:r>
-              <a:rPr lang="en-US" sz="2000">
-                <a:latin typeface="Arial"/>
-                <a:cs typeface="Arial"/>
-              </a:rPr>
-              <a:t> | opcode</a:t>
-            </a:r>
+            <a:br>
+              <a:rPr lang="en-US"/>
+            </a:br>
+            <a:endParaRPr lang="en-US" sz="2000">
+              <a:cs typeface="Arial"/>
+            </a:endParaRPr>
           </a:p>
           <a:p>
             <a:endParaRPr lang="en-US" sz="2000">
@@ -31527,22 +33224,9 @@
             </a:endParaRPr>
           </a:p>
           <a:p>
-            <a:pPr marL="285750" indent="-285750">
-              <a:buFont typeface="Arial"/>
-              <a:buChar char="•"/>
-            </a:pPr>
-            <a:r>
-              <a:rPr lang="en-US" sz="2000">
-                <a:ea typeface="+mn-lt"/>
-                <a:cs typeface="+mn-lt"/>
-              </a:rPr>
-              <a:t>Single instruction to specify all operands</a:t>
-            </a:r>
-            <a:br>
-              <a:rPr lang="en-US"/>
-            </a:br>
             <a:endParaRPr lang="en-US" sz="2000">
-              <a:cs typeface="Arial"/>
+              <a:ea typeface="+mn-lt"/>
+              <a:cs typeface="+mn-lt"/>
             </a:endParaRPr>
           </a:p>
           <a:p>
@@ -31558,7 +33242,7 @@
                 <a:ea typeface="+mn-lt"/>
                 <a:cs typeface="+mn-lt"/>
               </a:rPr>
-              <a:t>Modified the register file</a:t>
+              <a:t>Modifications to the Register File (or) Decode Logic</a:t>
             </a:r>
             <a:endParaRPr lang="en-US" sz="2000">
               <a:cs typeface="Arial"/>
@@ -31571,17 +33255,77 @@
             </a:endParaRPr>
           </a:p>
           <a:p>
-            <a:pPr marL="285750" indent="-285750">
-              <a:buFont typeface="Arial"/>
-              <a:buChar char="•"/>
-            </a:pPr>
             <a:r>
               <a:rPr lang="en-US" sz="2000">
+                <a:cs typeface="Arial"/>
+              </a:rPr>
+              <a:t>iii) </a:t>
+            </a:r>
+            <a:r>
+              <a:rPr lang="en-US" sz="2000" b="1">
+                <a:solidFill>
+                  <a:schemeClr val="tx2"/>
+                </a:solidFill>
+                <a:cs typeface="Arial"/>
+              </a:rPr>
+              <a:t>Replicate the </a:t>
+            </a:r>
+            <a:r>
+              <a:rPr lang="en-US" sz="2000" b="1" err="1">
+                <a:solidFill>
+                  <a:schemeClr val="tx2"/>
+                </a:solidFill>
+                <a:cs typeface="Arial"/>
+              </a:rPr>
+              <a:t>Zkne</a:t>
+            </a:r>
+            <a:r>
+              <a:rPr lang="en-US" sz="2000" b="1">
+                <a:solidFill>
+                  <a:schemeClr val="tx2"/>
+                </a:solidFill>
+                <a:cs typeface="Arial"/>
+              </a:rPr>
+              <a:t> hardware </a:t>
+            </a:r>
+            <a:endParaRPr lang="en-US" sz="2000">
+              <a:solidFill>
+                <a:schemeClr val="tx2"/>
+              </a:solidFill>
+              <a:cs typeface="Arial"/>
+            </a:endParaRPr>
+          </a:p>
+          <a:p>
+            <a:endParaRPr lang="en-US" sz="2000" b="1">
+              <a:solidFill>
+                <a:schemeClr val="tx2"/>
+              </a:solidFill>
+              <a:cs typeface="Arial"/>
+            </a:endParaRPr>
+          </a:p>
+          <a:p>
+            <a:r>
+              <a:rPr lang="en-US" sz="2000">
+                <a:solidFill>
+                  <a:schemeClr val="tx2"/>
+                </a:solidFill>
                 <a:ea typeface="+mn-lt"/>
                 <a:cs typeface="+mn-lt"/>
               </a:rPr>
-              <a:t>Added an additional read port. </a:t>
+              <a:t>iv)  </a:t>
             </a:r>
+            <a:r>
+              <a:rPr lang="en-US" sz="2000" b="1">
+                <a:solidFill>
+                  <a:schemeClr val="tx2"/>
+                </a:solidFill>
+                <a:ea typeface="+mn-lt"/>
+                <a:cs typeface="+mn-lt"/>
+              </a:rPr>
+              <a:t>Software Support for the Instruction</a:t>
+            </a:r>
+          </a:p>
+          <a:p>
             <a:endParaRPr lang="en-US" sz="2000">
               <a:cs typeface="Arial"/>
             </a:endParaRPr>
@@ -31592,8 +33336,7 @@
               <a:buChar char="•"/>
             </a:pPr>
             <a:endParaRPr lang="en-US" sz="2000">
-              <a:ea typeface="+mn-lt"/>
-              <a:cs typeface="+mn-lt"/>
+              <a:cs typeface="Arial"/>
             </a:endParaRPr>
           </a:p>
           <a:p>
@@ -31601,32 +33344,107 @@
               <a:buFont typeface="Arial"/>
               <a:buChar char="•"/>
             </a:pPr>
+            <a:endParaRPr lang="en-US" sz="2000">
+              <a:cs typeface="Arial"/>
+            </a:endParaRPr>
+          </a:p>
+        </p:txBody>
+      </p:sp>
+      <p:pic>
+        <p:nvPicPr>
+          <p:cNvPr id="6" name="Picture 5">
+            <a:extLst>
+              <a:ext uri="{FF2B5EF4-FFF2-40B4-BE49-F238E27FC236}">
+                <a16:creationId xmlns:a16="http://schemas.microsoft.com/office/drawing/2014/main" id="{16424B94-A9F6-F862-4465-6BAF7AAE3FC1}"/>
+              </a:ext>
+            </a:extLst>
+          </p:cNvPr>
+          <p:cNvPicPr>
+            <a:picLocks noChangeAspect="1"/>
+          </p:cNvPicPr>
+          <p:nvPr/>
+        </p:nvPicPr>
+        <p:blipFill>
+          <a:blip r:embed="rId2"/>
+          <a:stretch>
+            <a:fillRect/>
+          </a:stretch>
+        </p:blipFill>
+        <p:spPr>
+          <a:xfrm>
+            <a:off x="2899808" y="2528223"/>
+            <a:ext cx="7278430" cy="800322"/>
+          </a:xfrm>
+          <a:prstGeom prst="rect">
+            <a:avLst/>
+          </a:prstGeom>
+        </p:spPr>
+      </p:pic>
+      <p:sp>
+        <p:nvSpPr>
+          <p:cNvPr id="7" name="TextBox 6">
+            <a:extLst>
+              <a:ext uri="{FF2B5EF4-FFF2-40B4-BE49-F238E27FC236}">
+                <a16:creationId xmlns:a16="http://schemas.microsoft.com/office/drawing/2014/main" id="{B199A9F1-08A8-6B52-B74D-BEA25E932B85}"/>
+              </a:ext>
+            </a:extLst>
+          </p:cNvPr>
+          <p:cNvSpPr txBox="1"/>
+          <p:nvPr/>
+        </p:nvSpPr>
+        <p:spPr>
+          <a:xfrm>
+            <a:off x="4961861" y="3331535"/>
+            <a:ext cx="6096000" cy="544765"/>
+          </a:xfrm>
+          <a:prstGeom prst="rect">
+            <a:avLst/>
+          </a:prstGeom>
+          <a:noFill/>
+        </p:spPr>
+        <p:txBody>
+          <a:bodyPr rot="0" spcFirstLastPara="0" vertOverflow="overflow" horzOverflow="overflow" vert="horz" wrap="square" lIns="0" tIns="0" rIns="0" bIns="0" numCol="1" spcCol="0" rtlCol="0" fromWordArt="0" anchor="t" anchorCtr="0" forceAA="0" compatLnSpc="1">
+            <a:prstTxWarp prst="textNoShape">
+              <a:avLst/>
+            </a:prstTxWarp>
+            <a:spAutoFit/>
+          </a:bodyPr>
+          <a:lstStyle/>
+          <a:p>
             <a:r>
-              <a:rPr lang="en-US" sz="2000">
-                <a:ea typeface="+mn-lt"/>
-                <a:cs typeface="+mn-lt"/>
+              <a:rPr lang="en-US" sz="1600" b="0" i="0" u="none" strike="noStrike" baseline="0">
+                <a:solidFill>
+                  <a:srgbClr val="595959"/>
+                </a:solidFill>
+                <a:latin typeface="Arial"/>
               </a:rPr>
-              <a:t>Allows all operands to be fetched within a single instruction cycle.</a:t>
+              <a:t>Proposed </a:t>
             </a:r>
             <a:r>
               <a:rPr lang="en-US" sz="1600">
-                <a:ea typeface="+mn-lt"/>
-                <a:cs typeface="+mn-lt"/>
+                <a:solidFill>
+                  <a:srgbClr val="595959"/>
+                </a:solidFill>
+                <a:latin typeface="Arial"/>
               </a:rPr>
-              <a:t> </a:t>
+              <a:t>Instruction </a:t>
             </a:r>
-            <a:endParaRPr lang="en-US">
+            <a:r>
+              <a:rPr lang="en-US" sz="1600">
+                <a:solidFill>
+                  <a:srgbClr val="595959"/>
+                </a:solidFill>
+                <a:latin typeface="Arial"/>
+                <a:cs typeface="Arial"/>
+              </a:rPr>
+              <a:t>Format</a:t>
+            </a:r>
+            <a:endParaRPr lang="en-US" sz="1600">
               <a:cs typeface="Arial"/>
             </a:endParaRPr>
           </a:p>
           <a:p>
-            <a:br>
-              <a:rPr lang="en-US"/>
-            </a:br>
-            <a:endParaRPr lang="en-US"/>
-          </a:p>
-          <a:p>
-            <a:pPr>
+            <a:pPr algn="l">
               <a:lnSpc>
                 <a:spcPct val="90000"/>
               </a:lnSpc>
@@ -31637,89 +33455,7 @@
                 <a:spcPts val="600"/>
               </a:spcAft>
             </a:pPr>
-            <a:endParaRPr lang="en-US" sz="1600">
-              <a:cs typeface="Arial"/>
-            </a:endParaRPr>
-          </a:p>
-          <a:p>
-            <a:pPr>
-              <a:lnSpc>
-                <a:spcPct val="90000"/>
-              </a:lnSpc>
-              <a:spcBef>
-                <a:spcPts val="600"/>
-              </a:spcBef>
-              <a:spcAft>
-                <a:spcPts val="600"/>
-              </a:spcAft>
-            </a:pPr>
-            <a:endParaRPr lang="en-US" sz="1600">
-              <a:cs typeface="Arial"/>
-            </a:endParaRPr>
-          </a:p>
-          <a:p>
-            <a:pPr>
-              <a:lnSpc>
-                <a:spcPct val="90000"/>
-              </a:lnSpc>
-              <a:spcBef>
-                <a:spcPts val="600"/>
-              </a:spcBef>
-              <a:spcAft>
-                <a:spcPts val="600"/>
-              </a:spcAft>
-            </a:pPr>
-            <a:endParaRPr lang="en-US" sz="1600">
-              <a:cs typeface="Arial"/>
-            </a:endParaRPr>
-          </a:p>
-          <a:p>
-            <a:pPr>
-              <a:lnSpc>
-                <a:spcPct val="90000"/>
-              </a:lnSpc>
-              <a:spcBef>
-                <a:spcPts val="600"/>
-              </a:spcBef>
-              <a:spcAft>
-                <a:spcPts val="600"/>
-              </a:spcAft>
-            </a:pPr>
-            <a:endParaRPr lang="en-US" sz="1600">
-              <a:cs typeface="Arial"/>
-            </a:endParaRPr>
-          </a:p>
-          <a:p>
-            <a:pPr>
-              <a:lnSpc>
-                <a:spcPct val="90000"/>
-              </a:lnSpc>
-              <a:spcBef>
-                <a:spcPts val="600"/>
-              </a:spcBef>
-              <a:spcAft>
-                <a:spcPts val="600"/>
-              </a:spcAft>
-            </a:pPr>
-            <a:endParaRPr lang="en-US" sz="1600">
-              <a:cs typeface="Arial"/>
-            </a:endParaRPr>
-          </a:p>
-          <a:p>
-            <a:pPr>
-              <a:lnSpc>
-                <a:spcPct val="90000"/>
-              </a:lnSpc>
-              <a:spcBef>
-                <a:spcPts val="600"/>
-              </a:spcBef>
-              <a:spcAft>
-                <a:spcPts val="600"/>
-              </a:spcAft>
-            </a:pPr>
-            <a:endParaRPr lang="en-US" sz="1600">
-              <a:cs typeface="Arial"/>
-            </a:endParaRPr>
+            <a:endParaRPr lang="en-US" sz="1600" err="1"/>
           </a:p>
         </p:txBody>
       </p:sp>
@@ -31748,394 +33484,7 @@
 </p:sld>
 </file>
 
-<file path=ppt/slides/slide22.xml><?xml version="1.0" encoding="utf-8"?>
-<p:sld xmlns:a="http://schemas.openxmlformats.org/drawingml/2006/main" xmlns:r="http://schemas.openxmlformats.org/officeDocument/2006/relationships" xmlns:p="http://schemas.openxmlformats.org/presentationml/2006/main">
-  <p:cSld>
-    <p:spTree>
-      <p:nvGrpSpPr>
-        <p:cNvPr id="1" name="">
-          <a:extLst>
-            <a:ext uri="{FF2B5EF4-FFF2-40B4-BE49-F238E27FC236}">
-              <a16:creationId xmlns:a16="http://schemas.microsoft.com/office/drawing/2014/main" id="{9BFDB8EB-2693-FA83-2A19-68528D6A61A0}"/>
-            </a:ext>
-          </a:extLst>
-        </p:cNvPr>
-        <p:cNvGrpSpPr/>
-        <p:nvPr/>
-      </p:nvGrpSpPr>
-      <p:grpSpPr>
-        <a:xfrm>
-          <a:off x="0" y="0"/>
-          <a:ext cx="0" cy="0"/>
-          <a:chOff x="0" y="0"/>
-          <a:chExt cx="0" cy="0"/>
-        </a:xfrm>
-      </p:grpSpPr>
-      <p:sp>
-        <p:nvSpPr>
-          <p:cNvPr id="2" name="Date Placeholder 1">
-            <a:extLst>
-              <a:ext uri="{FF2B5EF4-FFF2-40B4-BE49-F238E27FC236}">
-                <a16:creationId xmlns:a16="http://schemas.microsoft.com/office/drawing/2014/main" id="{2E688E32-08BC-41AF-7B9C-36EFB4D6A223}"/>
-              </a:ext>
-            </a:extLst>
-          </p:cNvPr>
-          <p:cNvSpPr>
-            <a:spLocks noGrp="1"/>
-          </p:cNvSpPr>
-          <p:nvPr>
-            <p:ph type="dt" sz="half" idx="18"/>
-          </p:nvPr>
-        </p:nvSpPr>
-        <p:spPr/>
-        <p:txBody>
-          <a:bodyPr/>
-          <a:lstStyle/>
-          <a:p>
-            <a:fld id="{86CF0BC4-CAAA-4113-A44D-B077CA6D06A0}" type="datetime1">
-              <a:rPr lang="nl-NL" smtClean="0"/>
-              <a:t>12-6-2026</a:t>
-            </a:fld>
-            <a:endParaRPr lang="en-GB"/>
-          </a:p>
-        </p:txBody>
-      </p:sp>
-      <p:sp>
-        <p:nvSpPr>
-          <p:cNvPr id="3" name="Slide Number Placeholder 2">
-            <a:extLst>
-              <a:ext uri="{FF2B5EF4-FFF2-40B4-BE49-F238E27FC236}">
-                <a16:creationId xmlns:a16="http://schemas.microsoft.com/office/drawing/2014/main" id="{DB099A81-0B3E-0594-6371-6D5FBC2CC268}"/>
-              </a:ext>
-            </a:extLst>
-          </p:cNvPr>
-          <p:cNvSpPr>
-            <a:spLocks noGrp="1"/>
-          </p:cNvSpPr>
-          <p:nvPr>
-            <p:ph type="sldNum" sz="quarter" idx="20"/>
-          </p:nvPr>
-        </p:nvSpPr>
-        <p:spPr/>
-        <p:txBody>
-          <a:bodyPr/>
-          <a:lstStyle/>
-          <a:p>
-            <a:fld id="{9E843DB9-9987-4157-AB9C-CEA8D7D910BB}" type="slidenum">
-              <a:rPr lang="en-GB" smtClean="0"/>
-              <a:pPr/>
-              <a:t>20</a:t>
-            </a:fld>
-            <a:endParaRPr lang="en-GB"/>
-          </a:p>
-        </p:txBody>
-      </p:sp>
-      <p:sp>
-        <p:nvSpPr>
-          <p:cNvPr id="4" name="Title 3">
-            <a:extLst>
-              <a:ext uri="{FF2B5EF4-FFF2-40B4-BE49-F238E27FC236}">
-                <a16:creationId xmlns:a16="http://schemas.microsoft.com/office/drawing/2014/main" id="{52CDA14B-9E8D-E38B-E396-33901AE7B364}"/>
-              </a:ext>
-            </a:extLst>
-          </p:cNvPr>
-          <p:cNvSpPr>
-            <a:spLocks noGrp="1"/>
-          </p:cNvSpPr>
-          <p:nvPr>
-            <p:ph type="title"/>
-          </p:nvPr>
-        </p:nvSpPr>
-        <p:spPr>
-          <a:xfrm>
-            <a:off x="718666" y="722454"/>
-            <a:ext cx="10743750" cy="589222"/>
-          </a:xfrm>
-        </p:spPr>
-        <p:txBody>
-          <a:bodyPr/>
-          <a:lstStyle/>
-          <a:p>
-            <a:r>
-              <a:rPr lang="en-US">
-                <a:cs typeface="Arial"/>
-              </a:rPr>
-              <a:t>The Super Instruction </a:t>
-            </a:r>
-            <a:br>
-              <a:rPr lang="en-US">
-                <a:cs typeface="Arial"/>
-              </a:rPr>
-            </a:br>
-            <a:endParaRPr lang="en-US"/>
-          </a:p>
-        </p:txBody>
-      </p:sp>
-      <p:sp>
-        <p:nvSpPr>
-          <p:cNvPr id="5" name="TextBox 4">
-            <a:extLst>
-              <a:ext uri="{FF2B5EF4-FFF2-40B4-BE49-F238E27FC236}">
-                <a16:creationId xmlns:a16="http://schemas.microsoft.com/office/drawing/2014/main" id="{7FE7D6FC-20DE-9B43-47F1-8862EE3BA05E}"/>
-              </a:ext>
-            </a:extLst>
-          </p:cNvPr>
-          <p:cNvSpPr txBox="1"/>
-          <p:nvPr/>
-        </p:nvSpPr>
-        <p:spPr>
-          <a:xfrm>
-            <a:off x="892038" y="1721332"/>
-            <a:ext cx="10841665" cy="5201424"/>
-          </a:xfrm>
-          <a:prstGeom prst="rect">
-            <a:avLst/>
-          </a:prstGeom>
-          <a:noFill/>
-        </p:spPr>
-        <p:txBody>
-          <a:bodyPr rot="0" spcFirstLastPara="0" vertOverflow="overflow" horzOverflow="overflow" vert="horz" wrap="square" lIns="0" tIns="0" rIns="0" bIns="0" numCol="1" spcCol="0" rtlCol="0" fromWordArt="0" anchor="t" anchorCtr="0" forceAA="0" compatLnSpc="1">
-            <a:prstTxWarp prst="textNoShape">
-              <a:avLst/>
-            </a:prstTxWarp>
-            <a:spAutoFit/>
-          </a:bodyPr>
-          <a:lstStyle/>
-          <a:p>
-            <a:pPr>
-              <a:lnSpc>
-                <a:spcPct val="90000"/>
-              </a:lnSpc>
-              <a:spcBef>
-                <a:spcPts val="600"/>
-              </a:spcBef>
-              <a:spcAft>
-                <a:spcPts val="600"/>
-              </a:spcAft>
-            </a:pPr>
-            <a:r>
-              <a:rPr lang="en-US" sz="2000">
-                <a:cs typeface="Arial"/>
-              </a:rPr>
-              <a:t>iii) </a:t>
-            </a:r>
-            <a:r>
-              <a:rPr lang="en-US" sz="2000" b="1">
-                <a:cs typeface="Arial"/>
-              </a:rPr>
-              <a:t>Replicated the </a:t>
-            </a:r>
-            <a:r>
-              <a:rPr lang="en-US" sz="2000" b="1" err="1">
-                <a:cs typeface="Arial"/>
-              </a:rPr>
-              <a:t>Zkne</a:t>
-            </a:r>
-            <a:r>
-              <a:rPr lang="en-US" sz="2000" b="1">
-                <a:cs typeface="Arial"/>
-              </a:rPr>
-              <a:t> hardware four times</a:t>
-            </a:r>
-            <a:endParaRPr lang="en-US" sz="2000">
-              <a:cs typeface="Arial"/>
-            </a:endParaRPr>
-          </a:p>
-          <a:p>
-            <a:pPr marL="285750" indent="-285750">
-              <a:buFont typeface="Arial,Sans-Serif"/>
-              <a:buChar char="•"/>
-            </a:pPr>
-            <a:r>
-              <a:rPr lang="en-US" sz="2000">
-                <a:cs typeface="Arial"/>
-              </a:rPr>
-              <a:t>Instantiated four AES32/</a:t>
-            </a:r>
-            <a:r>
-              <a:rPr lang="en-US" sz="2000" err="1">
-                <a:cs typeface="Arial"/>
-              </a:rPr>
-              <a:t>Zkne</a:t>
-            </a:r>
-            <a:r>
-              <a:rPr lang="en-US" sz="2000">
-                <a:cs typeface="Arial"/>
-              </a:rPr>
-              <a:t> </a:t>
-            </a:r>
-            <a:r>
-              <a:rPr lang="en-US" sz="2000" err="1">
-                <a:cs typeface="Arial"/>
-              </a:rPr>
-              <a:t>datapaths</a:t>
-            </a:r>
-            <a:r>
-              <a:rPr lang="en-US" sz="2000">
-                <a:cs typeface="Arial"/>
-              </a:rPr>
-              <a:t>. </a:t>
-            </a:r>
-          </a:p>
-          <a:p>
-            <a:endParaRPr lang="en-US" sz="2000">
-              <a:cs typeface="Arial"/>
-            </a:endParaRPr>
-          </a:p>
-          <a:p>
-            <a:pPr marL="285750" indent="-285750">
-              <a:buFont typeface="Arial,Sans-Serif"/>
-              <a:buChar char="•"/>
-            </a:pPr>
-            <a:endParaRPr lang="en-US" sz="2000">
-              <a:cs typeface="Arial"/>
-            </a:endParaRPr>
-          </a:p>
-          <a:p>
-            <a:endParaRPr lang="en-US" sz="2000">
-              <a:cs typeface="Arial"/>
-            </a:endParaRPr>
-          </a:p>
-          <a:p>
-            <a:pPr marL="285750" indent="-285750">
-              <a:buFont typeface="Arial,Sans-Serif"/>
-              <a:buChar char="•"/>
-            </a:pPr>
-            <a:endParaRPr lang="en-US" sz="2000">
-              <a:cs typeface="Arial"/>
-            </a:endParaRPr>
-          </a:p>
-          <a:p>
-            <a:endParaRPr lang="en-US" sz="2000">
-              <a:cs typeface="Arial"/>
-            </a:endParaRPr>
-          </a:p>
-          <a:p>
-            <a:r>
-              <a:rPr lang="en-US" sz="2000">
-                <a:cs typeface="Arial"/>
-              </a:rPr>
-              <a:t>iv) Added Software support for these super instructions:</a:t>
-            </a:r>
-          </a:p>
-          <a:p>
-            <a:endParaRPr lang="en-US" sz="2000">
-              <a:cs typeface="Arial"/>
-            </a:endParaRPr>
-          </a:p>
-          <a:p>
-            <a:endParaRPr lang="en-US" sz="2000">
-              <a:cs typeface="Arial"/>
-            </a:endParaRPr>
-          </a:p>
-          <a:p>
-            <a:pPr>
-              <a:lnSpc>
-                <a:spcPct val="90000"/>
-              </a:lnSpc>
-              <a:spcBef>
-                <a:spcPts val="600"/>
-              </a:spcBef>
-              <a:spcAft>
-                <a:spcPts val="600"/>
-              </a:spcAft>
-            </a:pPr>
-            <a:endParaRPr lang="en-US" sz="2000">
-              <a:cs typeface="Arial"/>
-            </a:endParaRPr>
-          </a:p>
-          <a:p>
-            <a:pPr>
-              <a:lnSpc>
-                <a:spcPct val="90000"/>
-              </a:lnSpc>
-              <a:spcBef>
-                <a:spcPts val="600"/>
-              </a:spcBef>
-              <a:spcAft>
-                <a:spcPts val="600"/>
-              </a:spcAft>
-            </a:pPr>
-            <a:endParaRPr lang="en-US" sz="2000">
-              <a:cs typeface="Arial"/>
-            </a:endParaRPr>
-          </a:p>
-          <a:p>
-            <a:pPr>
-              <a:lnSpc>
-                <a:spcPct val="90000"/>
-              </a:lnSpc>
-              <a:spcBef>
-                <a:spcPts val="600"/>
-              </a:spcBef>
-              <a:spcAft>
-                <a:spcPts val="600"/>
-              </a:spcAft>
-            </a:pPr>
-            <a:endParaRPr lang="en-US" sz="2000">
-              <a:cs typeface="Arial"/>
-            </a:endParaRPr>
-          </a:p>
-          <a:p>
-            <a:pPr>
-              <a:lnSpc>
-                <a:spcPct val="90000"/>
-              </a:lnSpc>
-              <a:spcBef>
-                <a:spcPts val="600"/>
-              </a:spcBef>
-              <a:spcAft>
-                <a:spcPts val="600"/>
-              </a:spcAft>
-            </a:pPr>
-            <a:endParaRPr lang="en-US" sz="2000">
-              <a:cs typeface="Arial"/>
-            </a:endParaRPr>
-          </a:p>
-          <a:p>
-            <a:pPr>
-              <a:lnSpc>
-                <a:spcPct val="90000"/>
-              </a:lnSpc>
-              <a:spcBef>
-                <a:spcPts val="600"/>
-              </a:spcBef>
-              <a:spcAft>
-                <a:spcPts val="600"/>
-              </a:spcAft>
-            </a:pPr>
-            <a:endParaRPr lang="en-US" sz="2000">
-              <a:cs typeface="Arial"/>
-            </a:endParaRPr>
-          </a:p>
-        </p:txBody>
-      </p:sp>
-    </p:spTree>
-    <p:extLst>
-      <p:ext uri="{BB962C8B-B14F-4D97-AF65-F5344CB8AC3E}">
-        <p14:creationId xmlns:p14="http://schemas.microsoft.com/office/powerpoint/2010/main" val="978072683"/>
-      </p:ext>
-    </p:extLst>
-  </p:cSld>
-  <p:clrMapOvr>
-    <a:masterClrMapping/>
-  </p:clrMapOvr>
-  <mc:AlternateContent xmlns:mc="http://schemas.openxmlformats.org/markup-compatibility/2006" xmlns:p14="http://schemas.microsoft.com/office/powerpoint/2010/main">
-    <mc:Choice Requires="p14">
-      <p:transition spd="med" p14:dur="700">
-        <p:fade/>
-      </p:transition>
-    </mc:Choice>
-    <mc:Fallback xmlns="">
-      <p:transition spd="med">
-        <p:fade/>
-      </p:transition>
-    </mc:Fallback>
-  </mc:AlternateContent>
-</p:sld>
-</file>
-
-<file path=ppt/slides/slide23.xml><?xml version="1.0" encoding="utf-8"?>
+<file path=ppt/slides/slide24.xml><?xml version="1.0" encoding="utf-8"?>
 <p:sld xmlns:a="http://schemas.openxmlformats.org/drawingml/2006/main" xmlns:r="http://schemas.openxmlformats.org/officeDocument/2006/relationships" xmlns:p="http://schemas.openxmlformats.org/presentationml/2006/main">
   <p:cSld>
     <p:spTree>
@@ -32211,7 +33560,7 @@
             <a:fld id="{9E843DB9-9987-4157-AB9C-CEA8D7D910BB}" type="slidenum">
               <a:rPr lang="en-GB" smtClean="0"/>
               <a:pPr/>
-              <a:t>21</a:t>
+              <a:t>24</a:t>
             </a:fld>
             <a:endParaRPr lang="en-GB"/>
           </a:p>
@@ -32273,7 +33622,7 @@
         <p:spPr>
           <a:xfrm>
             <a:off x="892038" y="1721332"/>
-            <a:ext cx="10097386" cy="2959272"/>
+            <a:ext cx="10097386" cy="3544047"/>
           </a:xfrm>
           <a:prstGeom prst="rect">
             <a:avLst/>
@@ -32297,126 +33646,141 @@
                 <a:spcPts val="600"/>
               </a:spcBef>
               <a:spcAft>
-                <a:spcPts val="600"/>
+                <a:spcPts val="1000"/>
               </a:spcAft>
+              <a:buNone/>
             </a:pPr>
             <a:r>
-              <a:rPr lang="en-US" sz="2000" b="1" u="sng">
-                <a:cs typeface="Arial"/>
+              <a:rPr sz="2200" b="1" i="0">
+                <a:solidFill>
+                  <a:srgbClr val="00B0F0"/>
+                </a:solidFill>
               </a:rPr>
-              <a:t>Limitations:</a:t>
+              <a:t>Limitations</a:t>
             </a:r>
           </a:p>
           <a:p>
             <a:pPr>
-              <a:lnSpc>
-                <a:spcPct val="90000"/>
-              </a:lnSpc>
-              <a:spcBef>
-                <a:spcPts val="600"/>
-              </a:spcBef>
               <a:spcAft>
-                <a:spcPts val="600"/>
-              </a:spcAft>
-            </a:pPr>
-            <a:endParaRPr lang="en-US" sz="700">
-              <a:cs typeface="Arial"/>
-            </a:endParaRPr>
-          </a:p>
-          <a:p>
-            <a:pPr>
-              <a:lnSpc>
-                <a:spcPct val="90000"/>
-              </a:lnSpc>
-              <a:spcBef>
-                <a:spcPts val="600"/>
-              </a:spcBef>
-              <a:spcAft>
-                <a:spcPts val="600"/>
+                <a:spcPts val="100"/>
               </a:spcAft>
             </a:pPr>
             <a:r>
-              <a:rPr lang="en-US" sz="2000" err="1">
-                <a:cs typeface="Arial"/>
+              <a:rPr sz="2000" b="1" i="0">
+                <a:solidFill>
+                  <a:srgbClr val="202020"/>
+                </a:solidFill>
               </a:rPr>
-              <a:t>i</a:t>
-            </a:r>
-            <a:r>
-              <a:rPr lang="en-US" sz="2000">
-                <a:cs typeface="Arial"/>
-              </a:rPr>
-              <a:t>)Haphazard allocation of new opcodes. Might mess with the RISCV convention in the long run</a:t>
+              <a:t>Opcode space pollution</a:t>
             </a:r>
           </a:p>
           <a:p>
             <a:pPr>
-              <a:lnSpc>
-                <a:spcPct val="90000"/>
-              </a:lnSpc>
-              <a:spcBef>
-                <a:spcPts val="600"/>
-              </a:spcBef>
               <a:spcAft>
-                <a:spcPts val="600"/>
+                <a:spcPts val="900"/>
               </a:spcAft>
+              <a:buNone/>
             </a:pPr>
-            <a:endParaRPr lang="en-US" sz="2000">
-              <a:cs typeface="Arial"/>
-            </a:endParaRPr>
+            <a:r>
+              <a:rPr sz="1600" b="0" i="0">
+                <a:solidFill>
+                  <a:srgbClr val="555555"/>
+                </a:solidFill>
+              </a:rPr>
+              <a:t>Custom-0 opcodes consume scarce encoding space and may clash with future standard extensions.</a:t>
+            </a:r>
           </a:p>
           <a:p>
             <a:pPr>
-              <a:lnSpc>
-                <a:spcPct val="90000"/>
-              </a:lnSpc>
-              <a:spcBef>
-                <a:spcPts val="600"/>
-              </a:spcBef>
               <a:spcAft>
-                <a:spcPts val="600"/>
+                <a:spcPts val="100"/>
               </a:spcAft>
             </a:pPr>
             <a:r>
-              <a:rPr lang="en-US" sz="2000">
-                <a:cs typeface="Arial"/>
+              <a:rPr sz="2000" b="1" i="0">
+                <a:solidFill>
+                  <a:srgbClr val="202020"/>
+                </a:solidFill>
               </a:rPr>
-              <a:t>ii) Did not want to modify the register file architecture for just 2 instructions.</a:t>
+              <a:t>Register-file pressure</a:t>
             </a:r>
-            <a:endParaRPr lang="en-US"/>
           </a:p>
           <a:p>
             <a:pPr>
-              <a:lnSpc>
-                <a:spcPct val="90000"/>
-              </a:lnSpc>
-              <a:spcBef>
-                <a:spcPts val="600"/>
-              </a:spcBef>
               <a:spcAft>
-                <a:spcPts val="600"/>
+                <a:spcPts val="900"/>
               </a:spcAft>
+              <a:buNone/>
             </a:pPr>
-            <a:endParaRPr lang="en-US" sz="2000">
-              <a:cs typeface="Arial"/>
-            </a:endParaRPr>
+            <a:r>
+              <a:rPr sz="1600" b="0" i="0">
+                <a:solidFill>
+                  <a:srgbClr val="555555"/>
+                </a:solidFill>
+              </a:rPr>
+              <a:t>Reading four source registers needs extra read ports or a 2-cycle read, complicating the pipeline.</a:t>
+            </a:r>
           </a:p>
           <a:p>
             <a:pPr>
-              <a:lnSpc>
-                <a:spcPct val="90000"/>
-              </a:lnSpc>
-              <a:spcBef>
-                <a:spcPts val="600"/>
-              </a:spcBef>
               <a:spcAft>
-                <a:spcPts val="600"/>
+                <a:spcPts val="100"/>
               </a:spcAft>
             </a:pPr>
             <a:r>
-              <a:rPr lang="en-US" sz="2000">
-                <a:cs typeface="Arial"/>
+              <a:rPr sz="2000" b="1" i="0">
+                <a:solidFill>
+                  <a:srgbClr val="202020"/>
+                </a:solidFill>
               </a:rPr>
-              <a:t>iii) Modest benefit, but high overhead (in terms of utilisation).</a:t>
+              <a:t>Higher hardware utilisation</a:t>
+            </a:r>
+          </a:p>
+          <a:p>
+            <a:pPr>
+              <a:spcAft>
+                <a:spcPts val="900"/>
+              </a:spcAft>
+              <a:buNone/>
+            </a:pPr>
+            <a:r>
+              <a:rPr sz="1600" b="0" i="0">
+                <a:solidFill>
+                  <a:srgbClr val="555555"/>
+                </a:solidFill>
+              </a:rPr>
+              <a:t>Replicating the Zkne datapath four times costs significant extra LUTs and flip-flops.</a:t>
+            </a:r>
+          </a:p>
+          <a:p>
+            <a:pPr>
+              <a:spcAft>
+                <a:spcPts val="100"/>
+              </a:spcAft>
+            </a:pPr>
+            <a:r>
+              <a:rPr sz="2000" b="1" i="0">
+                <a:solidFill>
+                  <a:srgbClr val="202020"/>
+                </a:solidFill>
+              </a:rPr>
+              <a:t>Narrow workload applicability</a:t>
+            </a:r>
+          </a:p>
+          <a:p>
+            <a:pPr>
+              <a:spcAft>
+                <a:spcPts val="200"/>
+              </a:spcAft>
+              <a:buNone/>
+            </a:pPr>
+            <a:r>
+              <a:rPr sz="1600" b="0" i="0">
+                <a:solidFill>
+                  <a:srgbClr val="555555"/>
+                </a:solidFill>
+              </a:rPr>
+              <a:t>The fused op only accelerates AES; that area sits idle for any other workload.</a:t>
             </a:r>
           </a:p>
         </p:txBody>
@@ -32446,7 +33810,7 @@
 </p:sld>
 </file>
 
-<file path=ppt/slides/slide24.xml><?xml version="1.0" encoding="utf-8"?>
+<file path=ppt/slides/slide25.xml><?xml version="1.0" encoding="utf-8"?>
 <p:sld xmlns:a="http://schemas.openxmlformats.org/drawingml/2006/main" xmlns:r="http://schemas.openxmlformats.org/officeDocument/2006/relationships" xmlns:p="http://schemas.openxmlformats.org/presentationml/2006/main">
   <p:cSld>
     <p:spTree>
@@ -32609,7 +33973,7 @@
             <a:fld id="{9E843DB9-9987-4157-AB9C-CEA8D7D910BB}" type="slidenum">
               <a:rPr lang="en-GB" smtClean="0"/>
               <a:pPr/>
-              <a:t>22</a:t>
+              <a:t>25</a:t>
             </a:fld>
             <a:endParaRPr lang="en-GB"/>
           </a:p>
@@ -32671,6 +34035,482 @@
 </file>
 
 <file path=ppt/slides/slide3.xml><?xml version="1.0" encoding="utf-8"?>
+<p:sld xmlns:a="http://schemas.openxmlformats.org/drawingml/2006/main" xmlns:r="http://schemas.openxmlformats.org/officeDocument/2006/relationships" xmlns:p="http://schemas.openxmlformats.org/presentationml/2006/main">
+  <p:cSld>
+    <p:spTree>
+      <p:nvGrpSpPr>
+        <p:cNvPr id="1" name="">
+          <a:extLst>
+            <a:ext uri="{FF2B5EF4-FFF2-40B4-BE49-F238E27FC236}">
+              <a16:creationId xmlns:a16="http://schemas.microsoft.com/office/drawing/2014/main" id="{05E582E4-985D-EDCC-A997-281BB59C22D7}"/>
+            </a:ext>
+          </a:extLst>
+        </p:cNvPr>
+        <p:cNvGrpSpPr/>
+        <p:nvPr/>
+      </p:nvGrpSpPr>
+      <p:grpSpPr>
+        <a:xfrm>
+          <a:off x="0" y="0"/>
+          <a:ext cx="0" cy="0"/>
+          <a:chOff x="0" y="0"/>
+          <a:chExt cx="0" cy="0"/>
+        </a:xfrm>
+      </p:grpSpPr>
+      <p:sp>
+        <p:nvSpPr>
+          <p:cNvPr id="5" name="Tijdelijke aanduiding voor datum 4">
+            <a:extLst>
+              <a:ext uri="{FF2B5EF4-FFF2-40B4-BE49-F238E27FC236}">
+                <a16:creationId xmlns:a16="http://schemas.microsoft.com/office/drawing/2014/main" id="{9EF4DD01-BDA7-02AD-F745-81027A63279E}"/>
+              </a:ext>
+            </a:extLst>
+          </p:cNvPr>
+          <p:cNvSpPr>
+            <a:spLocks noGrp="1"/>
+          </p:cNvSpPr>
+          <p:nvPr>
+            <p:ph type="dt" sz="half" idx="18"/>
+          </p:nvPr>
+        </p:nvSpPr>
+        <p:spPr>
+          <a:xfrm>
+            <a:off x="10146569" y="6405669"/>
+            <a:ext cx="766235" cy="184666"/>
+          </a:xfrm>
+        </p:spPr>
+        <p:txBody>
+          <a:bodyPr wrap="none" anchor="ctr">
+            <a:normAutofit/>
+          </a:bodyPr>
+          <a:lstStyle/>
+          <a:p>
+            <a:pPr>
+              <a:spcAft>
+                <a:spcPts val="600"/>
+              </a:spcAft>
+            </a:pPr>
+            <a:fld id="{087A43E6-197A-4232-A775-7017A41F9758}" type="datetime1">
+              <a:rPr lang="nl-NL" smtClean="0"/>
+              <a:pPr>
+                <a:spcAft>
+                  <a:spcPts val="600"/>
+                </a:spcAft>
+              </a:pPr>
+              <a:t>12-6-2026</a:t>
+            </a:fld>
+            <a:endParaRPr lang="en-GB"/>
+          </a:p>
+        </p:txBody>
+      </p:sp>
+      <p:sp>
+        <p:nvSpPr>
+          <p:cNvPr id="16" name="Tijdelijke aanduiding voor dianummer 15">
+            <a:extLst>
+              <a:ext uri="{FF2B5EF4-FFF2-40B4-BE49-F238E27FC236}">
+                <a16:creationId xmlns:a16="http://schemas.microsoft.com/office/drawing/2014/main" id="{774DE386-282B-CB09-A1B7-772C2B66A60F}"/>
+              </a:ext>
+            </a:extLst>
+          </p:cNvPr>
+          <p:cNvSpPr>
+            <a:spLocks noGrp="1"/>
+          </p:cNvSpPr>
+          <p:nvPr>
+            <p:ph type="sldNum" sz="quarter" idx="20"/>
+          </p:nvPr>
+        </p:nvSpPr>
+        <p:spPr>
+          <a:xfrm>
+            <a:off x="11178464" y="6405669"/>
+            <a:ext cx="291298" cy="184666"/>
+          </a:xfrm>
+        </p:spPr>
+        <p:txBody>
+          <a:bodyPr wrap="none" anchor="ctr">
+            <a:normAutofit/>
+          </a:bodyPr>
+          <a:lstStyle/>
+          <a:p>
+            <a:pPr>
+              <a:spcAft>
+                <a:spcPts val="600"/>
+              </a:spcAft>
+            </a:pPr>
+            <a:fld id="{9E843DB9-9987-4157-AB9C-CEA8D7D910BB}" type="slidenum">
+              <a:rPr lang="en-GB" smtClean="0"/>
+              <a:pPr>
+                <a:spcAft>
+                  <a:spcPts val="600"/>
+                </a:spcAft>
+              </a:pPr>
+              <a:t>3</a:t>
+            </a:fld>
+            <a:endParaRPr lang="en-GB"/>
+          </a:p>
+        </p:txBody>
+      </p:sp>
+      <p:sp>
+        <p:nvSpPr>
+          <p:cNvPr id="14" name="Titel 13">
+            <a:extLst>
+              <a:ext uri="{FF2B5EF4-FFF2-40B4-BE49-F238E27FC236}">
+                <a16:creationId xmlns:a16="http://schemas.microsoft.com/office/drawing/2014/main" id="{6A6725BD-CFE5-7DB0-5442-8B5A7D458059}"/>
+              </a:ext>
+            </a:extLst>
+          </p:cNvPr>
+          <p:cNvSpPr>
+            <a:spLocks noGrp="1"/>
+          </p:cNvSpPr>
+          <p:nvPr>
+            <p:ph type="title"/>
+          </p:nvPr>
+        </p:nvSpPr>
+        <p:spPr>
+          <a:xfrm>
+            <a:off x="913596" y="403478"/>
+            <a:ext cx="10743750" cy="642385"/>
+          </a:xfrm>
+        </p:spPr>
+        <p:txBody>
+          <a:bodyPr vert="horz" lIns="0" tIns="0" rIns="0" bIns="378000" rtlCol="0" anchor="ctr">
+            <a:noAutofit/>
+          </a:bodyPr>
+          <a:lstStyle/>
+          <a:p>
+            <a:r>
+              <a:rPr lang="en-US" sz="3200">
+                <a:cs typeface="Arial"/>
+              </a:rPr>
+              <a:t>Where is AES used?</a:t>
+            </a:r>
+          </a:p>
+        </p:txBody>
+      </p:sp>
+      <p:pic>
+        <p:nvPicPr>
+          <p:cNvPr id="2" name="Picture 1">
+            <a:extLst>
+              <a:ext uri="{FF2B5EF4-FFF2-40B4-BE49-F238E27FC236}">
+                <a16:creationId xmlns:a16="http://schemas.microsoft.com/office/drawing/2014/main" id="{8E69A723-76E1-E050-F698-54F0B3DC6E7F}"/>
+              </a:ext>
+            </a:extLst>
+          </p:cNvPr>
+          <p:cNvPicPr>
+            <a:picLocks noChangeAspect="1"/>
+          </p:cNvPicPr>
+          <p:nvPr/>
+        </p:nvPicPr>
+        <p:blipFill>
+          <a:blip r:embed="rId2"/>
+          <a:srcRect l="15370" r="4804" b="1"/>
+          <a:stretch>
+            <a:fillRect/>
+          </a:stretch>
+        </p:blipFill>
+        <p:spPr>
+          <a:xfrm>
+            <a:off x="718666" y="1236363"/>
+            <a:ext cx="5185805" cy="4352544"/>
+          </a:xfrm>
+          <a:prstGeom prst="rect">
+            <a:avLst/>
+          </a:prstGeom>
+          <a:noFill/>
+        </p:spPr>
+      </p:pic>
+      <p:sp>
+        <p:nvSpPr>
+          <p:cNvPr id="8" name="Tijdelijke aanduiding voor tekst 7">
+            <a:extLst>
+              <a:ext uri="{FF2B5EF4-FFF2-40B4-BE49-F238E27FC236}">
+                <a16:creationId xmlns:a16="http://schemas.microsoft.com/office/drawing/2014/main" id="{3CBB743A-1012-DD85-D620-BFE9E8A87F38}"/>
+              </a:ext>
+            </a:extLst>
+          </p:cNvPr>
+          <p:cNvSpPr>
+            <a:spLocks noGrp="1"/>
+          </p:cNvSpPr>
+          <p:nvPr>
+            <p:ph type="body" sz="quarter" idx="4294967295"/>
+          </p:nvPr>
+        </p:nvSpPr>
+        <p:spPr>
+          <a:xfrm>
+            <a:off x="6285471" y="725661"/>
+            <a:ext cx="5599230" cy="5584148"/>
+          </a:xfrm>
+        </p:spPr>
+        <p:txBody>
+          <a:bodyPr vert="horz" lIns="0" tIns="0" rIns="0" bIns="0" rtlCol="0" anchor="t">
+            <a:noAutofit/>
+          </a:bodyPr>
+          <a:lstStyle/>
+          <a:p>
+            <a:pPr lvl="2"/>
+            <a:endParaRPr lang="en-US" b="1" kern="1200">
+              <a:cs typeface="Arial"/>
+            </a:endParaRPr>
+          </a:p>
+          <a:p>
+            <a:pPr marL="0">
+              <a:buClr>
+                <a:srgbClr val="00A6D6"/>
+              </a:buClr>
+              <a:buFont typeface="Arial"/>
+              <a:buChar char="•"/>
+            </a:pPr>
+            <a:r>
+              <a:rPr lang="en-US" b="1" kern="1200"/>
+              <a:t>HTTPS/TLS</a:t>
+            </a:r>
+            <a:r>
+              <a:rPr lang="en-US"/>
+              <a:t> </a:t>
+            </a:r>
+            <a:endParaRPr lang="en-US" kern="1200">
+              <a:cs typeface="Arial"/>
+            </a:endParaRPr>
+          </a:p>
+          <a:p>
+            <a:pPr marL="0" indent="0">
+              <a:buClr>
+                <a:srgbClr val="00A6D6"/>
+              </a:buClr>
+              <a:buNone/>
+            </a:pPr>
+            <a:endParaRPr lang="en-US" sz="600">
+              <a:cs typeface="Arial"/>
+            </a:endParaRPr>
+          </a:p>
+          <a:p>
+            <a:pPr marL="0">
+              <a:buClr>
+                <a:srgbClr val="00A6D6"/>
+              </a:buClr>
+              <a:buFont typeface="Arial"/>
+              <a:buChar char="•"/>
+            </a:pPr>
+            <a:r>
+              <a:rPr lang="en-US" b="1" kern="1200"/>
+              <a:t>Wi-Fi (WPA2/WPA3)</a:t>
+            </a:r>
+            <a:r>
+              <a:rPr lang="en-US" kern="1200"/>
+              <a:t> </a:t>
+            </a:r>
+            <a:endParaRPr lang="en-US" kern="1200">
+              <a:cs typeface="Arial"/>
+            </a:endParaRPr>
+          </a:p>
+          <a:p>
+            <a:pPr marL="0">
+              <a:buClr>
+                <a:srgbClr val="00A6D6"/>
+              </a:buClr>
+              <a:buFont typeface="Arial"/>
+              <a:buChar char="•"/>
+            </a:pPr>
+            <a:endParaRPr lang="en-US" sz="600" b="1">
+              <a:cs typeface="Arial"/>
+            </a:endParaRPr>
+          </a:p>
+          <a:p>
+            <a:pPr marL="0">
+              <a:buClr>
+                <a:srgbClr val="00A6D6"/>
+              </a:buClr>
+              <a:buFont typeface="Arial"/>
+              <a:buChar char="•"/>
+            </a:pPr>
+            <a:r>
+              <a:rPr lang="en-US" b="1" kern="1200"/>
+              <a:t>File encryption</a:t>
+            </a:r>
+            <a:r>
+              <a:rPr lang="en-US" kern="1200"/>
+              <a:t> </a:t>
+            </a:r>
+            <a:endParaRPr lang="en-US" kern="1200">
+              <a:cs typeface="Arial"/>
+            </a:endParaRPr>
+          </a:p>
+          <a:p>
+            <a:pPr marL="0">
+              <a:buClr>
+                <a:srgbClr val="00A6D6"/>
+              </a:buClr>
+              <a:buFont typeface="Arial"/>
+              <a:buChar char="•"/>
+            </a:pPr>
+            <a:endParaRPr lang="en-US" sz="600" b="1">
+              <a:cs typeface="Arial"/>
+            </a:endParaRPr>
+          </a:p>
+          <a:p>
+            <a:pPr marL="0">
+              <a:buClr>
+                <a:srgbClr val="00A6D6"/>
+              </a:buClr>
+              <a:buFont typeface="Arial"/>
+              <a:buChar char="•"/>
+            </a:pPr>
+            <a:r>
+              <a:rPr lang="en-US" b="1" kern="1200"/>
+              <a:t>Cloud storage</a:t>
+            </a:r>
+            <a:endParaRPr lang="en-US" kern="1200">
+              <a:cs typeface="Arial"/>
+            </a:endParaRPr>
+          </a:p>
+          <a:p>
+            <a:pPr marL="0">
+              <a:buFont typeface="Arial"/>
+              <a:buChar char="•"/>
+            </a:pPr>
+            <a:endParaRPr lang="en-US" sz="600" b="1">
+              <a:cs typeface="Arial"/>
+            </a:endParaRPr>
+          </a:p>
+          <a:p>
+            <a:pPr marL="0">
+              <a:buFont typeface="Arial"/>
+              <a:buChar char="•"/>
+            </a:pPr>
+            <a:r>
+              <a:rPr lang="en-US" b="1" kern="1200"/>
+              <a:t>VPNs</a:t>
+            </a:r>
+            <a:r>
+              <a:rPr lang="en-US" kern="1200"/>
+              <a:t> </a:t>
+            </a:r>
+            <a:endParaRPr lang="en-US" kern="1200">
+              <a:cs typeface="Arial"/>
+            </a:endParaRPr>
+          </a:p>
+          <a:p>
+            <a:pPr marL="0">
+              <a:buFont typeface="Arial"/>
+              <a:buChar char="•"/>
+            </a:pPr>
+            <a:endParaRPr lang="en-US" sz="600" b="1">
+              <a:cs typeface="Arial"/>
+            </a:endParaRPr>
+          </a:p>
+          <a:p>
+            <a:pPr marL="0">
+              <a:buFont typeface="Arial"/>
+              <a:buChar char="•"/>
+            </a:pPr>
+            <a:r>
+              <a:rPr lang="en-US" b="1" kern="1200"/>
+              <a:t>USB drives &amp; SSDs</a:t>
+            </a:r>
+            <a:endParaRPr lang="en-US" kern="1200">
+              <a:cs typeface="Arial"/>
+            </a:endParaRPr>
+          </a:p>
+          <a:p>
+            <a:pPr marL="0">
+              <a:buFont typeface="Arial"/>
+              <a:buChar char="•"/>
+            </a:pPr>
+            <a:endParaRPr lang="en-US" sz="600" b="1">
+              <a:cs typeface="Arial"/>
+            </a:endParaRPr>
+          </a:p>
+          <a:p>
+            <a:pPr marL="0">
+              <a:buFont typeface="Arial"/>
+              <a:buChar char="•"/>
+            </a:pPr>
+            <a:r>
+              <a:rPr lang="en-US" b="1" kern="1200"/>
+              <a:t>Smart cards &amp; passports</a:t>
+            </a:r>
+            <a:r>
+              <a:rPr lang="en-US" kern="1200"/>
+              <a:t> </a:t>
+            </a:r>
+            <a:endParaRPr lang="en-US" kern="1200">
+              <a:cs typeface="Arial"/>
+            </a:endParaRPr>
+          </a:p>
+          <a:p>
+            <a:pPr marL="0">
+              <a:buFont typeface="Arial"/>
+              <a:buChar char="•"/>
+            </a:pPr>
+            <a:endParaRPr lang="en-US" sz="600" b="1">
+              <a:cs typeface="Arial"/>
+            </a:endParaRPr>
+          </a:p>
+          <a:p>
+            <a:pPr marL="0">
+              <a:buFont typeface="Arial"/>
+              <a:buChar char="•"/>
+            </a:pPr>
+            <a:r>
+              <a:rPr lang="en-US" b="1" kern="1200"/>
+              <a:t>IoT devices</a:t>
+            </a:r>
+            <a:r>
+              <a:rPr lang="en-US" kern="1200"/>
+              <a:t> </a:t>
+            </a:r>
+            <a:endParaRPr lang="en-US" kern="1200">
+              <a:cs typeface="Arial"/>
+            </a:endParaRPr>
+          </a:p>
+          <a:p>
+            <a:pPr lvl="2" indent="0">
+              <a:buFont typeface="Segoe UI Light" panose="020B0502040204020203" pitchFamily="34" charset="0"/>
+              <a:buNone/>
+            </a:pPr>
+            <a:endParaRPr lang="en-US" kern="1200">
+              <a:cs typeface="Arial"/>
+            </a:endParaRPr>
+          </a:p>
+          <a:p>
+            <a:pPr lvl="2"/>
+            <a:endParaRPr lang="en-US" kern="1200">
+              <a:cs typeface="Arial"/>
+            </a:endParaRPr>
+          </a:p>
+          <a:p>
+            <a:pPr lvl="2"/>
+            <a:endParaRPr lang="en-US" b="1">
+              <a:cs typeface="Arial"/>
+            </a:endParaRPr>
+          </a:p>
+        </p:txBody>
+      </p:sp>
+    </p:spTree>
+    <p:extLst>
+      <p:ext uri="{BB962C8B-B14F-4D97-AF65-F5344CB8AC3E}">
+        <p14:creationId xmlns:p14="http://schemas.microsoft.com/office/powerpoint/2010/main" val="829201509"/>
+      </p:ext>
+    </p:extLst>
+  </p:cSld>
+  <p:clrMapOvr>
+    <a:masterClrMapping/>
+  </p:clrMapOvr>
+  <mc:AlternateContent xmlns:mc="http://schemas.openxmlformats.org/markup-compatibility/2006" xmlns:p14="http://schemas.microsoft.com/office/powerpoint/2010/main">
+    <mc:Choice Requires="p14">
+      <p:transition spd="med" p14:dur="700">
+        <p:fade/>
+      </p:transition>
+    </mc:Choice>
+    <mc:Fallback xmlns="">
+      <p:transition spd="med">
+        <p:fade/>
+      </p:transition>
+    </mc:Fallback>
+  </mc:AlternateContent>
+</p:sld>
+</file>
+
+<file path=ppt/slides/slide4.xml><?xml version="1.0" encoding="utf-8"?>
 <p:sld xmlns:a="http://schemas.openxmlformats.org/drawingml/2006/main" xmlns:r="http://schemas.openxmlformats.org/officeDocument/2006/relationships" xmlns:p="http://schemas.openxmlformats.org/presentationml/2006/main">
   <p:cSld>
     <p:spTree>
@@ -32773,7 +34613,7 @@
                   <a:spcPts val="600"/>
                 </a:spcAft>
               </a:pPr>
-              <a:t>3</a:t>
+              <a:t>4</a:t>
             </a:fld>
             <a:endParaRPr lang="en-GB"/>
           </a:p>
@@ -32808,7 +34648,7 @@
           <a:lstStyle/>
           <a:p>
             <a:r>
-              <a:rPr lang="en-US" sz="2500" b="0">
+              <a:rPr lang="en-US" sz="2500">
                 <a:highlight>
                   <a:srgbClr val="FFFFFF"/>
                 </a:highlight>
@@ -33053,7 +34893,7 @@
 </p:sld>
 </file>
 
-<file path=ppt/slides/slide4.xml><?xml version="1.0" encoding="utf-8"?>
+<file path=ppt/slides/slide5.xml><?xml version="1.0" encoding="utf-8"?>
 <p:sld xmlns:a="http://schemas.openxmlformats.org/drawingml/2006/main" xmlns:r="http://schemas.openxmlformats.org/officeDocument/2006/relationships" xmlns:p="http://schemas.openxmlformats.org/presentationml/2006/main">
   <p:cSld>
     <p:spTree>
@@ -33162,7 +35002,7 @@
                   <a:spcPts val="600"/>
                 </a:spcAft>
               </a:pPr>
-              <a:t>4</a:t>
+              <a:t>5</a:t>
             </a:fld>
             <a:endParaRPr lang="en-GB"/>
           </a:p>
@@ -33197,7 +35037,7 @@
           <a:lstStyle/>
           <a:p>
             <a:r>
-              <a:rPr lang="en-US" sz="2500" b="0">
+              <a:rPr lang="en-US" sz="2500">
                 <a:highlight>
                   <a:srgbClr val="FFFFFF"/>
                 </a:highlight>
@@ -33207,7 +35047,7 @@
               <a:t>Advanced Encryption Standard </a:t>
             </a:r>
             <a:r>
-              <a:rPr lang="en-US" sz="2500" b="0">
+              <a:rPr lang="en-US" sz="2500">
                 <a:highlight>
                   <a:srgbClr val="FFFFFF"/>
                 </a:highlight>
@@ -33503,428 +35343,6 @@
 </p:sld>
 </file>
 
-<file path=ppt/slides/slide5.xml><?xml version="1.0" encoding="utf-8"?>
-<p:sld xmlns:a="http://schemas.openxmlformats.org/drawingml/2006/main" xmlns:r="http://schemas.openxmlformats.org/officeDocument/2006/relationships" xmlns:p="http://schemas.openxmlformats.org/presentationml/2006/main">
-  <p:cSld>
-    <p:spTree>
-      <p:nvGrpSpPr>
-        <p:cNvPr id="1" name="">
-          <a:extLst>
-            <a:ext uri="{FF2B5EF4-FFF2-40B4-BE49-F238E27FC236}">
-              <a16:creationId xmlns:a16="http://schemas.microsoft.com/office/drawing/2014/main" id="{05E582E4-985D-EDCC-A997-281BB59C22D7}"/>
-            </a:ext>
-          </a:extLst>
-        </p:cNvPr>
-        <p:cNvGrpSpPr/>
-        <p:nvPr/>
-      </p:nvGrpSpPr>
-      <p:grpSpPr>
-        <a:xfrm>
-          <a:off x="0" y="0"/>
-          <a:ext cx="0" cy="0"/>
-          <a:chOff x="0" y="0"/>
-          <a:chExt cx="0" cy="0"/>
-        </a:xfrm>
-      </p:grpSpPr>
-      <p:sp>
-        <p:nvSpPr>
-          <p:cNvPr id="5" name="Tijdelijke aanduiding voor datum 4">
-            <a:extLst>
-              <a:ext uri="{FF2B5EF4-FFF2-40B4-BE49-F238E27FC236}">
-                <a16:creationId xmlns:a16="http://schemas.microsoft.com/office/drawing/2014/main" id="{9EF4DD01-BDA7-02AD-F745-81027A63279E}"/>
-              </a:ext>
-            </a:extLst>
-          </p:cNvPr>
-          <p:cNvSpPr>
-            <a:spLocks noGrp="1"/>
-          </p:cNvSpPr>
-          <p:nvPr>
-            <p:ph type="dt" sz="half" idx="18"/>
-          </p:nvPr>
-        </p:nvSpPr>
-        <p:spPr>
-          <a:xfrm>
-            <a:off x="10146569" y="6405669"/>
-            <a:ext cx="766235" cy="184666"/>
-          </a:xfrm>
-        </p:spPr>
-        <p:txBody>
-          <a:bodyPr wrap="none" anchor="ctr">
-            <a:normAutofit/>
-          </a:bodyPr>
-          <a:lstStyle/>
-          <a:p>
-            <a:pPr>
-              <a:spcAft>
-                <a:spcPts val="600"/>
-              </a:spcAft>
-            </a:pPr>
-            <a:fld id="{087A43E6-197A-4232-A775-7017A41F9758}" type="datetime1">
-              <a:rPr lang="nl-NL" smtClean="0"/>
-              <a:pPr>
-                <a:spcAft>
-                  <a:spcPts val="600"/>
-                </a:spcAft>
-              </a:pPr>
-              <a:t>12-6-2026</a:t>
-            </a:fld>
-            <a:endParaRPr lang="en-GB"/>
-          </a:p>
-        </p:txBody>
-      </p:sp>
-      <p:sp>
-        <p:nvSpPr>
-          <p:cNvPr id="16" name="Tijdelijke aanduiding voor dianummer 15">
-            <a:extLst>
-              <a:ext uri="{FF2B5EF4-FFF2-40B4-BE49-F238E27FC236}">
-                <a16:creationId xmlns:a16="http://schemas.microsoft.com/office/drawing/2014/main" id="{774DE386-282B-CB09-A1B7-772C2B66A60F}"/>
-              </a:ext>
-            </a:extLst>
-          </p:cNvPr>
-          <p:cNvSpPr>
-            <a:spLocks noGrp="1"/>
-          </p:cNvSpPr>
-          <p:nvPr>
-            <p:ph type="sldNum" sz="quarter" idx="20"/>
-          </p:nvPr>
-        </p:nvSpPr>
-        <p:spPr>
-          <a:xfrm>
-            <a:off x="11178464" y="6405669"/>
-            <a:ext cx="291298" cy="184666"/>
-          </a:xfrm>
-        </p:spPr>
-        <p:txBody>
-          <a:bodyPr wrap="none" anchor="ctr">
-            <a:normAutofit/>
-          </a:bodyPr>
-          <a:lstStyle/>
-          <a:p>
-            <a:pPr>
-              <a:spcAft>
-                <a:spcPts val="600"/>
-              </a:spcAft>
-            </a:pPr>
-            <a:fld id="{9E843DB9-9987-4157-AB9C-CEA8D7D910BB}" type="slidenum">
-              <a:rPr lang="en-GB" smtClean="0"/>
-              <a:pPr>
-                <a:spcAft>
-                  <a:spcPts val="600"/>
-                </a:spcAft>
-              </a:pPr>
-              <a:t>5</a:t>
-            </a:fld>
-            <a:endParaRPr lang="en-GB"/>
-          </a:p>
-        </p:txBody>
-      </p:sp>
-      <p:sp>
-        <p:nvSpPr>
-          <p:cNvPr id="14" name="Titel 13">
-            <a:extLst>
-              <a:ext uri="{FF2B5EF4-FFF2-40B4-BE49-F238E27FC236}">
-                <a16:creationId xmlns:a16="http://schemas.microsoft.com/office/drawing/2014/main" id="{6A6725BD-CFE5-7DB0-5442-8B5A7D458059}"/>
-              </a:ext>
-            </a:extLst>
-          </p:cNvPr>
-          <p:cNvSpPr>
-            <a:spLocks noGrp="1"/>
-          </p:cNvSpPr>
-          <p:nvPr>
-            <p:ph type="title"/>
-          </p:nvPr>
-        </p:nvSpPr>
-        <p:spPr>
-          <a:xfrm>
-            <a:off x="718666" y="722454"/>
-            <a:ext cx="10752610" cy="323409"/>
-          </a:xfrm>
-        </p:spPr>
-        <p:txBody>
-          <a:bodyPr vert="horz" lIns="0" tIns="0" rIns="0" bIns="378000" rtlCol="0" anchor="ctr">
-            <a:noAutofit/>
-          </a:bodyPr>
-          <a:lstStyle/>
-          <a:p>
-            <a:r>
-              <a:rPr lang="en-US" sz="2500" b="0"/>
-              <a:t>Advanced Encryption Standard (</a:t>
-            </a:r>
-            <a:r>
-              <a:rPr lang="en-US" sz="2400"/>
-              <a:t>AES)</a:t>
-            </a:r>
-            <a:endParaRPr lang="en-US"/>
-          </a:p>
-        </p:txBody>
-      </p:sp>
-      <p:pic>
-        <p:nvPicPr>
-          <p:cNvPr id="2" name="Picture 1">
-            <a:extLst>
-              <a:ext uri="{FF2B5EF4-FFF2-40B4-BE49-F238E27FC236}">
-                <a16:creationId xmlns:a16="http://schemas.microsoft.com/office/drawing/2014/main" id="{8E69A723-76E1-E050-F698-54F0B3DC6E7F}"/>
-              </a:ext>
-            </a:extLst>
-          </p:cNvPr>
-          <p:cNvPicPr>
-            <a:picLocks noChangeAspect="1"/>
-          </p:cNvPicPr>
-          <p:nvPr/>
-        </p:nvPicPr>
-        <p:blipFill>
-          <a:blip r:embed="rId2"/>
-          <a:srcRect l="15370" r="4804" b="1"/>
-          <a:stretch>
-            <a:fillRect/>
-          </a:stretch>
-        </p:blipFill>
-        <p:spPr>
-          <a:xfrm>
-            <a:off x="718666" y="1236363"/>
-            <a:ext cx="5185805" cy="4352544"/>
-          </a:xfrm>
-          <a:prstGeom prst="rect">
-            <a:avLst/>
-          </a:prstGeom>
-          <a:noFill/>
-        </p:spPr>
-      </p:pic>
-      <p:sp>
-        <p:nvSpPr>
-          <p:cNvPr id="8" name="Tijdelijke aanduiding voor tekst 7">
-            <a:extLst>
-              <a:ext uri="{FF2B5EF4-FFF2-40B4-BE49-F238E27FC236}">
-                <a16:creationId xmlns:a16="http://schemas.microsoft.com/office/drawing/2014/main" id="{3CBB743A-1012-DD85-D620-BFE9E8A87F38}"/>
-              </a:ext>
-            </a:extLst>
-          </p:cNvPr>
-          <p:cNvSpPr>
-            <a:spLocks noGrp="1"/>
-          </p:cNvSpPr>
-          <p:nvPr>
-            <p:ph type="body" sz="quarter" idx="4294967295"/>
-          </p:nvPr>
-        </p:nvSpPr>
-        <p:spPr>
-          <a:xfrm>
-            <a:off x="6285471" y="725661"/>
-            <a:ext cx="5599230" cy="4352544"/>
-          </a:xfrm>
-        </p:spPr>
-        <p:txBody>
-          <a:bodyPr vert="horz" lIns="0" tIns="0" rIns="0" bIns="0" rtlCol="0" anchor="t">
-            <a:noAutofit/>
-          </a:bodyPr>
-          <a:lstStyle/>
-          <a:p>
-            <a:pPr lvl="2"/>
-            <a:r>
-              <a:rPr lang="en-US" sz="1600" b="1" kern="1200"/>
-              <a:t>Where is AES used?</a:t>
-            </a:r>
-            <a:endParaRPr lang="en-US" sz="1600" b="1" kern="1200">
-              <a:cs typeface="Arial"/>
-            </a:endParaRPr>
-          </a:p>
-          <a:p>
-            <a:pPr marL="0">
-              <a:buClr>
-                <a:srgbClr val="00A6D6"/>
-              </a:buClr>
-              <a:buFont typeface="Arial"/>
-              <a:buChar char="•"/>
-            </a:pPr>
-            <a:r>
-              <a:rPr lang="en-US" sz="1600" b="1" kern="1200"/>
-              <a:t>HTTPS/TLS</a:t>
-            </a:r>
-            <a:r>
-              <a:rPr lang="en-US" sz="1600" kern="1200"/>
-              <a:t> — Every secure website visit (banking, shopping) encrypts data using AES</a:t>
-            </a:r>
-            <a:endParaRPr lang="en-US" sz="1600" kern="1200">
-              <a:cs typeface="Arial"/>
-            </a:endParaRPr>
-          </a:p>
-          <a:p>
-            <a:pPr marL="0">
-              <a:buClr>
-                <a:srgbClr val="00A6D6"/>
-              </a:buClr>
-              <a:buFont typeface="Arial"/>
-              <a:buChar char="•"/>
-            </a:pPr>
-            <a:r>
-              <a:rPr lang="en-US" sz="1600" b="1" kern="1200"/>
-              <a:t>Wi-Fi (WPA2/WPA3)</a:t>
-            </a:r>
-            <a:r>
-              <a:rPr lang="en-US" sz="1600" kern="1200"/>
-              <a:t> — Your home/office network uses AES to protect wireless traffic</a:t>
-            </a:r>
-            <a:endParaRPr lang="en-US" sz="1600" kern="1200">
-              <a:cs typeface="Arial"/>
-            </a:endParaRPr>
-          </a:p>
-          <a:p>
-            <a:pPr marL="0">
-              <a:buClr>
-                <a:srgbClr val="00A6D6"/>
-              </a:buClr>
-              <a:buFont typeface="Arial"/>
-              <a:buChar char="•"/>
-            </a:pPr>
-            <a:r>
-              <a:rPr lang="en-US" sz="1600" b="1" kern="1200"/>
-              <a:t>File encryption</a:t>
-            </a:r>
-            <a:r>
-              <a:rPr lang="en-US" sz="1600" kern="1200"/>
-              <a:t> — BitLocker (Windows), </a:t>
-            </a:r>
-            <a:r>
-              <a:rPr lang="en-US" sz="1600" kern="1200" err="1"/>
-              <a:t>FileVault</a:t>
-            </a:r>
-            <a:r>
-              <a:rPr lang="en-US" sz="1600" kern="1200"/>
-              <a:t> (Mac) encrypt your hard drive with AES</a:t>
-            </a:r>
-            <a:endParaRPr lang="en-US" sz="1600" kern="1200">
-              <a:cs typeface="Arial"/>
-            </a:endParaRPr>
-          </a:p>
-          <a:p>
-            <a:pPr marL="0">
-              <a:buClr>
-                <a:srgbClr val="00A6D6"/>
-              </a:buClr>
-              <a:buFont typeface="Arial"/>
-              <a:buChar char="•"/>
-            </a:pPr>
-            <a:r>
-              <a:rPr lang="en-US" sz="1600" b="1" kern="1200"/>
-              <a:t>Cloud storage</a:t>
-            </a:r>
-            <a:r>
-              <a:rPr lang="en-US" sz="1600" kern="1200"/>
-              <a:t> — Google Drive, Dropbox encrypt stored files using AES-256</a:t>
-            </a:r>
-            <a:endParaRPr lang="en-US" sz="1600" kern="1200">
-              <a:cs typeface="Arial"/>
-            </a:endParaRPr>
-          </a:p>
-          <a:p>
-            <a:pPr marL="0">
-              <a:buFont typeface="Arial"/>
-              <a:buChar char="•"/>
-            </a:pPr>
-            <a:r>
-              <a:rPr lang="en-US" sz="1600" b="1" kern="1200"/>
-              <a:t>VPNs</a:t>
-            </a:r>
-            <a:r>
-              <a:rPr lang="en-US" sz="1600" kern="1200"/>
-              <a:t> — All major VPN providers (NordVPN, OpenVPN) use AES as their core cipher</a:t>
-            </a:r>
-            <a:endParaRPr lang="en-US" sz="1600" kern="1200">
-              <a:cs typeface="Arial"/>
-            </a:endParaRPr>
-          </a:p>
-          <a:p>
-            <a:pPr marL="0">
-              <a:buFont typeface="Arial"/>
-              <a:buChar char="•"/>
-            </a:pPr>
-            <a:r>
-              <a:rPr lang="en-US" sz="1600" b="1" kern="1200"/>
-              <a:t>USB drives &amp; SSDs</a:t>
-            </a:r>
-            <a:r>
-              <a:rPr lang="en-US" sz="1600" kern="1200"/>
-              <a:t> — Hardware-encrypted storage uses dedicated AES engines</a:t>
-            </a:r>
-            <a:endParaRPr lang="en-US" sz="1600" kern="1200">
-              <a:cs typeface="Arial"/>
-            </a:endParaRPr>
-          </a:p>
-          <a:p>
-            <a:pPr marL="0">
-              <a:buFont typeface="Arial"/>
-              <a:buChar char="•"/>
-            </a:pPr>
-            <a:r>
-              <a:rPr lang="en-US" sz="1600" b="1" kern="1200"/>
-              <a:t>Smart cards &amp; passports</a:t>
-            </a:r>
-            <a:r>
-              <a:rPr lang="en-US" sz="1600" kern="1200"/>
-              <a:t> — AES protects biometric data in modern ID documents</a:t>
-            </a:r>
-            <a:endParaRPr lang="en-US" sz="1600" kern="1200">
-              <a:cs typeface="Arial"/>
-            </a:endParaRPr>
-          </a:p>
-          <a:p>
-            <a:pPr marL="0">
-              <a:buFont typeface="Arial"/>
-              <a:buChar char="•"/>
-            </a:pPr>
-            <a:r>
-              <a:rPr lang="en-US" sz="1600" b="1" kern="1200"/>
-              <a:t>IoT devices</a:t>
-            </a:r>
-            <a:r>
-              <a:rPr lang="en-US" sz="1600" kern="1200"/>
-              <a:t> — Sensors and embedded systems use AES for secure communication</a:t>
-            </a:r>
-            <a:endParaRPr lang="en-US" sz="1600" kern="1200">
-              <a:cs typeface="Arial"/>
-            </a:endParaRPr>
-          </a:p>
-          <a:p>
-            <a:pPr lvl="2" indent="0">
-              <a:buFont typeface="Segoe UI Light" panose="020B0502040204020203" pitchFamily="34" charset="0"/>
-              <a:buNone/>
-            </a:pPr>
-            <a:endParaRPr lang="en-US" sz="1600" kern="1200">
-              <a:cs typeface="Arial"/>
-            </a:endParaRPr>
-          </a:p>
-          <a:p>
-            <a:pPr lvl="2"/>
-            <a:endParaRPr lang="en-US" sz="1600" b="1" kern="1200">
-              <a:cs typeface="Arial"/>
-            </a:endParaRPr>
-          </a:p>
-        </p:txBody>
-      </p:sp>
-    </p:spTree>
-    <p:extLst>
-      <p:ext uri="{BB962C8B-B14F-4D97-AF65-F5344CB8AC3E}">
-        <p14:creationId xmlns:p14="http://schemas.microsoft.com/office/powerpoint/2010/main" val="829201509"/>
-      </p:ext>
-    </p:extLst>
-  </p:cSld>
-  <p:clrMapOvr>
-    <a:masterClrMapping/>
-  </p:clrMapOvr>
-  <mc:AlternateContent xmlns:mc="http://schemas.openxmlformats.org/markup-compatibility/2006" xmlns:p14="http://schemas.microsoft.com/office/powerpoint/2010/main">
-    <mc:Choice Requires="p14">
-      <p:transition spd="med" p14:dur="700">
-        <p:fade/>
-      </p:transition>
-    </mc:Choice>
-    <mc:Fallback xmlns="">
-      <p:transition spd="med">
-        <p:fade/>
-      </p:transition>
-    </mc:Fallback>
-  </mc:AlternateContent>
-</p:sld>
-</file>
-
 <file path=ppt/slides/slide6.xml><?xml version="1.0" encoding="utf-8"?>
 <p:sld xmlns:a="http://schemas.openxmlformats.org/drawingml/2006/main" xmlns:r="http://schemas.openxmlformats.org/officeDocument/2006/relationships" xmlns:p="http://schemas.openxmlformats.org/presentationml/2006/main">
   <p:cSld>
@@ -34157,17 +35575,11 @@
           <p:cNvGraphicFramePr>
             <a:graphicFrameLocks noGrp="1"/>
           </p:cNvGraphicFramePr>
-          <p:nvPr>
-            <p:extLst>
-              <p:ext uri="{D42A27DB-BD31-4B8C-83A1-F6EECF244321}">
-                <p14:modId xmlns:p14="http://schemas.microsoft.com/office/powerpoint/2010/main" val="991633304"/>
-              </p:ext>
-            </p:extLst>
-          </p:nvPr>
+          <p:nvPr/>
         </p:nvGraphicFramePr>
         <p:xfrm>
-          <a:off x="1215957" y="2606040"/>
-          <a:ext cx="9754684" cy="1920240"/>
+          <a:off x="1215957" y="2697480"/>
+          <a:ext cx="9754684" cy="3147170"/>
         </p:xfrm>
         <a:graphic>
           <a:graphicData uri="http://schemas.openxmlformats.org/drawingml/2006/table">
@@ -34191,7 +35603,7 @@
                   </a:extLst>
                 </a:gridCol>
               </a:tblGrid>
-              <a:tr h="384048">
+              <a:tr h="629434">
                 <a:tc>
                   <a:txBody>
                     <a:bodyPr/>
@@ -34226,7 +35638,7 @@
                   </a:ext>
                 </a:extLst>
               </a:tr>
-              <a:tr h="384048">
+              <a:tr h="629434">
                 <a:tc>
                   <a:txBody>
                     <a:bodyPr/>
@@ -34265,7 +35677,7 @@
                   </a:ext>
                 </a:extLst>
               </a:tr>
-              <a:tr h="384048">
+              <a:tr h="629434">
                 <a:tc>
                   <a:txBody>
                     <a:bodyPr/>
@@ -34304,7 +35716,7 @@
                   </a:ext>
                 </a:extLst>
               </a:tr>
-              <a:tr h="384048">
+              <a:tr h="629434">
                 <a:tc>
                   <a:txBody>
                     <a:bodyPr/>
@@ -34343,7 +35755,7 @@
                   </a:ext>
                 </a:extLst>
               </a:tr>
-              <a:tr h="384048">
+              <a:tr h="629434">
                 <a:tc>
                   <a:txBody>
                     <a:bodyPr/>
@@ -34394,7 +35806,7 @@
         </p:nvSpPr>
         <p:spPr>
           <a:xfrm>
-            <a:off x="1216152" y="4800600"/>
+            <a:off x="1621733" y="5946058"/>
             <a:ext cx="9692640" cy="640080"/>
           </a:xfrm>
           <a:prstGeom prst="rect">
@@ -34428,7 +35840,7 @@
     </p:spTree>
     <p:extLst>
       <p:ext uri="{BB962C8B-B14F-4D97-AF65-F5344CB8AC3E}">
-        <p14:creationId xmlns:p14="http://schemas.microsoft.com/office/powerpoint/2010/main" val="1556241173"/>
+        <p14:creationId xmlns:p14="http://schemas.microsoft.com/office/powerpoint/2010/main" val="2774705563"/>
       </p:ext>
     </p:extLst>
   </p:cSld>
@@ -34610,7 +36022,7 @@
           <p:nvPr/>
         </p:nvPicPr>
         <p:blipFill>
-          <a:blip r:embed="rId3"/>
+          <a:blip r:embed="rId2"/>
           <a:stretch>
             <a:fillRect/>
           </a:stretch>
@@ -34667,7 +36079,7 @@
     </p:spTree>
     <p:extLst>
       <p:ext uri="{BB962C8B-B14F-4D97-AF65-F5344CB8AC3E}">
-        <p14:creationId xmlns:p14="http://schemas.microsoft.com/office/powerpoint/2010/main" val="910636759"/>
+        <p14:creationId xmlns:p14="http://schemas.microsoft.com/office/powerpoint/2010/main" val="2291796460"/>
       </p:ext>
     </p:extLst>
   </p:cSld>
@@ -34858,8 +36270,8 @@
         </p:nvSpPr>
         <p:spPr>
           <a:xfrm>
-            <a:off x="716386" y="1049916"/>
-            <a:ext cx="10746783" cy="4782182"/>
+            <a:off x="716386" y="1051560"/>
+            <a:ext cx="10746783" cy="1737360"/>
           </a:xfrm>
         </p:spPr>
         <p:txBody>
@@ -34870,7 +36282,7 @@
           <a:p>
             <a:pPr lvl="2">
               <a:spcAft>
-                <a:spcPts val="1200"/>
+                <a:spcPts val="1000"/>
               </a:spcAft>
             </a:pPr>
             <a:r>
@@ -34889,7 +36301,7 @@
           <a:p>
             <a:pPr>
               <a:spcAft>
-                <a:spcPts val="1200"/>
+                <a:spcPts val="1000"/>
               </a:spcAft>
             </a:pPr>
             <a:r>
@@ -34904,7 +36316,7 @@
           <a:p>
             <a:pPr>
               <a:spcAft>
-                <a:spcPts val="1200"/>
+                <a:spcPts val="1000"/>
               </a:spcAft>
             </a:pPr>
             <a:r>
@@ -34918,10 +36330,34 @@
           </a:p>
         </p:txBody>
       </p:sp>
+      <p:pic>
+        <p:nvPicPr>
+          <p:cNvPr id="17" name="Picture 16" descr="fig_round_collapse.png"/>
+          <p:cNvPicPr>
+            <a:picLocks noChangeAspect="1"/>
+          </p:cNvPicPr>
+          <p:nvPr/>
+        </p:nvPicPr>
+        <p:blipFill>
+          <a:blip r:embed="rId2"/>
+          <a:stretch>
+            <a:fillRect/>
+          </a:stretch>
+        </p:blipFill>
+        <p:spPr>
+          <a:xfrm>
+            <a:off x="1371600" y="3246120"/>
+            <a:ext cx="8778240" cy="2679673"/>
+          </a:xfrm>
+          <a:prstGeom prst="rect">
+            <a:avLst/>
+          </a:prstGeom>
+        </p:spPr>
+      </p:pic>
     </p:spTree>
     <p:extLst>
       <p:ext uri="{BB962C8B-B14F-4D97-AF65-F5344CB8AC3E}">
-        <p14:creationId xmlns:p14="http://schemas.microsoft.com/office/powerpoint/2010/main" val="2459169499"/>
+        <p14:creationId xmlns:p14="http://schemas.microsoft.com/office/powerpoint/2010/main" val="1699552827"/>
       </p:ext>
     </p:extLst>
   </p:cSld>
@@ -35159,7 +36595,7 @@
         <p:spPr>
           <a:xfrm>
             <a:off x="713232" y="1371600"/>
-            <a:ext cx="10789920" cy="1005840"/>
+            <a:ext cx="10789920" cy="677108"/>
           </a:xfrm>
           <a:prstGeom prst="rect">
             <a:avLst/>
@@ -35178,7 +36614,71 @@
                   <a:srgbClr val="00B0F0"/>
                 </a:solidFill>
               </a:rPr>
-              <a:t>aes32esmi does SubBytes + ShiftRows + MixColumns + AddRoundKey in a single cycle, removing the mix_columns bottleneck that was 83.8% of software runtime.</a:t>
+              <a:t>aes32esmi does </a:t>
+            </a:r>
+            <a:r>
+              <a:rPr lang="en-US" sz="1900" b="1" err="1">
+                <a:solidFill>
+                  <a:srgbClr val="00B0F0"/>
+                </a:solidFill>
+              </a:rPr>
+              <a:t>SubBytes</a:t>
+            </a:r>
+            <a:r>
+              <a:rPr sz="1900" b="1">
+                <a:solidFill>
+                  <a:srgbClr val="00B0F0"/>
+                </a:solidFill>
+              </a:rPr>
+              <a:t> + </a:t>
+            </a:r>
+            <a:r>
+              <a:rPr lang="en-US" sz="1900" b="1" err="1">
+                <a:solidFill>
+                  <a:srgbClr val="00B0F0"/>
+                </a:solidFill>
+              </a:rPr>
+              <a:t>ShiftRows</a:t>
+            </a:r>
+            <a:r>
+              <a:rPr sz="1900" b="1">
+                <a:solidFill>
+                  <a:srgbClr val="00B0F0"/>
+                </a:solidFill>
+              </a:rPr>
+              <a:t> + </a:t>
+            </a:r>
+            <a:r>
+              <a:rPr lang="en-US" sz="1900" b="1" err="1">
+                <a:solidFill>
+                  <a:srgbClr val="00B0F0"/>
+                </a:solidFill>
+              </a:rPr>
+              <a:t>MixColumns</a:t>
+            </a:r>
+            <a:r>
+              <a:rPr sz="1900" b="1">
+                <a:solidFill>
+                  <a:srgbClr val="00B0F0"/>
+                </a:solidFill>
+              </a:rPr>
+              <a:t> + AddRoundKey in a single cycle, removing the </a:t>
+            </a:r>
+            <a:r>
+              <a:rPr lang="en-US" sz="1900" b="1" err="1">
+                <a:solidFill>
+                  <a:srgbClr val="00B0F0"/>
+                </a:solidFill>
+              </a:rPr>
+              <a:t>mix_columns</a:t>
+            </a:r>
+            <a:r>
+              <a:rPr sz="1900" b="1">
+                <a:solidFill>
+                  <a:srgbClr val="00B0F0"/>
+                </a:solidFill>
+              </a:rPr>
+              <a:t> bottleneck that was 83.8% of software runtime.</a:t>
             </a:r>
           </a:p>
         </p:txBody>
@@ -35202,9 +36702,27 @@
                 <a:tableStyleId>{5C22544A-7EE6-4342-B048-85BDC9FD1C3A}</a:tableStyleId>
               </a:tblPr>
               <a:tblGrid>
-                <a:gridCol w="4937760"/>
-                <a:gridCol w="2194560"/>
-                <a:gridCol w="2468880"/>
+                <a:gridCol w="4937760">
+                  <a:extLst>
+                    <a:ext uri="{9D8B030D-6E8A-4147-A177-3AD203B41FA5}">
+                      <a16:colId xmlns:a16="http://schemas.microsoft.com/office/drawing/2014/main" val="20000"/>
+                    </a:ext>
+                  </a:extLst>
+                </a:gridCol>
+                <a:gridCol w="2194560">
+                  <a:extLst>
+                    <a:ext uri="{9D8B030D-6E8A-4147-A177-3AD203B41FA5}">
+                      <a16:colId xmlns:a16="http://schemas.microsoft.com/office/drawing/2014/main" val="20001"/>
+                    </a:ext>
+                  </a:extLst>
+                </a:gridCol>
+                <a:gridCol w="2468880">
+                  <a:extLst>
+                    <a:ext uri="{9D8B030D-6E8A-4147-A177-3AD203B41FA5}">
+                      <a16:colId xmlns:a16="http://schemas.microsoft.com/office/drawing/2014/main" val="20002"/>
+                    </a:ext>
+                  </a:extLst>
+                </a:gridCol>
               </a:tblGrid>
               <a:tr h="487680">
                 <a:tc>
@@ -35258,6 +36776,11 @@
                   </a:txBody>
                   <a:tcPr anchor="ctr"/>
                 </a:tc>
+                <a:extLst>
+                  <a:ext uri="{0D108BD9-81ED-4DB2-BD59-A6C34878D82A}">
+                    <a16:rowId xmlns:a16="http://schemas.microsoft.com/office/drawing/2014/main" val="10000"/>
+                  </a:ext>
+                </a:extLst>
               </a:tr>
               <a:tr h="487680">
                 <a:tc>
@@ -35299,6 +36822,11 @@
                   </a:txBody>
                   <a:tcPr anchor="ctr"/>
                 </a:tc>
+                <a:extLst>
+                  <a:ext uri="{0D108BD9-81ED-4DB2-BD59-A6C34878D82A}">
+                    <a16:rowId xmlns:a16="http://schemas.microsoft.com/office/drawing/2014/main" val="10001"/>
+                  </a:ext>
+                </a:extLst>
               </a:tr>
               <a:tr h="487680">
                 <a:tc>
@@ -35333,7 +36861,7 @@
                     <a:lstStyle/>
                     <a:p>
                       <a:r>
-                        <a:rPr sz="1700" b="0">
+                        <a:rPr sz="1700">
                           <a:solidFill>
                             <a:srgbClr val="187A3B"/>
                           </a:solidFill>
@@ -35344,6 +36872,11 @@
                   </a:txBody>
                   <a:tcPr anchor="ctr"/>
                 </a:tc>
+                <a:extLst>
+                  <a:ext uri="{0D108BD9-81ED-4DB2-BD59-A6C34878D82A}">
+                    <a16:rowId xmlns:a16="http://schemas.microsoft.com/office/drawing/2014/main" val="10002"/>
+                  </a:ext>
+                </a:extLst>
               </a:tr>
             </a:tbl>
           </a:graphicData>
@@ -35358,7 +36891,7 @@
         <p:spPr>
           <a:xfrm>
             <a:off x="1280160" y="4389120"/>
-            <a:ext cx="9692640" cy="822960"/>
+            <a:ext cx="9692640" cy="523220"/>
           </a:xfrm>
           <a:prstGeom prst="rect">
             <a:avLst/>
@@ -35377,7 +36910,23 @@
                   <a:srgbClr val="555555"/>
                 </a:solidFill>
               </a:rPr>
-              <a:t>The looped hardware version (6,260) is the starting point for the later optimisations: custom loop-unroll pass → 4,800, parallel DOM S-box → 4,104 (covered on the compiler and RTL slides).</a:t>
+              <a:t>The looped hardware version (6,260) is the starting point for the later </a:t>
+            </a:r>
+            <a:r>
+              <a:rPr lang="en-US" sz="1400" i="1" err="1">
+                <a:solidFill>
+                  <a:srgbClr val="555555"/>
+                </a:solidFill>
+              </a:rPr>
+              <a:t>optimisations</a:t>
+            </a:r>
+            <a:r>
+              <a:rPr sz="1400" i="1">
+                <a:solidFill>
+                  <a:srgbClr val="555555"/>
+                </a:solidFill>
+              </a:rPr>
+              <a:t>: custom loop-unroll pass → 4,800, parallel DOM S-box → 4,104 (covered on the compiler and RTL slides).</a:t>
             </a:r>
           </a:p>
         </p:txBody>
@@ -35385,7 +36934,7 @@
     </p:spTree>
     <p:extLst>
       <p:ext uri="{BB962C8B-B14F-4D97-AF65-F5344CB8AC3E}">
-        <p14:creationId xmlns:p14="http://schemas.microsoft.com/office/powerpoint/2010/main" val="2961349116"/>
+        <p14:creationId xmlns:p14="http://schemas.microsoft.com/office/powerpoint/2010/main" val="1002573337"/>
       </p:ext>
     </p:extLst>
   </p:cSld>
@@ -36075,6 +37624,27 @@
 
 <file path=customXml/item1.xml><?xml version="1.0" encoding="utf-8"?>
 <?mso-contentType ?>
+<FormTemplates xmlns="http://schemas.microsoft.com/sharepoint/v3/contenttype/forms">
+  <Display>DocumentLibraryForm</Display>
+  <Edit>DocumentLibraryForm</Edit>
+  <New>DocumentLibraryForm</New>
+</FormTemplates>
+</file>
+
+<file path=customXml/item2.xml><?xml version="1.0" encoding="utf-8"?>
+<p:properties xmlns:p="http://schemas.microsoft.com/office/2006/metadata/properties" xmlns:xsi="http://www.w3.org/2001/XMLSchema-instance" xmlns:pc="http://schemas.microsoft.com/office/infopath/2007/PartnerControls">
+  <documentManagement>
+    <_dlc_DocId xmlns="625af3c4-51f1-4017-80ca-c537fc85ab22">KTYWQER7VAYA-428015617-38</_dlc_DocId>
+    <_dlc_DocIdUrl xmlns="625af3c4-51f1-4017-80ca-c537fc85ab22">
+      <Url>https://tud365.sharepoint.com/sites/Assets/_layouts/15/DocIdRedir.aspx?ID=KTYWQER7VAYA-428015617-38</Url>
+      <Description>KTYWQER7VAYA-428015617-38</Description>
+    </_dlc_DocIdUrl>
+  </documentManagement>
+</p:properties>
+</file>
+
+<file path=customXml/item3.xml><?xml version="1.0" encoding="utf-8"?>
+<?mso-contentType ?>
 <spe:Receivers xmlns:spe="http://schemas.microsoft.com/sharepoint/events">
   <Receiver>
     <Name>Document ID Generator</Name>
@@ -36123,19 +37693,7 @@
 </spe:Receivers>
 </file>
 
-<file path=customXml/item2.xml><?xml version="1.0" encoding="utf-8"?>
-<p:properties xmlns:p="http://schemas.microsoft.com/office/2006/metadata/properties" xmlns:xsi="http://www.w3.org/2001/XMLSchema-instance" xmlns:pc="http://schemas.microsoft.com/office/infopath/2007/PartnerControls">
-  <documentManagement>
-    <_dlc_DocId xmlns="625af3c4-51f1-4017-80ca-c537fc85ab22">KTYWQER7VAYA-428015617-38</_dlc_DocId>
-    <_dlc_DocIdUrl xmlns="625af3c4-51f1-4017-80ca-c537fc85ab22">
-      <Url>https://tud365.sharepoint.com/sites/Assets/_layouts/15/DocIdRedir.aspx?ID=KTYWQER7VAYA-428015617-38</Url>
-      <Description>KTYWQER7VAYA-428015617-38</Description>
-    </_dlc_DocIdUrl>
-  </documentManagement>
-</p:properties>
-</file>
-
-<file path=customXml/item3.xml><?xml version="1.0" encoding="utf-8"?>
+<file path=customXml/item4.xml><?xml version="1.0" encoding="utf-8"?>
 <ct:contentTypeSchema xmlns:ct="http://schemas.microsoft.com/office/2006/metadata/contentType" xmlns:ma="http://schemas.microsoft.com/office/2006/metadata/properties/metaAttributes" ct:_="" ma:_="" ma:contentTypeName="Document" ma:contentTypeID="0x0101006F8CCD81E9B8EC4AA9F37098270FA7B2" ma:contentTypeVersion="4" ma:contentTypeDescription="Create a new document." ma:contentTypeScope="" ma:versionID="6bbf2edf66af0f3f03e807519ceb9393">
   <xsd:schema xmlns:xsd="http://www.w3.org/2001/XMLSchema" xmlns:xs="http://www.w3.org/2001/XMLSchema" xmlns:p="http://schemas.microsoft.com/office/2006/metadata/properties" xmlns:ns2="5495e808-e183-4a7a-9118-4955941b014f" xmlns:ns3="625af3c4-51f1-4017-80ca-c537fc85ab22" targetNamespace="http://schemas.microsoft.com/office/2006/metadata/properties" ma:root="true" ma:fieldsID="4c9c9b65373b7a7f52a6bb5343aaef4e" ns2:_="" ns3:_="">
     <xsd:import namespace="5495e808-e183-4a7a-9118-4955941b014f"/>
@@ -36309,19 +37867,10 @@
 </ct:contentTypeSchema>
 </file>
 
-<file path=customXml/item4.xml><?xml version="1.0" encoding="utf-8"?>
-<?mso-contentType ?>
-<FormTemplates xmlns="http://schemas.microsoft.com/sharepoint/v3/contenttype/forms">
-  <Display>DocumentLibraryForm</Display>
-  <Edit>DocumentLibraryForm</Edit>
-  <New>DocumentLibraryForm</New>
-</FormTemplates>
-</file>
-
 <file path=customXml/itemProps1.xml><?xml version="1.0" encoding="utf-8"?>
-<ds:datastoreItem xmlns:ds="http://schemas.openxmlformats.org/officeDocument/2006/customXml" ds:itemID="{4E874D38-23B4-427A-9E54-F41D61416655}">
+<ds:datastoreItem xmlns:ds="http://schemas.openxmlformats.org/officeDocument/2006/customXml" ds:itemID="{FB1BE96A-004D-462B-9683-1ED8D109FF11}">
   <ds:schemaRefs>
-    <ds:schemaRef ds:uri="http://schemas.microsoft.com/sharepoint/events"/>
+    <ds:schemaRef ds:uri="http://schemas.microsoft.com/sharepoint/v3/contenttype/forms"/>
   </ds:schemaRefs>
 </ds:datastoreItem>
 </file>
@@ -36337,6 +37886,14 @@
 </file>
 
 <file path=customXml/itemProps3.xml><?xml version="1.0" encoding="utf-8"?>
+<ds:datastoreItem xmlns:ds="http://schemas.openxmlformats.org/officeDocument/2006/customXml" ds:itemID="{4E874D38-23B4-427A-9E54-F41D61416655}">
+  <ds:schemaRefs>
+    <ds:schemaRef ds:uri="http://schemas.microsoft.com/sharepoint/events"/>
+  </ds:schemaRefs>
+</ds:datastoreItem>
+</file>
+
+<file path=customXml/itemProps4.xml><?xml version="1.0" encoding="utf-8"?>
 <ds:datastoreItem xmlns:ds="http://schemas.openxmlformats.org/officeDocument/2006/customXml" ds:itemID="{77E11486-FE4C-4313-9044-8BC6DF9B2B6F}">
   <ds:schemaRefs>
     <ds:schemaRef ds:uri="5495e808-e183-4a7a-9118-4955941b014f"/>
@@ -36353,12 +37910,4 @@
     <ds:schemaRef ds:uri="http://www.w3.org/2001/XMLSchema"/>
   </ds:schemaRefs>
 </ds:datastoreItem>
-</file>
-
-<file path=customXml/itemProps4.xml><?xml version="1.0" encoding="utf-8"?>
-<ds:datastoreItem xmlns:ds="http://schemas.openxmlformats.org/officeDocument/2006/customXml" ds:itemID="{FB1BE96A-004D-462B-9683-1ED8D109FF11}">
-  <ds:schemaRefs>
-    <ds:schemaRef ds:uri="http://schemas.microsoft.com/sharepoint/v3/contenttype/forms"/>
-  </ds:schemaRefs>
-</ds:datastoreItem>
 </file>
--- a/PDP_group24.pptx
+++ b/PDP_group24.pptx
@@ -36339,15 +36339,15 @@
           <p:nvPr/>
         </p:nvPicPr>
         <p:blipFill>
-          <a:blip r:embed="rId2"/>
+          <a:blip r:embed="rId3"/>
           <a:stretch>
             <a:fillRect/>
           </a:stretch>
         </p:blipFill>
         <p:spPr>
           <a:xfrm>
-            <a:off x="1371600" y="3246120"/>
-            <a:ext cx="8778240" cy="2679673"/>
+            <a:off x="1417320" y="3246120"/>
+            <a:ext cx="8778240" cy="2972448"/>
           </a:xfrm>
           <a:prstGeom prst="rect">
             <a:avLst/>

--- a/PDP_group24.pptx
+++ b/PDP_group24.pptx
@@ -17,6 +17,7 @@
     <p:sldId id="294" r:id="rId12"/>
     <p:sldId id="289" r:id="rId13"/>
     <p:sldId id="292" r:id="rId14"/>
+    <p:sldId id="295" r:id="rId37"/>
     <p:sldId id="270" r:id="rId15"/>
     <p:sldId id="278" r:id="rId16"/>
     <p:sldId id="279" r:id="rId17"/>
@@ -26108,6 +26109,164 @@
 </file>
 
 <file path=ppt/slides/slide10.xml><?xml version="1.0" encoding="utf-8"?>
+<p:sld xmlns:a="http://schemas.openxmlformats.org/drawingml/2006/main" xmlns:p="http://schemas.openxmlformats.org/presentationml/2006/main" xmlns:r="http://schemas.openxmlformats.org/officeDocument/2006/relationships">
+  <p:cSld>
+    <p:spTree>
+      <p:nvGrpSpPr>
+        <p:cNvPr id="1" name=""/>
+        <p:cNvGrpSpPr/>
+        <p:nvPr/>
+      </p:nvGrpSpPr>
+      <p:grpSpPr/>
+      <p:sp>
+        <p:nvSpPr>
+          <p:cNvPr id="2" name="Title 1"/>
+          <p:cNvSpPr>
+            <a:spLocks noGrp="1"/>
+          </p:cNvSpPr>
+          <p:nvPr>
+            <p:ph type="title"/>
+          </p:nvPr>
+        </p:nvSpPr>
+        <p:spPr/>
+        <p:txBody>
+          <a:bodyPr/>
+          <a:lstStyle/>
+          <a:p>
+            <a:r>
+              <a:rPr sz="3400">
+                <a:latin typeface="Arial"/>
+              </a:rPr>
+              <a:t>Optimization Overview</a:t>
+            </a:r>
+          </a:p>
+        </p:txBody>
+      </p:sp>
+      <p:pic>
+        <p:nvPicPr>
+          <p:cNvPr id="3" name="Picture 2" descr="fig_optim_overview.png"/>
+          <p:cNvPicPr>
+            <a:picLocks noChangeAspect="1"/>
+          </p:cNvPicPr>
+          <p:nvPr/>
+        </p:nvPicPr>
+        <p:blipFill>
+          <a:blip r:embed="rId2"/>
+          <a:stretch>
+            <a:fillRect/>
+          </a:stretch>
+        </p:blipFill>
+        <p:spPr>
+          <a:xfrm>
+            <a:off x="609584" y="1417320"/>
+            <a:ext cx="10972800" cy="4955458"/>
+          </a:xfrm>
+          <a:prstGeom prst="rect">
+            <a:avLst/>
+          </a:prstGeom>
+        </p:spPr>
+      </p:pic>
+      <p:sp>
+        <p:nvSpPr>
+          <p:cNvPr id="5" name="Tijdelijke aanduiding voor datum 4">
+            <a:extLst>
+              <a:ext uri="{FF2B5EF4-FFF2-40B4-BE49-F238E27FC236}">
+                <a16:creationId xmlns:a16="http://schemas.microsoft.com/office/drawing/2014/main" id="{ED760BC8-78EA-168B-CF54-0989F7249238}"/>
+              </a:ext>
+            </a:extLst>
+          </p:cNvPr>
+          <p:cNvSpPr>
+            <a:spLocks noGrp="1"/>
+          </p:cNvSpPr>
+          <p:nvPr>
+            <p:ph type="dt" sz="half" idx="18"/>
+          </p:nvPr>
+        </p:nvSpPr>
+        <p:spPr>
+          <a:xfrm>
+            <a:off x="10146569" y="6405669"/>
+            <a:ext cx="766235" cy="184666"/>
+          </a:xfrm>
+        </p:spPr>
+        <p:txBody>
+          <a:bodyPr wrap="none" anchor="ctr">
+            <a:normAutofit/>
+          </a:bodyPr>
+          <a:lstStyle/>
+          <a:p>
+            <a:pPr>
+              <a:spcAft>
+                <a:spcPts val="600"/>
+              </a:spcAft>
+            </a:pPr>
+            <a:fld id="{087A43E6-197A-4232-A775-7017A41F9758}" type="datetime1">
+              <a:rPr lang="nl-NL" smtClean="0"/>
+              <a:pPr>
+                <a:spcAft>
+                  <a:spcPts val="600"/>
+                </a:spcAft>
+              </a:pPr>
+              <a:t>12-6-2026</a:t>
+            </a:fld>
+            <a:endParaRPr lang="en-GB"/>
+          </a:p>
+        </p:txBody>
+      </p:sp>
+      <p:sp>
+        <p:nvSpPr>
+          <p:cNvPr id="16" name="Tijdelijke aanduiding voor dianummer 15">
+            <a:extLst>
+              <a:ext uri="{FF2B5EF4-FFF2-40B4-BE49-F238E27FC236}">
+                <a16:creationId xmlns:a16="http://schemas.microsoft.com/office/drawing/2014/main" id="{0D4B5DC5-9BB6-521C-CBF2-B1563E585FA7}"/>
+              </a:ext>
+            </a:extLst>
+          </p:cNvPr>
+          <p:cNvSpPr>
+            <a:spLocks noGrp="1"/>
+          </p:cNvSpPr>
+          <p:nvPr>
+            <p:ph type="sldNum" sz="quarter" idx="20"/>
+          </p:nvPr>
+        </p:nvSpPr>
+        <p:spPr>
+          <a:xfrm>
+            <a:off x="11178464" y="6405669"/>
+            <a:ext cx="291298" cy="184666"/>
+          </a:xfrm>
+        </p:spPr>
+        <p:txBody>
+          <a:bodyPr wrap="none" anchor="ctr">
+            <a:normAutofit/>
+          </a:bodyPr>
+          <a:lstStyle/>
+          <a:p>
+            <a:pPr>
+              <a:spcAft>
+                <a:spcPts val="600"/>
+              </a:spcAft>
+            </a:pPr>
+            <a:fld id="{9E843DB9-9987-4157-AB9C-CEA8D7D910BB}" type="slidenum">
+              <a:rPr lang="en-GB" smtClean="0"/>
+              <a:pPr>
+                <a:spcAft>
+                  <a:spcPts val="600"/>
+                </a:spcAft>
+              </a:pPr>
+              <a:t>10</a:t>
+            </a:fld>
+            <a:endParaRPr lang="en-GB"/>
+          </a:p>
+        </p:txBody>
+      </p:sp>
+    </p:spTree>
+  </p:cSld>
+  <p:clrMapOvr>
+    <a:masterClrMapping/>
+  </p:clrMapOvr>
+</p:sld>
+</file>
+
+<file path=ppt/slides/slide11.xml><?xml version="1.0" encoding="utf-8"?>
 <p:sld xmlns:a="http://schemas.openxmlformats.org/drawingml/2006/main" xmlns:r="http://schemas.openxmlformats.org/officeDocument/2006/relationships" xmlns:p="http://schemas.openxmlformats.org/presentationml/2006/main">
   <p:cSld>
     <p:spTree>
@@ -26458,7 +26617,7 @@
 </p:sld>
 </file>
 
-<file path=ppt/slides/slide11.xml><?xml version="1.0" encoding="utf-8"?>
+<file path=ppt/slides/slide12.xml><?xml version="1.0" encoding="utf-8"?>
 <p:sld xmlns:a="http://schemas.openxmlformats.org/drawingml/2006/main" xmlns:r="http://schemas.openxmlformats.org/officeDocument/2006/relationships" xmlns:p="http://schemas.openxmlformats.org/presentationml/2006/main">
   <p:cSld>
     <p:spTree>
@@ -26742,7 +26901,7 @@
 </p:sld>
 </file>
 
-<file path=ppt/slides/slide12.xml><?xml version="1.0" encoding="utf-8"?>
+<file path=ppt/slides/slide13.xml><?xml version="1.0" encoding="utf-8"?>
 <p:sld xmlns:a="http://schemas.openxmlformats.org/drawingml/2006/main" xmlns:r="http://schemas.openxmlformats.org/officeDocument/2006/relationships" xmlns:p="http://schemas.openxmlformats.org/presentationml/2006/main">
   <p:cSld>
     <p:spTree>
@@ -27010,7 +27169,7 @@
 </p:sld>
 </file>
 
-<file path=ppt/slides/slide13.xml><?xml version="1.0" encoding="utf-8"?>
+<file path=ppt/slides/slide14.xml><?xml version="1.0" encoding="utf-8"?>
 <p:sld xmlns:a="http://schemas.openxmlformats.org/drawingml/2006/main" xmlns:r="http://schemas.openxmlformats.org/officeDocument/2006/relationships" xmlns:p="http://schemas.openxmlformats.org/presentationml/2006/main">
   <p:cSld>
     <p:spTree>
@@ -27820,7 +27979,7 @@
 </p:sld>
 </file>
 
-<file path=ppt/slides/slide14.xml><?xml version="1.0" encoding="utf-8"?>
+<file path=ppt/slides/slide15.xml><?xml version="1.0" encoding="utf-8"?>
 <p:sld xmlns:a="http://schemas.openxmlformats.org/drawingml/2006/main" xmlns:r="http://schemas.openxmlformats.org/officeDocument/2006/relationships" xmlns:p="http://schemas.openxmlformats.org/presentationml/2006/main">
   <p:cSld>
     <p:spTree>
@@ -28131,7 +28290,7 @@
 </p:sld>
 </file>
 
-<file path=ppt/slides/slide15.xml><?xml version="1.0" encoding="utf-8"?>
+<file path=ppt/slides/slide16.xml><?xml version="1.0" encoding="utf-8"?>
 <p:sld xmlns:a="http://schemas.openxmlformats.org/drawingml/2006/main" xmlns:r="http://schemas.openxmlformats.org/officeDocument/2006/relationships" xmlns:p="http://schemas.openxmlformats.org/presentationml/2006/main">
   <p:cSld>
     <p:spTree>
@@ -28420,7 +28579,7 @@
 </p:sld>
 </file>
 
-<file path=ppt/slides/slide16.xml><?xml version="1.0" encoding="utf-8"?>
+<file path=ppt/slides/slide17.xml><?xml version="1.0" encoding="utf-8"?>
 <p:sld xmlns:a="http://schemas.openxmlformats.org/drawingml/2006/main" xmlns:r="http://schemas.openxmlformats.org/officeDocument/2006/relationships" xmlns:p="http://schemas.openxmlformats.org/presentationml/2006/main">
   <p:cSld>
     <p:spTree>
@@ -29777,7 +29936,7 @@
 </p:sld>
 </file>
 
-<file path=ppt/slides/slide17.xml><?xml version="1.0" encoding="utf-8"?>
+<file path=ppt/slides/slide18.xml><?xml version="1.0" encoding="utf-8"?>
 <p:sld xmlns:a="http://schemas.openxmlformats.org/drawingml/2006/main" xmlns:r="http://schemas.openxmlformats.org/officeDocument/2006/relationships" xmlns:p="http://schemas.openxmlformats.org/presentationml/2006/main">
   <p:cSld>
     <p:spTree>
@@ -29977,7 +30136,7 @@
 </p:sld>
 </file>
 
-<file path=ppt/slides/slide18.xml><?xml version="1.0" encoding="utf-8"?>
+<file path=ppt/slides/slide19.xml><?xml version="1.0" encoding="utf-8"?>
 <p:sld xmlns:a="http://schemas.openxmlformats.org/drawingml/2006/main" xmlns:r="http://schemas.openxmlformats.org/officeDocument/2006/relationships" xmlns:p="http://schemas.openxmlformats.org/presentationml/2006/main">
   <p:cSld>
     <p:spTree>
@@ -30414,465 +30573,6 @@
     <p:extLst>
       <p:ext uri="{BB962C8B-B14F-4D97-AF65-F5344CB8AC3E}">
         <p14:creationId xmlns:p14="http://schemas.microsoft.com/office/powerpoint/2010/main" val="3661217696"/>
-      </p:ext>
-    </p:extLst>
-  </p:cSld>
-  <p:clrMapOvr>
-    <a:masterClrMapping/>
-  </p:clrMapOvr>
-</p:sld>
-</file>
-
-<file path=ppt/slides/slide19.xml><?xml version="1.0" encoding="utf-8"?>
-<p:sld xmlns:a="http://schemas.openxmlformats.org/drawingml/2006/main" xmlns:r="http://schemas.openxmlformats.org/officeDocument/2006/relationships" xmlns:p="http://schemas.openxmlformats.org/presentationml/2006/main">
-  <p:cSld>
-    <p:spTree>
-      <p:nvGrpSpPr>
-        <p:cNvPr id="1" name="">
-          <a:extLst>
-            <a:ext uri="{FF2B5EF4-FFF2-40B4-BE49-F238E27FC236}">
-              <a16:creationId xmlns:a16="http://schemas.microsoft.com/office/drawing/2014/main" id="{AA449A5F-9ACF-4945-38C8-0B29C09CF5F4}"/>
-            </a:ext>
-          </a:extLst>
-        </p:cNvPr>
-        <p:cNvGrpSpPr/>
-        <p:nvPr/>
-      </p:nvGrpSpPr>
-      <p:grpSpPr>
-        <a:xfrm>
-          <a:off x="0" y="0"/>
-          <a:ext cx="0" cy="0"/>
-          <a:chOff x="0" y="0"/>
-          <a:chExt cx="0" cy="0"/>
-        </a:xfrm>
-      </p:grpSpPr>
-      <p:sp>
-        <p:nvSpPr>
-          <p:cNvPr id="2" name="Title 1">
-            <a:extLst>
-              <a:ext uri="{FF2B5EF4-FFF2-40B4-BE49-F238E27FC236}">
-                <a16:creationId xmlns:a16="http://schemas.microsoft.com/office/drawing/2014/main" id="{2B5704F9-C225-18AC-86FA-EF8E1E7C6D0D}"/>
-              </a:ext>
-            </a:extLst>
-          </p:cNvPr>
-          <p:cNvSpPr>
-            <a:spLocks noGrp="1"/>
-          </p:cNvSpPr>
-          <p:nvPr>
-            <p:ph type="title"/>
-          </p:nvPr>
-        </p:nvSpPr>
-        <p:spPr>
-          <a:xfrm>
-            <a:off x="722376" y="658368"/>
-            <a:ext cx="10744200" cy="640080"/>
-          </a:xfrm>
-        </p:spPr>
-        <p:txBody>
-          <a:bodyPr/>
-          <a:lstStyle/>
-          <a:p>
-            <a:r>
-              <a:rPr lang="en-US" sz="2800"/>
-              <a:t>Hardware Validation: CW305 Setup</a:t>
-            </a:r>
-            <a:endParaRPr lang="en-US" sz="2800" b="1">
-              <a:cs typeface="Arial"/>
-            </a:endParaRPr>
-          </a:p>
-        </p:txBody>
-      </p:sp>
-      <p:sp>
-        <p:nvSpPr>
-          <p:cNvPr id="3" name="TextBox 2">
-            <a:extLst>
-              <a:ext uri="{FF2B5EF4-FFF2-40B4-BE49-F238E27FC236}">
-                <a16:creationId xmlns:a16="http://schemas.microsoft.com/office/drawing/2014/main" id="{EAD24B97-AF18-D760-3805-23A4FC381519}"/>
-              </a:ext>
-            </a:extLst>
-          </p:cNvPr>
-          <p:cNvSpPr txBox="1"/>
-          <p:nvPr/>
-        </p:nvSpPr>
-        <p:spPr>
-          <a:xfrm>
-            <a:off x="684830" y="1786890"/>
-            <a:ext cx="10745413" cy="2301336"/>
-          </a:xfrm>
-          <a:prstGeom prst="rect">
-            <a:avLst/>
-          </a:prstGeom>
-          <a:noFill/>
-        </p:spPr>
-        <p:txBody>
-          <a:bodyPr wrap="square" lIns="91440" tIns="45720" rIns="91440" bIns="45720" anchor="t">
-            <a:spAutoFit/>
-          </a:bodyPr>
-          <a:lstStyle/>
-          <a:p>
-            <a:pPr>
-              <a:lnSpc>
-                <a:spcPct val="105000"/>
-              </a:lnSpc>
-              <a:spcAft>
-                <a:spcPts val="1200"/>
-              </a:spcAft>
-            </a:pPr>
-            <a:r>
-              <a:rPr lang="en-US" sz="2000" b="1"/>
-              <a:t>Hardware setup</a:t>
-            </a:r>
-            <a:endParaRPr lang="en-US">
-              <a:cs typeface="Arial"/>
-            </a:endParaRPr>
-          </a:p>
-          <a:p>
-            <a:pPr marL="342900" indent="-342900">
-              <a:lnSpc>
-                <a:spcPct val="105000"/>
-              </a:lnSpc>
-              <a:spcAft>
-                <a:spcPts val="1200"/>
-              </a:spcAft>
-              <a:buFont typeface="Arial"/>
-              <a:buChar char="•"/>
-            </a:pPr>
-            <a:r>
-              <a:rPr lang="en-US" sz="2000">
-                <a:solidFill>
-                  <a:srgbClr val="202020"/>
-                </a:solidFill>
-                <a:cs typeface="Arial"/>
-              </a:rPr>
-              <a:t>CW 305 </a:t>
-            </a:r>
-            <a:r>
-              <a:rPr lang="en-US" sz="2000" err="1">
-                <a:solidFill>
-                  <a:srgbClr val="202020"/>
-                </a:solidFill>
-                <a:cs typeface="Arial"/>
-              </a:rPr>
-              <a:t>Artix</a:t>
-            </a:r>
-            <a:r>
-              <a:rPr lang="en-US" sz="2000">
-                <a:solidFill>
-                  <a:srgbClr val="202020"/>
-                </a:solidFill>
-                <a:cs typeface="Arial"/>
-              </a:rPr>
-              <a:t>-7 100T with CV32E40P RISC-V soft-core</a:t>
-            </a:r>
-          </a:p>
-          <a:p>
-            <a:pPr marL="342900" indent="-342900">
-              <a:lnSpc>
-                <a:spcPct val="105000"/>
-              </a:lnSpc>
-              <a:spcAft>
-                <a:spcPts val="1200"/>
-              </a:spcAft>
-              <a:buFont typeface="Arial"/>
-              <a:buChar char="•"/>
-            </a:pPr>
-            <a:r>
-              <a:rPr lang="en-US" sz="2000" err="1">
-                <a:solidFill>
-                  <a:srgbClr val="202020"/>
-                </a:solidFill>
-                <a:cs typeface="Arial"/>
-              </a:rPr>
-              <a:t>ChipWhisperer</a:t>
-            </a:r>
-            <a:r>
-              <a:rPr lang="en-US" sz="2000">
-                <a:solidFill>
-                  <a:srgbClr val="202020"/>
-                </a:solidFill>
-                <a:cs typeface="Arial"/>
-              </a:rPr>
-              <a:t>-Lite scope, 50 MHz clock, ADC at 200 MHz</a:t>
-            </a:r>
-          </a:p>
-          <a:p>
-            <a:pPr marL="342900" indent="-342900">
-              <a:lnSpc>
-                <a:spcPct val="105000"/>
-              </a:lnSpc>
-              <a:spcAft>
-                <a:spcPts val="1200"/>
-              </a:spcAft>
-              <a:buFont typeface="Arial"/>
-              <a:buChar char="•"/>
-            </a:pPr>
-            <a:r>
-              <a:rPr lang="en-US" sz="2000">
-                <a:solidFill>
-                  <a:srgbClr val="202020"/>
-                </a:solidFill>
-                <a:cs typeface="Arial"/>
-              </a:rPr>
-              <a:t>Gain:30 dB</a:t>
-            </a:r>
-          </a:p>
-          <a:p>
-            <a:pPr marL="342900" indent="-342900">
-              <a:lnSpc>
-                <a:spcPct val="105000"/>
-              </a:lnSpc>
-              <a:spcAft>
-                <a:spcPts val="1200"/>
-              </a:spcAft>
-              <a:buFont typeface="Arial"/>
-              <a:buChar char="•"/>
-            </a:pPr>
-            <a:r>
-              <a:rPr lang="en-US" sz="2000">
-                <a:solidFill>
-                  <a:srgbClr val="202020"/>
-                </a:solidFill>
-                <a:cs typeface="Arial"/>
-              </a:rPr>
-              <a:t>Three bitstreams tested: AES_100t (reference), Baseline RI5CY, DOM-protected RI5CY</a:t>
-            </a:r>
-            <a:endParaRPr lang="en-US"/>
-          </a:p>
-        </p:txBody>
-      </p:sp>
-      <p:sp>
-        <p:nvSpPr>
-          <p:cNvPr id="4" name="TextBox 3">
-            <a:extLst>
-              <a:ext uri="{FF2B5EF4-FFF2-40B4-BE49-F238E27FC236}">
-                <a16:creationId xmlns:a16="http://schemas.microsoft.com/office/drawing/2014/main" id="{EA9887F9-8596-0AD4-8485-D5E6BC47CEDC}"/>
-              </a:ext>
-            </a:extLst>
-          </p:cNvPr>
-          <p:cNvSpPr txBox="1"/>
-          <p:nvPr/>
-        </p:nvSpPr>
-        <p:spPr>
-          <a:xfrm>
-            <a:off x="725939" y="1135327"/>
-            <a:ext cx="10739004" cy="914096"/>
-          </a:xfrm>
-          <a:prstGeom prst="rect">
-            <a:avLst/>
-          </a:prstGeom>
-          <a:noFill/>
-        </p:spPr>
-        <p:txBody>
-          <a:bodyPr rot="0" spcFirstLastPara="0" vertOverflow="overflow" horzOverflow="overflow" vert="horz" wrap="square" lIns="0" tIns="0" rIns="0" bIns="0" numCol="1" spcCol="0" rtlCol="0" fromWordArt="0" anchor="t" anchorCtr="0" forceAA="0" compatLnSpc="1">
-            <a:prstTxWarp prst="textNoShape">
-              <a:avLst/>
-            </a:prstTxWarp>
-            <a:spAutoFit/>
-          </a:bodyPr>
-          <a:lstStyle/>
-          <a:p>
-            <a:r>
-              <a:rPr lang="en-US" sz="2000" b="1">
-                <a:solidFill>
-                  <a:srgbClr val="00B0F0"/>
-                </a:solidFill>
-              </a:rPr>
-              <a:t>From simulation to silicon - Validation on CW305 Artix-7 FPGA with CV32E40P RISC-V soft core</a:t>
-            </a:r>
-            <a:endParaRPr lang="en-US" sz="2000" b="1">
-              <a:solidFill>
-                <a:srgbClr val="00B0F0"/>
-              </a:solidFill>
-              <a:cs typeface="Arial"/>
-            </a:endParaRPr>
-          </a:p>
-          <a:p>
-            <a:pPr algn="l">
-              <a:lnSpc>
-                <a:spcPct val="90000"/>
-              </a:lnSpc>
-              <a:spcBef>
-                <a:spcPts val="600"/>
-              </a:spcBef>
-              <a:spcAft>
-                <a:spcPts val="600"/>
-              </a:spcAft>
-            </a:pPr>
-            <a:endParaRPr lang="en-US" sz="1600" err="1"/>
-          </a:p>
-        </p:txBody>
-      </p:sp>
-      <p:sp>
-        <p:nvSpPr>
-          <p:cNvPr id="5" name="TextBox 4">
-            <a:extLst>
-              <a:ext uri="{FF2B5EF4-FFF2-40B4-BE49-F238E27FC236}">
-                <a16:creationId xmlns:a16="http://schemas.microsoft.com/office/drawing/2014/main" id="{E4B0D05B-BCB8-D440-FD62-7757D84DB4CA}"/>
-              </a:ext>
-            </a:extLst>
-          </p:cNvPr>
-          <p:cNvSpPr txBox="1"/>
-          <p:nvPr/>
-        </p:nvSpPr>
-        <p:spPr>
-          <a:xfrm>
-            <a:off x="723900" y="4181475"/>
-            <a:ext cx="10668000" cy="2329869"/>
-          </a:xfrm>
-          <a:prstGeom prst="rect">
-            <a:avLst/>
-          </a:prstGeom>
-          <a:noFill/>
-        </p:spPr>
-        <p:txBody>
-          <a:bodyPr rot="0" spcFirstLastPara="0" vertOverflow="overflow" horzOverflow="overflow" vert="horz" wrap="square" lIns="0" tIns="0" rIns="0" bIns="0" numCol="1" spcCol="0" rtlCol="0" fromWordArt="0" anchor="t" anchorCtr="0" forceAA="0" compatLnSpc="1">
-            <a:prstTxWarp prst="textNoShape">
-              <a:avLst/>
-            </a:prstTxWarp>
-            <a:spAutoFit/>
-          </a:bodyPr>
-          <a:lstStyle/>
-          <a:p>
-            <a:r>
-              <a:rPr lang="en-US" sz="2000" b="1">
-                <a:latin typeface="Arial"/>
-              </a:rPr>
-              <a:t>Attack Method</a:t>
-            </a:r>
-            <a:endParaRPr lang="en-US">
-              <a:cs typeface="Arial"/>
-            </a:endParaRPr>
-          </a:p>
-          <a:p>
-            <a:pPr marL="285750" indent="-285750">
-              <a:lnSpc>
-                <a:spcPct val="90000"/>
-              </a:lnSpc>
-              <a:spcBef>
-                <a:spcPts val="600"/>
-              </a:spcBef>
-              <a:spcAft>
-                <a:spcPts val="600"/>
-              </a:spcAft>
-              <a:buFont typeface="Arial"/>
-              <a:buChar char="•"/>
-            </a:pPr>
-            <a:r>
-              <a:rPr lang="en-US" sz="2000">
-                <a:cs typeface="Arial" panose="020B0604020202020204"/>
-              </a:rPr>
-              <a:t>CPA: </a:t>
-            </a:r>
-            <a:r>
-              <a:rPr lang="en-US" sz="2000" err="1">
-                <a:cs typeface="Arial" panose="020B0604020202020204"/>
-              </a:rPr>
-              <a:t>sbox_output</a:t>
-            </a:r>
-            <a:r>
-              <a:rPr lang="en-US" sz="2000">
-                <a:cs typeface="Arial" panose="020B0604020202020204"/>
-              </a:rPr>
-              <a:t> leakage model and </a:t>
-            </a:r>
-            <a:r>
-              <a:rPr lang="en-US" sz="2000" err="1">
-                <a:cs typeface="Arial" panose="020B0604020202020204"/>
-              </a:rPr>
-              <a:t>last_round_state_diff</a:t>
-            </a:r>
-            <a:r>
-              <a:rPr lang="en-US" sz="2000">
-                <a:cs typeface="Arial" panose="020B0604020202020204"/>
-              </a:rPr>
-              <a:t> leakage model</a:t>
-            </a:r>
-          </a:p>
-          <a:p>
-            <a:pPr marL="285750" indent="-285750">
-              <a:lnSpc>
-                <a:spcPct val="90000"/>
-              </a:lnSpc>
-              <a:spcBef>
-                <a:spcPts val="600"/>
-              </a:spcBef>
-              <a:spcAft>
-                <a:spcPts val="600"/>
-              </a:spcAft>
-              <a:buFont typeface="Arial"/>
-              <a:buChar char="•"/>
-            </a:pPr>
-            <a:r>
-              <a:rPr lang="en-US" sz="2000">
-                <a:cs typeface="Arial" panose="020B0604020202020204"/>
-              </a:rPr>
-              <a:t>Window: samples 0-80 (round 1 S-Box)</a:t>
-            </a:r>
-          </a:p>
-          <a:p>
-            <a:pPr marL="285750" indent="-285750">
-              <a:lnSpc>
-                <a:spcPct val="90000"/>
-              </a:lnSpc>
-              <a:spcBef>
-                <a:spcPts val="600"/>
-              </a:spcBef>
-              <a:spcAft>
-                <a:spcPts val="600"/>
-              </a:spcAft>
-              <a:buFont typeface="Arial"/>
-              <a:buChar char="•"/>
-            </a:pPr>
-            <a:r>
-              <a:rPr lang="en-US" sz="2000">
-                <a:cs typeface="Arial" panose="020B0604020202020204"/>
-              </a:rPr>
-              <a:t>TVLA: Welch t-test, fixed vs random PT</a:t>
-            </a:r>
-          </a:p>
-          <a:p>
-            <a:pPr marL="285750" indent="-285750">
-              <a:lnSpc>
-                <a:spcPct val="90000"/>
-              </a:lnSpc>
-              <a:spcBef>
-                <a:spcPts val="600"/>
-              </a:spcBef>
-              <a:spcAft>
-                <a:spcPts val="600"/>
-              </a:spcAft>
-              <a:buFont typeface="Arial"/>
-              <a:buChar char="•"/>
-            </a:pPr>
-            <a:r>
-              <a:rPr lang="en-US" sz="2000">
-                <a:cs typeface="Arial" panose="020B0604020202020204"/>
-              </a:rPr>
-              <a:t>Threshold: |t| &gt; 4.5 </a:t>
-            </a:r>
-          </a:p>
-          <a:p>
-            <a:pPr>
-              <a:lnSpc>
-                <a:spcPct val="90000"/>
-              </a:lnSpc>
-              <a:spcBef>
-                <a:spcPts val="600"/>
-              </a:spcBef>
-              <a:spcAft>
-                <a:spcPts val="600"/>
-              </a:spcAft>
-            </a:pPr>
-            <a:endParaRPr lang="en-US" sz="1600">
-              <a:cs typeface="Arial"/>
-            </a:endParaRPr>
-          </a:p>
-        </p:txBody>
-      </p:sp>
-    </p:spTree>
-    <p:extLst>
-      <p:ext uri="{BB962C8B-B14F-4D97-AF65-F5344CB8AC3E}">
-        <p14:creationId xmlns:p14="http://schemas.microsoft.com/office/powerpoint/2010/main" val="2476092217"/>
       </p:ext>
     </p:extLst>
   </p:cSld>
@@ -31350,6 +31050,465 @@
 </file>
 
 <file path=ppt/slides/slide20.xml><?xml version="1.0" encoding="utf-8"?>
+<p:sld xmlns:a="http://schemas.openxmlformats.org/drawingml/2006/main" xmlns:r="http://schemas.openxmlformats.org/officeDocument/2006/relationships" xmlns:p="http://schemas.openxmlformats.org/presentationml/2006/main">
+  <p:cSld>
+    <p:spTree>
+      <p:nvGrpSpPr>
+        <p:cNvPr id="1" name="">
+          <a:extLst>
+            <a:ext uri="{FF2B5EF4-FFF2-40B4-BE49-F238E27FC236}">
+              <a16:creationId xmlns:a16="http://schemas.microsoft.com/office/drawing/2014/main" id="{AA449A5F-9ACF-4945-38C8-0B29C09CF5F4}"/>
+            </a:ext>
+          </a:extLst>
+        </p:cNvPr>
+        <p:cNvGrpSpPr/>
+        <p:nvPr/>
+      </p:nvGrpSpPr>
+      <p:grpSpPr>
+        <a:xfrm>
+          <a:off x="0" y="0"/>
+          <a:ext cx="0" cy="0"/>
+          <a:chOff x="0" y="0"/>
+          <a:chExt cx="0" cy="0"/>
+        </a:xfrm>
+      </p:grpSpPr>
+      <p:sp>
+        <p:nvSpPr>
+          <p:cNvPr id="2" name="Title 1">
+            <a:extLst>
+              <a:ext uri="{FF2B5EF4-FFF2-40B4-BE49-F238E27FC236}">
+                <a16:creationId xmlns:a16="http://schemas.microsoft.com/office/drawing/2014/main" id="{2B5704F9-C225-18AC-86FA-EF8E1E7C6D0D}"/>
+              </a:ext>
+            </a:extLst>
+          </p:cNvPr>
+          <p:cNvSpPr>
+            <a:spLocks noGrp="1"/>
+          </p:cNvSpPr>
+          <p:nvPr>
+            <p:ph type="title"/>
+          </p:nvPr>
+        </p:nvSpPr>
+        <p:spPr>
+          <a:xfrm>
+            <a:off x="722376" y="658368"/>
+            <a:ext cx="10744200" cy="640080"/>
+          </a:xfrm>
+        </p:spPr>
+        <p:txBody>
+          <a:bodyPr/>
+          <a:lstStyle/>
+          <a:p>
+            <a:r>
+              <a:rPr lang="en-US" sz="2800"/>
+              <a:t>Hardware Validation: CW305 Setup</a:t>
+            </a:r>
+            <a:endParaRPr lang="en-US" sz="2800" b="1">
+              <a:cs typeface="Arial"/>
+            </a:endParaRPr>
+          </a:p>
+        </p:txBody>
+      </p:sp>
+      <p:sp>
+        <p:nvSpPr>
+          <p:cNvPr id="3" name="TextBox 2">
+            <a:extLst>
+              <a:ext uri="{FF2B5EF4-FFF2-40B4-BE49-F238E27FC236}">
+                <a16:creationId xmlns:a16="http://schemas.microsoft.com/office/drawing/2014/main" id="{EAD24B97-AF18-D760-3805-23A4FC381519}"/>
+              </a:ext>
+            </a:extLst>
+          </p:cNvPr>
+          <p:cNvSpPr txBox="1"/>
+          <p:nvPr/>
+        </p:nvSpPr>
+        <p:spPr>
+          <a:xfrm>
+            <a:off x="684830" y="1786890"/>
+            <a:ext cx="10745413" cy="2301336"/>
+          </a:xfrm>
+          <a:prstGeom prst="rect">
+            <a:avLst/>
+          </a:prstGeom>
+          <a:noFill/>
+        </p:spPr>
+        <p:txBody>
+          <a:bodyPr wrap="square" lIns="91440" tIns="45720" rIns="91440" bIns="45720" anchor="t">
+            <a:spAutoFit/>
+          </a:bodyPr>
+          <a:lstStyle/>
+          <a:p>
+            <a:pPr>
+              <a:lnSpc>
+                <a:spcPct val="105000"/>
+              </a:lnSpc>
+              <a:spcAft>
+                <a:spcPts val="1200"/>
+              </a:spcAft>
+            </a:pPr>
+            <a:r>
+              <a:rPr lang="en-US" sz="2000" b="1"/>
+              <a:t>Hardware setup</a:t>
+            </a:r>
+            <a:endParaRPr lang="en-US">
+              <a:cs typeface="Arial"/>
+            </a:endParaRPr>
+          </a:p>
+          <a:p>
+            <a:pPr marL="342900" indent="-342900">
+              <a:lnSpc>
+                <a:spcPct val="105000"/>
+              </a:lnSpc>
+              <a:spcAft>
+                <a:spcPts val="1200"/>
+              </a:spcAft>
+              <a:buFont typeface="Arial"/>
+              <a:buChar char="•"/>
+            </a:pPr>
+            <a:r>
+              <a:rPr lang="en-US" sz="2000">
+                <a:solidFill>
+                  <a:srgbClr val="202020"/>
+                </a:solidFill>
+                <a:cs typeface="Arial"/>
+              </a:rPr>
+              <a:t>CW 305 </a:t>
+            </a:r>
+            <a:r>
+              <a:rPr lang="en-US" sz="2000" err="1">
+                <a:solidFill>
+                  <a:srgbClr val="202020"/>
+                </a:solidFill>
+                <a:cs typeface="Arial"/>
+              </a:rPr>
+              <a:t>Artix</a:t>
+            </a:r>
+            <a:r>
+              <a:rPr lang="en-US" sz="2000">
+                <a:solidFill>
+                  <a:srgbClr val="202020"/>
+                </a:solidFill>
+                <a:cs typeface="Arial"/>
+              </a:rPr>
+              <a:t>-7 100T with CV32E40P RISC-V soft-core</a:t>
+            </a:r>
+          </a:p>
+          <a:p>
+            <a:pPr marL="342900" indent="-342900">
+              <a:lnSpc>
+                <a:spcPct val="105000"/>
+              </a:lnSpc>
+              <a:spcAft>
+                <a:spcPts val="1200"/>
+              </a:spcAft>
+              <a:buFont typeface="Arial"/>
+              <a:buChar char="•"/>
+            </a:pPr>
+            <a:r>
+              <a:rPr lang="en-US" sz="2000" err="1">
+                <a:solidFill>
+                  <a:srgbClr val="202020"/>
+                </a:solidFill>
+                <a:cs typeface="Arial"/>
+              </a:rPr>
+              <a:t>ChipWhisperer</a:t>
+            </a:r>
+            <a:r>
+              <a:rPr lang="en-US" sz="2000">
+                <a:solidFill>
+                  <a:srgbClr val="202020"/>
+                </a:solidFill>
+                <a:cs typeface="Arial"/>
+              </a:rPr>
+              <a:t>-Lite scope, 50 MHz clock, ADC at 200 MHz</a:t>
+            </a:r>
+          </a:p>
+          <a:p>
+            <a:pPr marL="342900" indent="-342900">
+              <a:lnSpc>
+                <a:spcPct val="105000"/>
+              </a:lnSpc>
+              <a:spcAft>
+                <a:spcPts val="1200"/>
+              </a:spcAft>
+              <a:buFont typeface="Arial"/>
+              <a:buChar char="•"/>
+            </a:pPr>
+            <a:r>
+              <a:rPr lang="en-US" sz="2000">
+                <a:solidFill>
+                  <a:srgbClr val="202020"/>
+                </a:solidFill>
+                <a:cs typeface="Arial"/>
+              </a:rPr>
+              <a:t>Gain:30 dB</a:t>
+            </a:r>
+          </a:p>
+          <a:p>
+            <a:pPr marL="342900" indent="-342900">
+              <a:lnSpc>
+                <a:spcPct val="105000"/>
+              </a:lnSpc>
+              <a:spcAft>
+                <a:spcPts val="1200"/>
+              </a:spcAft>
+              <a:buFont typeface="Arial"/>
+              <a:buChar char="•"/>
+            </a:pPr>
+            <a:r>
+              <a:rPr lang="en-US" sz="2000">
+                <a:solidFill>
+                  <a:srgbClr val="202020"/>
+                </a:solidFill>
+                <a:cs typeface="Arial"/>
+              </a:rPr>
+              <a:t>Three bitstreams tested: AES_100t (reference), Baseline RI5CY, DOM-protected RI5CY</a:t>
+            </a:r>
+            <a:endParaRPr lang="en-US"/>
+          </a:p>
+        </p:txBody>
+      </p:sp>
+      <p:sp>
+        <p:nvSpPr>
+          <p:cNvPr id="4" name="TextBox 3">
+            <a:extLst>
+              <a:ext uri="{FF2B5EF4-FFF2-40B4-BE49-F238E27FC236}">
+                <a16:creationId xmlns:a16="http://schemas.microsoft.com/office/drawing/2014/main" id="{EA9887F9-8596-0AD4-8485-D5E6BC47CEDC}"/>
+              </a:ext>
+            </a:extLst>
+          </p:cNvPr>
+          <p:cNvSpPr txBox="1"/>
+          <p:nvPr/>
+        </p:nvSpPr>
+        <p:spPr>
+          <a:xfrm>
+            <a:off x="725939" y="1135327"/>
+            <a:ext cx="10739004" cy="914096"/>
+          </a:xfrm>
+          <a:prstGeom prst="rect">
+            <a:avLst/>
+          </a:prstGeom>
+          <a:noFill/>
+        </p:spPr>
+        <p:txBody>
+          <a:bodyPr rot="0" spcFirstLastPara="0" vertOverflow="overflow" horzOverflow="overflow" vert="horz" wrap="square" lIns="0" tIns="0" rIns="0" bIns="0" numCol="1" spcCol="0" rtlCol="0" fromWordArt="0" anchor="t" anchorCtr="0" forceAA="0" compatLnSpc="1">
+            <a:prstTxWarp prst="textNoShape">
+              <a:avLst/>
+            </a:prstTxWarp>
+            <a:spAutoFit/>
+          </a:bodyPr>
+          <a:lstStyle/>
+          <a:p>
+            <a:r>
+              <a:rPr lang="en-US" sz="2000" b="1">
+                <a:solidFill>
+                  <a:srgbClr val="00B0F0"/>
+                </a:solidFill>
+              </a:rPr>
+              <a:t>From simulation to silicon - Validation on CW305 Artix-7 FPGA with CV32E40P RISC-V soft core</a:t>
+            </a:r>
+            <a:endParaRPr lang="en-US" sz="2000" b="1">
+              <a:solidFill>
+                <a:srgbClr val="00B0F0"/>
+              </a:solidFill>
+              <a:cs typeface="Arial"/>
+            </a:endParaRPr>
+          </a:p>
+          <a:p>
+            <a:pPr algn="l">
+              <a:lnSpc>
+                <a:spcPct val="90000"/>
+              </a:lnSpc>
+              <a:spcBef>
+                <a:spcPts val="600"/>
+              </a:spcBef>
+              <a:spcAft>
+                <a:spcPts val="600"/>
+              </a:spcAft>
+            </a:pPr>
+            <a:endParaRPr lang="en-US" sz="1600" err="1"/>
+          </a:p>
+        </p:txBody>
+      </p:sp>
+      <p:sp>
+        <p:nvSpPr>
+          <p:cNvPr id="5" name="TextBox 4">
+            <a:extLst>
+              <a:ext uri="{FF2B5EF4-FFF2-40B4-BE49-F238E27FC236}">
+                <a16:creationId xmlns:a16="http://schemas.microsoft.com/office/drawing/2014/main" id="{E4B0D05B-BCB8-D440-FD62-7757D84DB4CA}"/>
+              </a:ext>
+            </a:extLst>
+          </p:cNvPr>
+          <p:cNvSpPr txBox="1"/>
+          <p:nvPr/>
+        </p:nvSpPr>
+        <p:spPr>
+          <a:xfrm>
+            <a:off x="723900" y="4181475"/>
+            <a:ext cx="10668000" cy="2329869"/>
+          </a:xfrm>
+          <a:prstGeom prst="rect">
+            <a:avLst/>
+          </a:prstGeom>
+          <a:noFill/>
+        </p:spPr>
+        <p:txBody>
+          <a:bodyPr rot="0" spcFirstLastPara="0" vertOverflow="overflow" horzOverflow="overflow" vert="horz" wrap="square" lIns="0" tIns="0" rIns="0" bIns="0" numCol="1" spcCol="0" rtlCol="0" fromWordArt="0" anchor="t" anchorCtr="0" forceAA="0" compatLnSpc="1">
+            <a:prstTxWarp prst="textNoShape">
+              <a:avLst/>
+            </a:prstTxWarp>
+            <a:spAutoFit/>
+          </a:bodyPr>
+          <a:lstStyle/>
+          <a:p>
+            <a:r>
+              <a:rPr lang="en-US" sz="2000" b="1">
+                <a:latin typeface="Arial"/>
+              </a:rPr>
+              <a:t>Attack Method</a:t>
+            </a:r>
+            <a:endParaRPr lang="en-US">
+              <a:cs typeface="Arial"/>
+            </a:endParaRPr>
+          </a:p>
+          <a:p>
+            <a:pPr marL="285750" indent="-285750">
+              <a:lnSpc>
+                <a:spcPct val="90000"/>
+              </a:lnSpc>
+              <a:spcBef>
+                <a:spcPts val="600"/>
+              </a:spcBef>
+              <a:spcAft>
+                <a:spcPts val="600"/>
+              </a:spcAft>
+              <a:buFont typeface="Arial"/>
+              <a:buChar char="•"/>
+            </a:pPr>
+            <a:r>
+              <a:rPr lang="en-US" sz="2000">
+                <a:cs typeface="Arial" panose="020B0604020202020204"/>
+              </a:rPr>
+              <a:t>CPA: </a:t>
+            </a:r>
+            <a:r>
+              <a:rPr lang="en-US" sz="2000" err="1">
+                <a:cs typeface="Arial" panose="020B0604020202020204"/>
+              </a:rPr>
+              <a:t>sbox_output</a:t>
+            </a:r>
+            <a:r>
+              <a:rPr lang="en-US" sz="2000">
+                <a:cs typeface="Arial" panose="020B0604020202020204"/>
+              </a:rPr>
+              <a:t> leakage model and </a:t>
+            </a:r>
+            <a:r>
+              <a:rPr lang="en-US" sz="2000" err="1">
+                <a:cs typeface="Arial" panose="020B0604020202020204"/>
+              </a:rPr>
+              <a:t>last_round_state_diff</a:t>
+            </a:r>
+            <a:r>
+              <a:rPr lang="en-US" sz="2000">
+                <a:cs typeface="Arial" panose="020B0604020202020204"/>
+              </a:rPr>
+              <a:t> leakage model</a:t>
+            </a:r>
+          </a:p>
+          <a:p>
+            <a:pPr marL="285750" indent="-285750">
+              <a:lnSpc>
+                <a:spcPct val="90000"/>
+              </a:lnSpc>
+              <a:spcBef>
+                <a:spcPts val="600"/>
+              </a:spcBef>
+              <a:spcAft>
+                <a:spcPts val="600"/>
+              </a:spcAft>
+              <a:buFont typeface="Arial"/>
+              <a:buChar char="•"/>
+            </a:pPr>
+            <a:r>
+              <a:rPr lang="en-US" sz="2000">
+                <a:cs typeface="Arial" panose="020B0604020202020204"/>
+              </a:rPr>
+              <a:t>Window: samples 0-80 (round 1 S-Box)</a:t>
+            </a:r>
+          </a:p>
+          <a:p>
+            <a:pPr marL="285750" indent="-285750">
+              <a:lnSpc>
+                <a:spcPct val="90000"/>
+              </a:lnSpc>
+              <a:spcBef>
+                <a:spcPts val="600"/>
+              </a:spcBef>
+              <a:spcAft>
+                <a:spcPts val="600"/>
+              </a:spcAft>
+              <a:buFont typeface="Arial"/>
+              <a:buChar char="•"/>
+            </a:pPr>
+            <a:r>
+              <a:rPr lang="en-US" sz="2000">
+                <a:cs typeface="Arial" panose="020B0604020202020204"/>
+              </a:rPr>
+              <a:t>TVLA: Welch t-test, fixed vs random PT</a:t>
+            </a:r>
+          </a:p>
+          <a:p>
+            <a:pPr marL="285750" indent="-285750">
+              <a:lnSpc>
+                <a:spcPct val="90000"/>
+              </a:lnSpc>
+              <a:spcBef>
+                <a:spcPts val="600"/>
+              </a:spcBef>
+              <a:spcAft>
+                <a:spcPts val="600"/>
+              </a:spcAft>
+              <a:buFont typeface="Arial"/>
+              <a:buChar char="•"/>
+            </a:pPr>
+            <a:r>
+              <a:rPr lang="en-US" sz="2000">
+                <a:cs typeface="Arial" panose="020B0604020202020204"/>
+              </a:rPr>
+              <a:t>Threshold: |t| &gt; 4.5 </a:t>
+            </a:r>
+          </a:p>
+          <a:p>
+            <a:pPr>
+              <a:lnSpc>
+                <a:spcPct val="90000"/>
+              </a:lnSpc>
+              <a:spcBef>
+                <a:spcPts val="600"/>
+              </a:spcBef>
+              <a:spcAft>
+                <a:spcPts val="600"/>
+              </a:spcAft>
+            </a:pPr>
+            <a:endParaRPr lang="en-US" sz="1600">
+              <a:cs typeface="Arial"/>
+            </a:endParaRPr>
+          </a:p>
+        </p:txBody>
+      </p:sp>
+    </p:spTree>
+    <p:extLst>
+      <p:ext uri="{BB962C8B-B14F-4D97-AF65-F5344CB8AC3E}">
+        <p14:creationId xmlns:p14="http://schemas.microsoft.com/office/powerpoint/2010/main" val="2476092217"/>
+      </p:ext>
+    </p:extLst>
+  </p:cSld>
+  <p:clrMapOvr>
+    <a:masterClrMapping/>
+  </p:clrMapOvr>
+</p:sld>
+</file>
+
+<file path=ppt/slides/slide21.xml><?xml version="1.0" encoding="utf-8"?>
 <p:sld xmlns:a="http://schemas.openxmlformats.org/drawingml/2006/main" xmlns:r="http://schemas.openxmlformats.org/officeDocument/2006/relationships" xmlns:p="http://schemas.openxmlformats.org/presentationml/2006/main">
   <p:cSld>
     <p:spTree>
@@ -32146,7 +32305,7 @@
 </p:sld>
 </file>
 
-<file path=ppt/slides/slide21.xml><?xml version="1.0" encoding="utf-8"?>
+<file path=ppt/slides/slide22.xml><?xml version="1.0" encoding="utf-8"?>
 <p:sld xmlns:a="http://schemas.openxmlformats.org/drawingml/2006/main" xmlns:r="http://schemas.openxmlformats.org/officeDocument/2006/relationships" xmlns:p="http://schemas.openxmlformats.org/presentationml/2006/main">
   <p:cSld>
     <p:spTree>
@@ -32555,7 +32714,7 @@
 </p:sld>
 </file>
 
-<file path=ppt/slides/slide22.xml><?xml version="1.0" encoding="utf-8"?>
+<file path=ppt/slides/slide23.xml><?xml version="1.0" encoding="utf-8"?>
 <p:sld xmlns:a="http://schemas.openxmlformats.org/drawingml/2006/main" xmlns:r="http://schemas.openxmlformats.org/officeDocument/2006/relationships" xmlns:p="http://schemas.openxmlformats.org/presentationml/2006/main">
   <p:cSld>
     <p:spTree>
@@ -33002,7 +33161,7 @@
 </p:sld>
 </file>
 
-<file path=ppt/slides/slide23.xml><?xml version="1.0" encoding="utf-8"?>
+<file path=ppt/slides/slide24.xml><?xml version="1.0" encoding="utf-8"?>
 <p:sld xmlns:a="http://schemas.openxmlformats.org/drawingml/2006/main" xmlns:r="http://schemas.openxmlformats.org/officeDocument/2006/relationships" xmlns:p="http://schemas.openxmlformats.org/presentationml/2006/main">
   <p:cSld>
     <p:spTree>
@@ -33484,7 +33643,7 @@
 </p:sld>
 </file>
 
-<file path=ppt/slides/slide24.xml><?xml version="1.0" encoding="utf-8"?>
+<file path=ppt/slides/slide25.xml><?xml version="1.0" encoding="utf-8"?>
 <p:sld xmlns:a="http://schemas.openxmlformats.org/drawingml/2006/main" xmlns:r="http://schemas.openxmlformats.org/officeDocument/2006/relationships" xmlns:p="http://schemas.openxmlformats.org/presentationml/2006/main">
   <p:cSld>
     <p:spTree>
@@ -33810,7 +33969,7 @@
 </p:sld>
 </file>
 
-<file path=ppt/slides/slide25.xml><?xml version="1.0" encoding="utf-8"?>
+<file path=ppt/slides/slide26.xml><?xml version="1.0" encoding="utf-8"?>
 <p:sld xmlns:a="http://schemas.openxmlformats.org/drawingml/2006/main" xmlns:r="http://schemas.openxmlformats.org/officeDocument/2006/relationships" xmlns:p="http://schemas.openxmlformats.org/presentationml/2006/main">
   <p:cSld>
     <p:spTree>
